--- a/business-case-source/RW_Business_Case_Microsoft.pptx
+++ b/business-case-source/RW_Business_Case_Microsoft.pptx
@@ -18,6 +18,10 @@
     <p:sldId id="266" r:id="rId12"/>
     <p:sldId id="267" r:id="rId13"/>
     <p:sldId id="268" r:id="rId14"/>
+    <p:sldId id="269" r:id="rId20"/>
+    <p:sldId id="270" r:id="rId21"/>
+    <p:sldId id="271" r:id="rId22"/>
+    <p:sldId id="272" r:id="rId23"/>
   </p:sldIdLst>
   <p:notesMasterIdLst>
     <p:notesMasterId r:id="rId15"/>
@@ -1967,6 +1971,10 @@
             <a:prstDash val="solid"/>
           </a:ln>
         </p:spPr>
+        <p:txBody>
+          <a:bodyPr/>
+          <a:p/>
+        </p:txBody>
       </p:sp>
       <p:sp>
         <p:nvSpPr>
@@ -1992,6 +2000,10 @@
             <a:prstDash val="solid"/>
           </a:ln>
         </p:spPr>
+        <p:txBody>
+          <a:bodyPr/>
+          <a:p/>
+        </p:txBody>
       </p:sp>
       <p:sp>
         <p:nvSpPr>
@@ -2017,6 +2029,10 @@
             <a:prstDash val="solid"/>
           </a:ln>
         </p:spPr>
+        <p:txBody>
+          <a:bodyPr/>
+          <a:p/>
+        </p:txBody>
       </p:sp>
       <p:sp>
         <p:nvSpPr>
@@ -2168,7 +2184,7 @@
                 <a:ea typeface="Roboto" pitchFamily="34" charset="-122"/>
                 <a:cs typeface="Roboto" pitchFamily="34" charset="-120"/>
               </a:rPr>
-              <a:t>A business case for evolving our employee engagement strategy.</a:t>
+              <a:t>A case for sending six employees to the Washington D.C. Regional Campus.</a:t>
             </a:r>
             <a:endParaRPr lang="en-US" sz="1800" dirty="0"/>
           </a:p>
@@ -4377,6 +4393,10 @@
             <a:prstDash val="solid"/>
           </a:ln>
         </p:spPr>
+        <p:txBody>
+          <a:bodyPr/>
+          <a:p/>
+        </p:txBody>
       </p:sp>
       <p:sp>
         <p:nvSpPr>
@@ -4414,7 +4434,7 @@
                 <a:ea typeface="Roboto" pitchFamily="34" charset="-122"/>
                 <a:cs typeface="Roboto" pitchFamily="34" charset="-120"/>
               </a:rPr>
-              <a:t>We will gain a replicable methodology for building manager-employee trust and fostering cross-functional connection. This approach also provides the framework needed to finally measure volunteering's contribution to employee retention and engagement.</a:t>
+              <a:t>A replicable methodology for building manager-employee trust and connecting people across teams. The framework that lets us measure volunteering's contribution to retention and engagement, not just participation.</a:t>
             </a:r>
             <a:endParaRPr lang="en-US" sz="1300" dirty="0"/>
           </a:p>
@@ -4444,6 +4464,10 @@
             <a:prstDash val="solid"/>
           </a:ln>
         </p:spPr>
+        <p:txBody>
+          <a:bodyPr/>
+          <a:p/>
+        </p:txBody>
       </p:sp>
       <p:sp>
         <p:nvSpPr>
@@ -4469,6 +4493,10 @@
             <a:prstDash val="solid"/>
           </a:ln>
         </p:spPr>
+        <p:txBody>
+          <a:bodyPr/>
+          <a:p/>
+        </p:txBody>
       </p:sp>
       <p:sp>
         <p:nvSpPr>
@@ -4545,7 +4573,7 @@
                 <a:ea typeface="Roboto" pitchFamily="34" charset="-122"/>
                 <a:cs typeface="Roboto" pitchFamily="34" charset="-120"/>
               </a:rPr>
-              <a:t>Trained champions become standard-bearers across regions and business units. They coach peers and close the gap between aspiration and ground-level experience.</a:t>
+              <a:t>Trained champions set the standard across regions and business units. They coach peers and close the gap between what we aspire to and what employees actually experience.</a:t>
             </a:r>
             <a:endParaRPr lang="en-US" sz="1000" dirty="0"/>
           </a:p>
@@ -4575,6 +4603,10 @@
             <a:prstDash val="solid"/>
           </a:ln>
         </p:spPr>
+        <p:txBody>
+          <a:bodyPr/>
+          <a:p/>
+        </p:txBody>
       </p:sp>
       <p:sp>
         <p:nvSpPr>
@@ -4600,6 +4632,10 @@
             <a:prstDash val="solid"/>
           </a:ln>
         </p:spPr>
+        <p:txBody>
+          <a:bodyPr/>
+          <a:p/>
+        </p:txBody>
       </p:sp>
       <p:sp>
         <p:nvSpPr>
@@ -4676,7 +4712,7 @@
                 <a:ea typeface="Roboto" pitchFamily="34" charset="-122"/>
                 <a:cs typeface="Roboto" pitchFamily="34" charset="-120"/>
               </a:rPr>
-              <a:t>Measurement architecture built for ESG reporting, talent analytics, and executive dashboards — outcomes, not participation theater.</a:t>
+              <a:t>Measurement architecture built for ESG reporting, talent analytics, and executive dashboards. Outcomes, not participation theater.</a:t>
             </a:r>
             <a:endParaRPr lang="en-US" sz="1000" dirty="0"/>
           </a:p>
@@ -4706,6 +4742,10 @@
             <a:prstDash val="solid"/>
           </a:ln>
         </p:spPr>
+        <p:txBody>
+          <a:bodyPr/>
+          <a:p/>
+        </p:txBody>
       </p:sp>
       <p:sp>
         <p:nvSpPr>
@@ -4731,6 +4771,10 @@
             <a:prstDash val="solid"/>
           </a:ln>
         </p:spPr>
+        <p:txBody>
+          <a:bodyPr/>
+          <a:p/>
+        </p:txBody>
       </p:sp>
       <p:sp>
         <p:nvSpPr>
@@ -4807,7 +4851,7 @@
                 <a:ea typeface="Roboto" pitchFamily="34" charset="-122"/>
                 <a:cs typeface="Roboto" pitchFamily="34" charset="-120"/>
               </a:rPr>
-              <a:t>Structured training, a credential, and 6 months of peer support. Retention of trained leaders is itself an ROI story.</a:t>
+              <a:t>Structured training, a credential, and six months of peer support. Retention of trained leaders is itself an ROI story.</a:t>
             </a:r>
             <a:endParaRPr lang="en-US" sz="1000" dirty="0"/>
           </a:p>
@@ -4837,6 +4881,10 @@
             <a:prstDash val="solid"/>
           </a:ln>
         </p:spPr>
+        <p:txBody>
+          <a:bodyPr/>
+          <a:p/>
+        </p:txBody>
       </p:sp>
       <p:sp>
         <p:nvSpPr>
@@ -4862,6 +4910,10 @@
             <a:prstDash val="solid"/>
           </a:ln>
         </p:spPr>
+        <p:txBody>
+          <a:bodyPr/>
+          <a:p/>
+        </p:txBody>
       </p:sp>
       <p:sp>
         <p:nvSpPr>
@@ -4968,6 +5020,10 @@
             <a:prstDash val="solid"/>
           </a:ln>
         </p:spPr>
+        <p:txBody>
+          <a:bodyPr/>
+          <a:p/>
+        </p:txBody>
       </p:sp>
       <p:sp>
         <p:nvSpPr>
@@ -4993,6 +5049,10 @@
             <a:prstDash val="solid"/>
           </a:ln>
         </p:spPr>
+        <p:txBody>
+          <a:bodyPr/>
+          <a:p/>
+        </p:txBody>
       </p:sp>
       <p:sp>
         <p:nvSpPr>
@@ -5099,6 +5159,10 @@
             <a:prstDash val="solid"/>
           </a:ln>
         </p:spPr>
+        <p:txBody>
+          <a:bodyPr/>
+          <a:p/>
+        </p:txBody>
       </p:sp>
       <p:sp>
         <p:nvSpPr>
@@ -5124,6 +5188,10 @@
             <a:prstDash val="solid"/>
           </a:ln>
         </p:spPr>
+        <p:txBody>
+          <a:bodyPr/>
+          <a:p/>
+        </p:txBody>
       </p:sp>
       <p:sp>
         <p:nvSpPr>
@@ -5228,6 +5296,10 @@
             <a:prstDash val="solid"/>
           </a:ln>
         </p:spPr>
+        <p:txBody>
+          <a:bodyPr/>
+          <a:p/>
+        </p:txBody>
       </p:sp>
       <p:sp>
         <p:nvSpPr>
@@ -5363,6 +5435,10 @@
             <a:prstDash val="solid"/>
           </a:ln>
         </p:spPr>
+        <p:txBody>
+          <a:bodyPr/>
+          <a:p/>
+        </p:txBody>
       </p:sp>
       <p:sp>
         <p:nvSpPr>
@@ -5467,6 +5543,10 @@
             <a:prstDash val="solid"/>
           </a:ln>
         </p:spPr>
+        <p:txBody>
+          <a:bodyPr/>
+          <a:p/>
+        </p:txBody>
       </p:sp>
       <p:sp>
         <p:nvSpPr>
@@ -5504,7 +5584,7 @@
                 <a:ea typeface="Roboto" pitchFamily="34" charset="-122"/>
                 <a:cs typeface="Roboto" pitchFamily="34" charset="-120"/>
               </a:rPr>
-              <a:t>We are requesting approval to send six employees to the upcoming RW Institute regional campus. The cost is within the $15,000-$30,000 budget sponsored by Paul Apostle. The team will return with a new playbook for volunteer engagement designed to address our specific measurement and cultural challenges.</a:t>
+              <a:t>Six employees, total cost within the $15,000–$30,000 budget Paul Apostle has sponsored. The team will return with a playbook for volunteer engagement built around our specific measurement and culture gaps.</a:t>
             </a:r>
             <a:endParaRPr lang="en-US" sz="1400" dirty="0"/>
           </a:p>
@@ -6088,7 +6168,7 @@
                 <a:ea typeface="Roboto" pitchFamily="34" charset="-122"/>
                 <a:cs typeface="Roboto" pitchFamily="34" charset="-120"/>
               </a:rPr>
-              <a:t>Behavioral science citations</a:t>
+              <a:t>Further reading</a:t>
             </a:r>
             <a:endParaRPr lang="en-US" sz="2800" dirty="0"/>
           </a:p>
@@ -6116,6 +6196,10 @@
             <a:prstDash val="solid"/>
           </a:ln>
         </p:spPr>
+        <p:txBody>
+          <a:bodyPr/>
+          <a:p/>
+        </p:txBody>
       </p:sp>
       <p:sp>
         <p:nvSpPr>
@@ -6150,7 +6234,7 @@
                 <a:ea typeface="Roboto" pitchFamily="34" charset="-122"/>
                 <a:cs typeface="Roboto" pitchFamily="34" charset="-120"/>
               </a:rPr>
-              <a:t>Footnote numbers in slide text correspond to entries below.</a:t>
+              <a:t>Sources that support the claims in this deck. Annotated commentary on the pages that follow.</a:t>
             </a:r>
             <a:endParaRPr lang="en-US" sz="1100" dirty="0"/>
           </a:p>
@@ -7262,6 +7346,5010 @@
                 <a:cs typeface="Roboto Condensed" pitchFamily="34" charset="-120"/>
               </a:rPr>
               <a:t>13</a:t>
+            </a:r>
+            <a:endParaRPr lang="en-US" sz="900" dirty="0"/>
+          </a:p>
+        </p:txBody>
+      </p:sp>
+    </p:spTree>
+  </p:cSld>
+  <p:clrMapOvr>
+    <a:masterClrMapping/>
+  </p:clrMapOvr>
+</p:sld>
+</file>
+
+<file path=ppt/slides/slide14.xml><?xml version="1.0" encoding="utf-8"?>
+<p:sld xmlns:a="http://schemas.openxmlformats.org/drawingml/2006/main" xmlns:p="http://schemas.openxmlformats.org/presentationml/2006/main" xmlns:r="http://schemas.openxmlformats.org/officeDocument/2006/relationships">
+  <p:cSld>
+    <p:spTree>
+      <p:nvGrpSpPr>
+        <p:cNvPr id="1" name=""/>
+        <p:cNvGrpSpPr/>
+        <p:nvPr/>
+      </p:nvGrpSpPr>
+      <p:grpSpPr/>
+      <p:sp>
+        <p:nvSpPr>
+          <p:cNvPr id="2" name="Text 0"/>
+          <p:cNvSpPr/>
+          <p:nvPr/>
+        </p:nvSpPr>
+        <p:spPr>
+          <a:xfrm>
+            <a:off x="548640" y="457200"/>
+            <a:ext cx="10972800" cy="320040"/>
+          </a:xfrm>
+          <a:prstGeom prst="rect">
+            <a:avLst/>
+          </a:prstGeom>
+          <a:noFill/>
+          <a:ln/>
+        </p:spPr>
+        <p:txBody>
+          <a:bodyPr wrap="square" rtlCol="0" anchor="ctr"/>
+          <a:lstStyle/>
+          <a:p>
+            <a:pPr indent="0" marL="0">
+              <a:buNone/>
+            </a:pPr>
+            <a:r>
+              <a:rPr lang="en-US" sz="1000" b="1" spc="400" kern="0" dirty="0">
+                <a:solidFill>
+                  <a:srgbClr val="EC5C2A"/>
+                </a:solidFill>
+                <a:latin typeface="Roboto" pitchFamily="34" charset="0"/>
+                <a:ea typeface="Roboto" pitchFamily="34" charset="-122"/>
+                <a:cs typeface="Roboto" pitchFamily="34" charset="-120"/>
+              </a:rPr>
+              <a:t>REFERENCES</a:t>
+            </a:r>
+            <a:endParaRPr lang="en-US" sz="1000" dirty="0"/>
+          </a:p>
+        </p:txBody>
+      </p:sp>
+      <p:sp>
+        <p:nvSpPr>
+          <p:cNvPr id="3" name="Text 1"/>
+          <p:cNvSpPr/>
+          <p:nvPr/>
+        </p:nvSpPr>
+        <p:spPr>
+          <a:xfrm>
+            <a:off x="548640" y="868680"/>
+            <a:ext cx="10972800" cy="960120"/>
+          </a:xfrm>
+          <a:prstGeom prst="rect">
+            <a:avLst/>
+          </a:prstGeom>
+          <a:noFill/>
+          <a:ln/>
+        </p:spPr>
+        <p:txBody>
+          <a:bodyPr wrap="square" rtlCol="0" anchor="ctr"/>
+          <a:lstStyle/>
+          <a:p>
+            <a:pPr indent="0" marL="0">
+              <a:buNone/>
+            </a:pPr>
+            <a:r>
+              <a:rPr lang="en-US" sz="2800" b="1" dirty="0">
+                <a:solidFill>
+                  <a:srgbClr val="3C3F44"/>
+                </a:solidFill>
+                <a:latin typeface="Roboto" pitchFamily="34" charset="0"/>
+                <a:ea typeface="Roboto" pitchFamily="34" charset="-122"/>
+                <a:cs typeface="Roboto" pitchFamily="34" charset="-120"/>
+              </a:rPr>
+              <a:t>Further reading</a:t>
+            </a:r>
+            <a:endParaRPr lang="en-US" sz="2800" dirty="0"/>
+          </a:p>
+        </p:txBody>
+      </p:sp>
+      <p:sp>
+        <p:nvSpPr>
+          <p:cNvPr id="4" name="Shape 2"/>
+          <p:cNvSpPr/>
+          <p:nvPr/>
+        </p:nvSpPr>
+        <p:spPr>
+          <a:xfrm>
+            <a:off x="548640" y="1874520"/>
+            <a:ext cx="914400" cy="0"/>
+          </a:xfrm>
+          <a:prstGeom prst="line">
+            <a:avLst/>
+          </a:prstGeom>
+          <a:noFill/>
+          <a:ln w="38100">
+            <a:solidFill>
+              <a:srgbClr val="EC5C2A"/>
+            </a:solidFill>
+            <a:prstDash val="solid"/>
+          </a:ln>
+        </p:spPr>
+        <p:txBody>
+          <a:bodyPr/>
+          <a:p/>
+        </p:txBody>
+      </p:sp>
+      <p:sp>
+        <p:nvSpPr>
+          <p:cNvPr id="5" name="Text 3"/>
+          <p:cNvSpPr/>
+          <p:nvPr/>
+        </p:nvSpPr>
+        <p:spPr>
+          <a:xfrm>
+            <a:off x="548640" y="2103120"/>
+            <a:ext cx="10972800" cy="365760"/>
+          </a:xfrm>
+          <a:prstGeom prst="rect">
+            <a:avLst/>
+          </a:prstGeom>
+          <a:noFill/>
+          <a:ln/>
+        </p:spPr>
+        <p:txBody>
+          <a:bodyPr wrap="square" rtlCol="0" anchor="ctr"/>
+          <a:lstStyle/>
+          <a:p>
+            <a:pPr indent="0" marL="0">
+              <a:buNone/>
+            </a:pPr>
+            <a:r>
+              <a:rPr lang="en-US" sz="1100" i="1" dirty="0">
+                <a:solidFill>
+                  <a:srgbClr val="6B6B6F"/>
+                </a:solidFill>
+                <a:latin typeface="Roboto" pitchFamily="34" charset="0"/>
+                <a:ea typeface="Roboto" pitchFamily="34" charset="-122"/>
+                <a:cs typeface="Roboto" pitchFamily="34" charset="-120"/>
+              </a:rPr>
+              <a:t>Why these sources support the claims in this deck. Entries [1], [2], [3], [4].</a:t>
+            </a:r>
+            <a:endParaRPr lang="en-US" sz="1100" dirty="0"/>
+          </a:p>
+        </p:txBody>
+      </p:sp>
+      <p:sp>
+        <p:nvSpPr>
+          <p:cNvPr id="6" name="Text 4"/>
+          <p:cNvSpPr/>
+          <p:nvPr/>
+        </p:nvSpPr>
+        <p:spPr>
+          <a:xfrm>
+            <a:off x="548640" y="2606040"/>
+            <a:ext cx="5486400" cy="3657600"/>
+          </a:xfrm>
+          <a:prstGeom prst="rect">
+            <a:avLst/>
+          </a:prstGeom>
+          <a:noFill/>
+          <a:ln/>
+        </p:spPr>
+        <p:txBody>
+          <a:bodyPr wrap="square" rtlCol="0" anchor="ctr"/>
+          <a:lstStyle/>
+          <a:p>
+            <a:pPr indent="0" marL="0">
+              <a:lnSpc>
+                <a:spcPct val="130000"/>
+              </a:lnSpc>
+              <a:buNone/>
+            </a:pPr>
+            <a:r>
+              <a:rPr lang="en-US" sz="900" b="1" dirty="0">
+                <a:solidFill>
+                  <a:srgbClr val="EC5C2A"/>
+                </a:solidFill>
+                <a:latin typeface="Roboto Condensed" pitchFamily="34" charset="0"/>
+                <a:ea typeface="Roboto Condensed" pitchFamily="34" charset="-122"/>
+                <a:cs typeface="Roboto Condensed" pitchFamily="34" charset="-120"/>
+              </a:rPr>
+              <a:t>[1] </a:t>
+            </a:r>
+            <a:pPr indent="0" marL="0">
+              <a:lnSpc>
+                <a:spcPct val="130000"/>
+              </a:lnSpc>
+              <a:buNone/>
+            </a:pPr>
+            <a:r>
+              <a:rPr lang="en-US" sz="900" dirty="0" b="0">
+                <a:solidFill>
+                  <a:srgbClr val="404040"/>
+                </a:solidFill>
+                <a:latin typeface="Roboto Condensed" pitchFamily="34" charset="0"/>
+                <a:ea typeface="Roboto Condensed" pitchFamily="34" charset="-122"/>
+                <a:cs typeface="Roboto Condensed" pitchFamily="34" charset="-120"/>
+              </a:rPr>
+              <a:t>Harris, L.T. &amp; Fiske, S.T. (2006). Dehumanizing the Lowest of the Low. Psychological Science, 17(10).
+</a:t>
+            </a:r>
+            <a:pPr indent="0" marL="0">
+              <a:lnSpc>
+                <a:spcPct val="130000"/>
+              </a:lnSpc>
+              <a:buNone/>
+            </a:pPr>
+            <a:r>
+              <a:rPr lang="en-US" sz="900" u="sng" dirty="0" b="0">
+                <a:solidFill>
+                  <a:srgbClr val="4491A9"/>
+                </a:solidFill>
+                <a:latin typeface="Roboto Condensed" pitchFamily="34" charset="0"/>
+                <a:ea typeface="Roboto Condensed" pitchFamily="34" charset="-122"/>
+                <a:cs typeface="Roboto Condensed" pitchFamily="34" charset="-120"/>
+                <a:hlinkClick r:id="rId1" invalidUrl="" action="" tgtFrame="" tooltip="" history="1" highlightClick="0" endSnd="0">
+                  <a:extLst>
+                    <a:ext uri="{A12FA001-AC4F-418D-AE19-62706E023703}">
+                      <ahyp:hlinkClr xmlns:ahyp="http://schemas.microsoft.com/office/drawing/2018/hyperlinkcolor" val="tx"/>
+                    </a:ext>
+                  </a:extLst>
+                </a:hlinkClick>
+              </a:rPr>
+              <a:t>https://doi.org/10.1111/j.1467-9280.2006.01793.x
+</a:t>
+            </a:r>
+            <a:pPr indent="0" marL="0">
+              <a:lnSpc>
+                <a:spcPct val="130000"/>
+              </a:lnSpc>
+              <a:buNone/>
+            </a:pPr>
+            <a:r>
+              <a:rPr lang="en-US" sz="900" b="0" dirty="0">
+                <a:solidFill>
+                  <a:srgbClr val="EC5C2A"/>
+                </a:solidFill>
+                <a:latin typeface="Roboto Condensed" pitchFamily="34" charset="0"/>
+                <a:ea typeface="Roboto Condensed" pitchFamily="34" charset="-122"/>
+                <a:cs typeface="Roboto Condensed" pitchFamily="34" charset="-120"/>
+              </a:rPr>
+              <a:t>This neuroimaging study found that medial prefrontal cortex activity drops when participants view photos of dehumanized social groups. That same brain region normally engages when we process others as fully human. It is the mechanism behind the slide 3 claim that volunteers arrive in task mode and the slide 5 claim that the Brief reactivates the part of the brain that processes others as people. Without the intervention, the default neural state treats beneficiaries as objects of charity, not as people.
+</a:t>
+            </a:r>
+            <a:pPr indent="0" marL="0">
+              <a:lnSpc>
+                <a:spcPct val="130000"/>
+              </a:lnSpc>
+              <a:buNone/>
+            </a:pPr>
+            <a:r>
+              <a:rPr lang="en-US" sz="900" dirty="0" b="1">
+                <a:solidFill>
+                  <a:srgbClr val="404040"/>
+                </a:solidFill>
+                <a:latin typeface="Roboto Condensed" pitchFamily="34" charset="0"/>
+                <a:ea typeface="Roboto Condensed" pitchFamily="34" charset="-122"/>
+                <a:cs typeface="Roboto Condensed" pitchFamily="34" charset="-120"/>
+              </a:rPr>
+              <a:t>[2] </a:t>
+            </a:r>
+            <a:pPr indent="0" marL="0">
+              <a:lnSpc>
+                <a:spcPct val="130000"/>
+              </a:lnSpc>
+              <a:buNone/>
+            </a:pPr>
+            <a:r>
+              <a:rPr lang="en-US" sz="900" u="sng" dirty="0" b="0">
+                <a:solidFill>
+                  <a:srgbClr val="4491A9"/>
+                </a:solidFill>
+                <a:latin typeface="Roboto Condensed" pitchFamily="34" charset="0"/>
+                <a:ea typeface="Roboto Condensed" pitchFamily="34" charset="-122"/>
+                <a:cs typeface="Roboto Condensed" pitchFamily="34" charset="-120"/>
+                <a:hlinkClick r:id="rId2" invalidUrl="" action="" tgtFrame="" tooltip="" history="1" highlightClick="0" endSnd="0">
+                  <a:extLst>
+                    <a:ext uri="{A12FA001-AC4F-418D-AE19-62706E023703}">
+                      <ahyp:hlinkClr xmlns:ahyp="http://schemas.microsoft.com/office/drawing/2018/hyperlinkcolor" val="tx"/>
+                    </a:ext>
+                  </a:extLst>
+                </a:hlinkClick>
+              </a:rPr>
+              <a:t>McGaugh, J.L. (2000). Memory: A Century of Consolidation. Science, 287.
+</a:t>
+            </a:r>
+            <a:pPr indent="0" marL="0">
+              <a:lnSpc>
+                <a:spcPct val="130000"/>
+              </a:lnSpc>
+              <a:buNone/>
+            </a:pPr>
+            <a:r>
+              <a:rPr lang="en-US" sz="900" b="0" dirty="0">
+                <a:solidFill>
+                  <a:srgbClr val="EC5C2A"/>
+                </a:solidFill>
+                <a:latin typeface="Roboto Condensed" pitchFamily="34" charset="0"/>
+                <a:ea typeface="Roboto Condensed" pitchFamily="34" charset="-122"/>
+                <a:cs typeface="Roboto Condensed" pitchFamily="34" charset="-120"/>
+              </a:rPr>
+              <a:t>https://doi.org/10.1126/science.287.5451.248
+</a:t>
+            </a:r>
+            <a:pPr indent="0" marL="0">
+              <a:lnSpc>
+                <a:spcPct val="130000"/>
+              </a:lnSpc>
+              <a:buNone/>
+            </a:pPr>
+            <a:r>
+              <a:rPr lang="en-US" sz="900" dirty="0" b="0">
+                <a:solidFill>
+                  <a:srgbClr val="404040"/>
+                </a:solidFill>
+                <a:latin typeface="Roboto Condensed" pitchFamily="34" charset="0"/>
+                <a:ea typeface="Roboto Condensed" pitchFamily="34" charset="-122"/>
+                <a:cs typeface="Roboto Condensed" pitchFamily="34" charset="-120"/>
+              </a:rPr>
+              <a:t>McGaugh's review establishes that emotionally significant experiences enter long-term memory through a time-limited consolidation window after the event, mediated by stress-hormone signaling on the amygdala and hippocampus. This is the basis for the slide 3 and slide 5 claim that the Debrief has to happen inside the post-experience window or the learning never consolidates. Same-day reflection is a neurological requirement, not a scheduling preference. A powerful experience without immediate processing leaves participants with a vague good feeling that fades within days.</a:t>
+            </a:r>
+            <a:pPr indent="0" marL="0">
+              <a:lnSpc>
+                <a:spcPct val="130000"/>
+              </a:lnSpc>
+              <a:buNone/>
+            </a:pPr>
+            <a:r>
+              <a:rPr lang="en-US" sz="900" u="sng" dirty="0">
+                <a:solidFill>
+                  <a:srgbClr val="4491A9"/>
+                </a:solidFill>
+                <a:latin typeface="Roboto Condensed" pitchFamily="34" charset="0"/>
+                <a:ea typeface="Roboto Condensed" pitchFamily="34" charset="-122"/>
+                <a:cs typeface="Roboto Condensed" pitchFamily="34" charset="-120"/>
+                <a:hlinkClick r:id="rId3" invalidUrl="" action="" tgtFrame="" tooltip="" history="1" highlightClick="0" endSnd="0">
+                  <a:extLst>
+                    <a:ext uri="{A12FA001-AC4F-418D-AE19-62706E023703}">
+                      <ahyp:hlinkClr xmlns:ahyp="http://schemas.microsoft.com/office/drawing/2018/hyperlinkcolor" val="tx"/>
+                    </a:ext>
+                  </a:extLst>
+                </a:hlinkClick>
+              </a:rPr>
+              <a:t/>
+            </a:r>
+            <a:pPr indent="0" marL="0">
+              <a:lnSpc>
+                <a:spcPct val="130000"/>
+              </a:lnSpc>
+              <a:buNone/>
+            </a:pPr>
+            <a:r>
+              <a:rPr lang="en-US" sz="900" b="1" dirty="0">
+                <a:solidFill>
+                  <a:srgbClr val="EC5C2A"/>
+                </a:solidFill>
+                <a:latin typeface="Roboto Condensed" pitchFamily="34" charset="0"/>
+                <a:ea typeface="Roboto Condensed" pitchFamily="34" charset="-122"/>
+                <a:cs typeface="Roboto Condensed" pitchFamily="34" charset="-120"/>
+              </a:rPr>
+              <a:t/>
+            </a:r>
+            <a:pPr indent="0" marL="0">
+              <a:lnSpc>
+                <a:spcPct val="130000"/>
+              </a:lnSpc>
+              <a:buNone/>
+            </a:pPr>
+            <a:r>
+              <a:rPr lang="en-US" sz="900" dirty="0">
+                <a:solidFill>
+                  <a:srgbClr val="404040"/>
+                </a:solidFill>
+                <a:latin typeface="Roboto Condensed" pitchFamily="34" charset="0"/>
+                <a:ea typeface="Roboto Condensed" pitchFamily="34" charset="-122"/>
+                <a:cs typeface="Roboto Condensed" pitchFamily="34" charset="-120"/>
+              </a:rPr>
+              <a:t/>
+            </a:r>
+            <a:pPr indent="0" marL="0">
+              <a:lnSpc>
+                <a:spcPct val="130000"/>
+              </a:lnSpc>
+              <a:buNone/>
+            </a:pPr>
+            <a:r>
+              <a:rPr lang="en-US" sz="900" u="sng" dirty="0">
+                <a:solidFill>
+                  <a:srgbClr val="4491A9"/>
+                </a:solidFill>
+                <a:latin typeface="Roboto Condensed" pitchFamily="34" charset="0"/>
+                <a:ea typeface="Roboto Condensed" pitchFamily="34" charset="-122"/>
+                <a:cs typeface="Roboto Condensed" pitchFamily="34" charset="-120"/>
+                <a:hlinkClick r:id="rId4" invalidUrl="" action="" tgtFrame="" tooltip="" history="1" highlightClick="0" endSnd="0">
+                  <a:extLst>
+                    <a:ext uri="{A12FA001-AC4F-418D-AE19-62706E023703}">
+                      <ahyp:hlinkClr xmlns:ahyp="http://schemas.microsoft.com/office/drawing/2018/hyperlinkcolor" val="tx"/>
+                    </a:ext>
+                  </a:extLst>
+                </a:hlinkClick>
+              </a:rPr>
+              <a:t/>
+            </a:r>
+            <a:pPr indent="0" marL="0">
+              <a:lnSpc>
+                <a:spcPct val="130000"/>
+              </a:lnSpc>
+              <a:buNone/>
+            </a:pPr>
+            <a:r>
+              <a:rPr lang="en-US" sz="900" b="1" dirty="0">
+                <a:solidFill>
+                  <a:srgbClr val="EC5C2A"/>
+                </a:solidFill>
+                <a:latin typeface="Roboto Condensed" pitchFamily="34" charset="0"/>
+                <a:ea typeface="Roboto Condensed" pitchFamily="34" charset="-122"/>
+                <a:cs typeface="Roboto Condensed" pitchFamily="34" charset="-120"/>
+              </a:rPr>
+              <a:t/>
+            </a:r>
+            <a:pPr indent="0" marL="0">
+              <a:lnSpc>
+                <a:spcPct val="130000"/>
+              </a:lnSpc>
+              <a:buNone/>
+            </a:pPr>
+            <a:r>
+              <a:rPr lang="en-US" sz="900" dirty="0">
+                <a:solidFill>
+                  <a:srgbClr val="404040"/>
+                </a:solidFill>
+                <a:latin typeface="Roboto Condensed" pitchFamily="34" charset="0"/>
+                <a:ea typeface="Roboto Condensed" pitchFamily="34" charset="-122"/>
+                <a:cs typeface="Roboto Condensed" pitchFamily="34" charset="-120"/>
+              </a:rPr>
+              <a:t/>
+            </a:r>
+            <a:pPr indent="0" marL="0">
+              <a:lnSpc>
+                <a:spcPct val="130000"/>
+              </a:lnSpc>
+              <a:buNone/>
+            </a:pPr>
+            <a:r>
+              <a:rPr lang="en-US" sz="900" u="sng" dirty="0">
+                <a:solidFill>
+                  <a:srgbClr val="4491A9"/>
+                </a:solidFill>
+                <a:latin typeface="Roboto Condensed" pitchFamily="34" charset="0"/>
+                <a:ea typeface="Roboto Condensed" pitchFamily="34" charset="-122"/>
+                <a:cs typeface="Roboto Condensed" pitchFamily="34" charset="-120"/>
+                <a:hlinkClick r:id="rId5" invalidUrl="" action="" tgtFrame="" tooltip="" history="1" highlightClick="0" endSnd="0">
+                  <a:extLst>
+                    <a:ext uri="{A12FA001-AC4F-418D-AE19-62706E023703}">
+                      <ahyp:hlinkClr xmlns:ahyp="http://schemas.microsoft.com/office/drawing/2018/hyperlinkcolor" val="tx"/>
+                    </a:ext>
+                  </a:extLst>
+                </a:hlinkClick>
+              </a:rPr>
+              <a:t/>
+            </a:r>
+            <a:pPr indent="0" marL="0">
+              <a:lnSpc>
+                <a:spcPct val="130000"/>
+              </a:lnSpc>
+              <a:buNone/>
+            </a:pPr>
+            <a:r>
+              <a:rPr lang="en-US" sz="900" b="1" dirty="0">
+                <a:solidFill>
+                  <a:srgbClr val="EC5C2A"/>
+                </a:solidFill>
+                <a:latin typeface="Roboto Condensed" pitchFamily="34" charset="0"/>
+                <a:ea typeface="Roboto Condensed" pitchFamily="34" charset="-122"/>
+                <a:cs typeface="Roboto Condensed" pitchFamily="34" charset="-120"/>
+              </a:rPr>
+              <a:t/>
+            </a:r>
+            <a:pPr indent="0" marL="0">
+              <a:lnSpc>
+                <a:spcPct val="130000"/>
+              </a:lnSpc>
+              <a:buNone/>
+            </a:pPr>
+            <a:r>
+              <a:rPr lang="en-US" sz="900" dirty="0">
+                <a:solidFill>
+                  <a:srgbClr val="404040"/>
+                </a:solidFill>
+                <a:latin typeface="Roboto Condensed" pitchFamily="34" charset="0"/>
+                <a:ea typeface="Roboto Condensed" pitchFamily="34" charset="-122"/>
+                <a:cs typeface="Roboto Condensed" pitchFamily="34" charset="-120"/>
+              </a:rPr>
+              <a:t/>
+            </a:r>
+            <a:pPr indent="0" marL="0">
+              <a:lnSpc>
+                <a:spcPct val="130000"/>
+              </a:lnSpc>
+              <a:buNone/>
+            </a:pPr>
+            <a:r>
+              <a:rPr lang="en-US" sz="900" u="sng" dirty="0">
+                <a:solidFill>
+                  <a:srgbClr val="4491A9"/>
+                </a:solidFill>
+                <a:latin typeface="Roboto Condensed" pitchFamily="34" charset="0"/>
+                <a:ea typeface="Roboto Condensed" pitchFamily="34" charset="-122"/>
+                <a:cs typeface="Roboto Condensed" pitchFamily="34" charset="-120"/>
+                <a:hlinkClick r:id="rId6" invalidUrl="" action="" tgtFrame="" tooltip="" history="1" highlightClick="0" endSnd="0">
+                  <a:extLst>
+                    <a:ext uri="{A12FA001-AC4F-418D-AE19-62706E023703}">
+                      <ahyp:hlinkClr xmlns:ahyp="http://schemas.microsoft.com/office/drawing/2018/hyperlinkcolor" val="tx"/>
+                    </a:ext>
+                  </a:extLst>
+                </a:hlinkClick>
+              </a:rPr>
+              <a:t/>
+            </a:r>
+            <a:pPr indent="0" marL="0">
+              <a:lnSpc>
+                <a:spcPct val="130000"/>
+              </a:lnSpc>
+              <a:buNone/>
+            </a:pPr>
+            <a:r>
+              <a:rPr lang="en-US" sz="900" b="1" dirty="0">
+                <a:solidFill>
+                  <a:srgbClr val="EC5C2A"/>
+                </a:solidFill>
+                <a:latin typeface="Roboto Condensed" pitchFamily="34" charset="0"/>
+                <a:ea typeface="Roboto Condensed" pitchFamily="34" charset="-122"/>
+                <a:cs typeface="Roboto Condensed" pitchFamily="34" charset="-120"/>
+              </a:rPr>
+              <a:t/>
+            </a:r>
+            <a:pPr indent="0" marL="0">
+              <a:lnSpc>
+                <a:spcPct val="130000"/>
+              </a:lnSpc>
+              <a:buNone/>
+            </a:pPr>
+            <a:r>
+              <a:rPr lang="en-US" sz="900" dirty="0">
+                <a:solidFill>
+                  <a:srgbClr val="404040"/>
+                </a:solidFill>
+                <a:latin typeface="Roboto Condensed" pitchFamily="34" charset="0"/>
+                <a:ea typeface="Roboto Condensed" pitchFamily="34" charset="-122"/>
+                <a:cs typeface="Roboto Condensed" pitchFamily="34" charset="-120"/>
+              </a:rPr>
+              <a:t/>
+            </a:r>
+            <a:pPr indent="0" marL="0">
+              <a:lnSpc>
+                <a:spcPct val="130000"/>
+              </a:lnSpc>
+              <a:buNone/>
+            </a:pPr>
+            <a:r>
+              <a:rPr lang="en-US" sz="900" u="sng" dirty="0">
+                <a:solidFill>
+                  <a:srgbClr val="4491A9"/>
+                </a:solidFill>
+                <a:latin typeface="Roboto Condensed" pitchFamily="34" charset="0"/>
+                <a:ea typeface="Roboto Condensed" pitchFamily="34" charset="-122"/>
+                <a:cs typeface="Roboto Condensed" pitchFamily="34" charset="-120"/>
+                <a:hlinkClick r:id="rId7" invalidUrl="" action="" tgtFrame="" tooltip="" history="1" highlightClick="0" endSnd="0">
+                  <a:extLst>
+                    <a:ext uri="{A12FA001-AC4F-418D-AE19-62706E023703}">
+                      <ahyp:hlinkClr xmlns:ahyp="http://schemas.microsoft.com/office/drawing/2018/hyperlinkcolor" val="tx"/>
+                    </a:ext>
+                  </a:extLst>
+                </a:hlinkClick>
+              </a:rPr>
+              <a:t/>
+            </a:r>
+            <a:pPr indent="0" marL="0">
+              <a:lnSpc>
+                <a:spcPct val="130000"/>
+              </a:lnSpc>
+              <a:buNone/>
+            </a:pPr>
+            <a:r>
+              <a:rPr lang="en-US" sz="900" b="1" dirty="0">
+                <a:solidFill>
+                  <a:srgbClr val="EC5C2A"/>
+                </a:solidFill>
+                <a:latin typeface="Roboto Condensed" pitchFamily="34" charset="0"/>
+                <a:ea typeface="Roboto Condensed" pitchFamily="34" charset="-122"/>
+                <a:cs typeface="Roboto Condensed" pitchFamily="34" charset="-120"/>
+              </a:rPr>
+              <a:t/>
+            </a:r>
+            <a:pPr indent="0" marL="0">
+              <a:lnSpc>
+                <a:spcPct val="130000"/>
+              </a:lnSpc>
+              <a:buNone/>
+            </a:pPr>
+            <a:r>
+              <a:rPr lang="en-US" sz="900" dirty="0">
+                <a:solidFill>
+                  <a:srgbClr val="404040"/>
+                </a:solidFill>
+                <a:latin typeface="Roboto Condensed" pitchFamily="34" charset="0"/>
+                <a:ea typeface="Roboto Condensed" pitchFamily="34" charset="-122"/>
+                <a:cs typeface="Roboto Condensed" pitchFamily="34" charset="-120"/>
+              </a:rPr>
+              <a:t/>
+            </a:r>
+            <a:pPr indent="0" marL="0">
+              <a:lnSpc>
+                <a:spcPct val="130000"/>
+              </a:lnSpc>
+              <a:buNone/>
+            </a:pPr>
+            <a:r>
+              <a:rPr lang="en-US" sz="900" u="sng" dirty="0">
+                <a:solidFill>
+                  <a:srgbClr val="4491A9"/>
+                </a:solidFill>
+                <a:latin typeface="Roboto Condensed" pitchFamily="34" charset="0"/>
+                <a:ea typeface="Roboto Condensed" pitchFamily="34" charset="-122"/>
+                <a:cs typeface="Roboto Condensed" pitchFamily="34" charset="-120"/>
+                <a:hlinkClick r:id="rId8" invalidUrl="" action="" tgtFrame="" tooltip="" history="1" highlightClick="0" endSnd="0">
+                  <a:extLst>
+                    <a:ext uri="{A12FA001-AC4F-418D-AE19-62706E023703}">
+                      <ahyp:hlinkClr xmlns:ahyp="http://schemas.microsoft.com/office/drawing/2018/hyperlinkcolor" val="tx"/>
+                    </a:ext>
+                  </a:extLst>
+                </a:hlinkClick>
+              </a:rPr>
+              <a:t/>
+            </a:r>
+            <a:endParaRPr lang="en-US" sz="900" dirty="0"/>
+          </a:p>
+        </p:txBody>
+      </p:sp>
+      <p:sp>
+        <p:nvSpPr>
+          <p:cNvPr id="7" name="Text 5"/>
+          <p:cNvSpPr/>
+          <p:nvPr/>
+        </p:nvSpPr>
+        <p:spPr>
+          <a:xfrm>
+            <a:off x="6309360" y="2606040"/>
+            <a:ext cx="5486400" cy="3657600"/>
+          </a:xfrm>
+          <a:prstGeom prst="rect">
+            <a:avLst/>
+          </a:prstGeom>
+          <a:noFill/>
+          <a:ln/>
+        </p:spPr>
+        <p:txBody>
+          <a:bodyPr wrap="square" rtlCol="0" anchor="ctr"/>
+          <a:lstStyle/>
+          <a:p>
+            <a:pPr indent="0" marL="0">
+              <a:lnSpc>
+                <a:spcPct val="130000"/>
+              </a:lnSpc>
+              <a:buNone/>
+            </a:pPr>
+            <a:r>
+              <a:rPr lang="en-US" sz="900" b="1" dirty="0">
+                <a:solidFill>
+                  <a:srgbClr val="EC5C2A"/>
+                </a:solidFill>
+                <a:latin typeface="Roboto Condensed" pitchFamily="34" charset="0"/>
+                <a:ea typeface="Roboto Condensed" pitchFamily="34" charset="-122"/>
+                <a:cs typeface="Roboto Condensed" pitchFamily="34" charset="-120"/>
+              </a:rPr>
+              <a:t>[3] </a:t>
+            </a:r>
+            <a:pPr indent="0" marL="0">
+              <a:lnSpc>
+                <a:spcPct val="130000"/>
+              </a:lnSpc>
+              <a:buNone/>
+            </a:pPr>
+            <a:r>
+              <a:rPr lang="en-US" sz="900" dirty="0" b="0">
+                <a:solidFill>
+                  <a:srgbClr val="404040"/>
+                </a:solidFill>
+                <a:latin typeface="Roboto Condensed" pitchFamily="34" charset="0"/>
+                <a:ea typeface="Roboto Condensed" pitchFamily="34" charset="-122"/>
+                <a:cs typeface="Roboto Condensed" pitchFamily="34" charset="-120"/>
+              </a:rPr>
+              <a:t>Klimecki et al. (2014). Differential plasticity after compassion vs empathy training. SCAN, 9(6).
+</a:t>
+            </a:r>
+            <a:pPr indent="0" marL="0">
+              <a:lnSpc>
+                <a:spcPct val="130000"/>
+              </a:lnSpc>
+              <a:buNone/>
+            </a:pPr>
+            <a:r>
+              <a:rPr lang="en-US" sz="900" u="sng" dirty="0" b="0">
+                <a:solidFill>
+                  <a:srgbClr val="4491A9"/>
+                </a:solidFill>
+                <a:latin typeface="Roboto Condensed" pitchFamily="34" charset="0"/>
+                <a:ea typeface="Roboto Condensed" pitchFamily="34" charset="-122"/>
+                <a:cs typeface="Roboto Condensed" pitchFamily="34" charset="-120"/>
+                <a:hlinkClick r:id="rId9" invalidUrl="" action="" tgtFrame="" tooltip="" history="1" highlightClick="0" endSnd="0">
+                  <a:extLst>
+                    <a:ext uri="{A12FA001-AC4F-418D-AE19-62706E023703}">
+                      <ahyp:hlinkClr xmlns:ahyp="http://schemas.microsoft.com/office/drawing/2018/hyperlinkcolor" val="tx"/>
+                    </a:ext>
+                  </a:extLst>
+                </a:hlinkClick>
+              </a:rPr>
+              <a:t>https://doi.org/10.1093/scan/nst060
+</a:t>
+            </a:r>
+            <a:pPr indent="0" marL="0">
+              <a:lnSpc>
+                <a:spcPct val="130000"/>
+              </a:lnSpc>
+              <a:buNone/>
+            </a:pPr>
+            <a:r>
+              <a:rPr lang="en-US" sz="900" b="0" dirty="0">
+                <a:solidFill>
+                  <a:srgbClr val="EC5C2A"/>
+                </a:solidFill>
+                <a:latin typeface="Roboto Condensed" pitchFamily="34" charset="0"/>
+                <a:ea typeface="Roboto Condensed" pitchFamily="34" charset="-122"/>
+                <a:cs typeface="Roboto Condensed" pitchFamily="34" charset="-120"/>
+              </a:rPr>
+              <a:t>Klimecki's fMRI study trained two groups in either empathy or compassion and found they recruit different neural circuits. Empathy activated pain-sharing networks and produced negative affect. Compassion activated reward and affiliation networks. That is the direct evidence for the slide 3 claim that champions burn out when repeated exposure activates pain-sharing rather than compassion circuits, and it is why the Debrief moves participants toward compassion rather than leaving them in distress.
+</a:t>
+            </a:r>
+            <a:pPr indent="0" marL="0">
+              <a:lnSpc>
+                <a:spcPct val="130000"/>
+              </a:lnSpc>
+              <a:buNone/>
+            </a:pPr>
+            <a:r>
+              <a:rPr lang="en-US" sz="900" dirty="0" b="1">
+                <a:solidFill>
+                  <a:srgbClr val="404040"/>
+                </a:solidFill>
+                <a:latin typeface="Roboto Condensed" pitchFamily="34" charset="0"/>
+                <a:ea typeface="Roboto Condensed" pitchFamily="34" charset="-122"/>
+                <a:cs typeface="Roboto Condensed" pitchFamily="34" charset="-120"/>
+              </a:rPr>
+              <a:t>[4] </a:t>
+            </a:r>
+            <a:pPr indent="0" marL="0">
+              <a:lnSpc>
+                <a:spcPct val="130000"/>
+              </a:lnSpc>
+              <a:buNone/>
+            </a:pPr>
+            <a:r>
+              <a:rPr lang="en-US" sz="900" u="sng" dirty="0" b="0">
+                <a:solidFill>
+                  <a:srgbClr val="4491A9"/>
+                </a:solidFill>
+                <a:latin typeface="Roboto Condensed" pitchFamily="34" charset="0"/>
+                <a:ea typeface="Roboto Condensed" pitchFamily="34" charset="-122"/>
+                <a:cs typeface="Roboto Condensed" pitchFamily="34" charset="-120"/>
+                <a:hlinkClick r:id="rId10" invalidUrl="" action="" tgtFrame="" tooltip="" history="1" highlightClick="0" endSnd="0">
+                  <a:extLst>
+                    <a:ext uri="{A12FA001-AC4F-418D-AE19-62706E023703}">
+                      <ahyp:hlinkClr xmlns:ahyp="http://schemas.microsoft.com/office/drawing/2018/hyperlinkcolor" val="tx"/>
+                    </a:ext>
+                  </a:extLst>
+                </a:hlinkClick>
+              </a:rPr>
+              <a:t>Mezirow, J. (1991). Transformative Dimensions of Adult Learning.
+</a:t>
+            </a:r>
+            <a:pPr indent="0" marL="0">
+              <a:lnSpc>
+                <a:spcPct val="130000"/>
+              </a:lnSpc>
+              <a:buNone/>
+            </a:pPr>
+            <a:r>
+              <a:rPr lang="en-US" sz="900" b="0" dirty="0">
+                <a:solidFill>
+                  <a:srgbClr val="EC5C2A"/>
+                </a:solidFill>
+                <a:latin typeface="Roboto Condensed" pitchFamily="34" charset="0"/>
+                <a:ea typeface="Roboto Condensed" pitchFamily="34" charset="-122"/>
+                <a:cs typeface="Roboto Condensed" pitchFamily="34" charset="-120"/>
+              </a:rPr>
+              <a:t>https://www.wiley.com/en-us/Transformative+Dimensions+of+Adult+Learning-p-9780470857953
+</a:t>
+            </a:r>
+            <a:pPr indent="0" marL="0">
+              <a:lnSpc>
+                <a:spcPct val="130000"/>
+              </a:lnSpc>
+              <a:buNone/>
+            </a:pPr>
+            <a:r>
+              <a:rPr lang="en-US" sz="900" dirty="0" b="0">
+                <a:solidFill>
+                  <a:srgbClr val="404040"/>
+                </a:solidFill>
+                <a:latin typeface="Roboto Condensed" pitchFamily="34" charset="0"/>
+                <a:ea typeface="Roboto Condensed" pitchFamily="34" charset="-122"/>
+                <a:cs typeface="Roboto Condensed" pitchFamily="34" charset="-120"/>
+              </a:rPr>
+              <a:t>Mezirow's transformative learning theory describes how adults change worldviews through a disorienting dilemma, an experience that breaks an existing frame of reference, followed by critical reflection and integration. Slides 4 and 5 lean on this directly when they argue that a live nonprofit experience is the trigger for change because it puts assumption in collision with reality. Without the disorienting moment, participants confirm what they already believed and walk away unchanged. This is the theoretical basis for designing the Brief and the experience to challenge expectations rather than confirm them.</a:t>
+            </a:r>
+            <a:pPr indent="0" marL="0">
+              <a:lnSpc>
+                <a:spcPct val="130000"/>
+              </a:lnSpc>
+              <a:buNone/>
+            </a:pPr>
+            <a:r>
+              <a:rPr lang="en-US" sz="900" u="sng" dirty="0">
+                <a:solidFill>
+                  <a:srgbClr val="4491A9"/>
+                </a:solidFill>
+                <a:latin typeface="Roboto Condensed" pitchFamily="34" charset="0"/>
+                <a:ea typeface="Roboto Condensed" pitchFamily="34" charset="-122"/>
+                <a:cs typeface="Roboto Condensed" pitchFamily="34" charset="-120"/>
+                <a:hlinkClick r:id="rId11" invalidUrl="" action="" tgtFrame="" tooltip="" history="1" highlightClick="0" endSnd="0">
+                  <a:extLst>
+                    <a:ext uri="{A12FA001-AC4F-418D-AE19-62706E023703}">
+                      <ahyp:hlinkClr xmlns:ahyp="http://schemas.microsoft.com/office/drawing/2018/hyperlinkcolor" val="tx"/>
+                    </a:ext>
+                  </a:extLst>
+                </a:hlinkClick>
+              </a:rPr>
+              <a:t/>
+            </a:r>
+            <a:pPr indent="0" marL="0">
+              <a:lnSpc>
+                <a:spcPct val="130000"/>
+              </a:lnSpc>
+              <a:buNone/>
+            </a:pPr>
+            <a:r>
+              <a:rPr lang="en-US" sz="900" b="1" dirty="0">
+                <a:solidFill>
+                  <a:srgbClr val="EC5C2A"/>
+                </a:solidFill>
+                <a:latin typeface="Roboto Condensed" pitchFamily="34" charset="0"/>
+                <a:ea typeface="Roboto Condensed" pitchFamily="34" charset="-122"/>
+                <a:cs typeface="Roboto Condensed" pitchFamily="34" charset="-120"/>
+              </a:rPr>
+              <a:t/>
+            </a:r>
+            <a:pPr indent="0" marL="0">
+              <a:lnSpc>
+                <a:spcPct val="130000"/>
+              </a:lnSpc>
+              <a:buNone/>
+            </a:pPr>
+            <a:r>
+              <a:rPr lang="en-US" sz="900" dirty="0">
+                <a:solidFill>
+                  <a:srgbClr val="404040"/>
+                </a:solidFill>
+                <a:latin typeface="Roboto Condensed" pitchFamily="34" charset="0"/>
+                <a:ea typeface="Roboto Condensed" pitchFamily="34" charset="-122"/>
+                <a:cs typeface="Roboto Condensed" pitchFamily="34" charset="-120"/>
+              </a:rPr>
+              <a:t/>
+            </a:r>
+            <a:pPr indent="0" marL="0">
+              <a:lnSpc>
+                <a:spcPct val="130000"/>
+              </a:lnSpc>
+              <a:buNone/>
+            </a:pPr>
+            <a:r>
+              <a:rPr lang="en-US" sz="900" u="sng" dirty="0">
+                <a:solidFill>
+                  <a:srgbClr val="4491A9"/>
+                </a:solidFill>
+                <a:latin typeface="Roboto Condensed" pitchFamily="34" charset="0"/>
+                <a:ea typeface="Roboto Condensed" pitchFamily="34" charset="-122"/>
+                <a:cs typeface="Roboto Condensed" pitchFamily="34" charset="-120"/>
+                <a:hlinkClick r:id="rId12" invalidUrl="" action="" tgtFrame="" tooltip="" history="1" highlightClick="0" endSnd="0">
+                  <a:extLst>
+                    <a:ext uri="{A12FA001-AC4F-418D-AE19-62706E023703}">
+                      <ahyp:hlinkClr xmlns:ahyp="http://schemas.microsoft.com/office/drawing/2018/hyperlinkcolor" val="tx"/>
+                    </a:ext>
+                  </a:extLst>
+                </a:hlinkClick>
+              </a:rPr>
+              <a:t/>
+            </a:r>
+            <a:pPr indent="0" marL="0">
+              <a:lnSpc>
+                <a:spcPct val="130000"/>
+              </a:lnSpc>
+              <a:buNone/>
+            </a:pPr>
+            <a:r>
+              <a:rPr lang="en-US" sz="900" b="1" dirty="0">
+                <a:solidFill>
+                  <a:srgbClr val="EC5C2A"/>
+                </a:solidFill>
+                <a:latin typeface="Roboto Condensed" pitchFamily="34" charset="0"/>
+                <a:ea typeface="Roboto Condensed" pitchFamily="34" charset="-122"/>
+                <a:cs typeface="Roboto Condensed" pitchFamily="34" charset="-120"/>
+              </a:rPr>
+              <a:t/>
+            </a:r>
+            <a:pPr indent="0" marL="0">
+              <a:lnSpc>
+                <a:spcPct val="130000"/>
+              </a:lnSpc>
+              <a:buNone/>
+            </a:pPr>
+            <a:r>
+              <a:rPr lang="en-US" sz="900" dirty="0">
+                <a:solidFill>
+                  <a:srgbClr val="404040"/>
+                </a:solidFill>
+                <a:latin typeface="Roboto Condensed" pitchFamily="34" charset="0"/>
+                <a:ea typeface="Roboto Condensed" pitchFamily="34" charset="-122"/>
+                <a:cs typeface="Roboto Condensed" pitchFamily="34" charset="-120"/>
+              </a:rPr>
+              <a:t/>
+            </a:r>
+            <a:pPr indent="0" marL="0">
+              <a:lnSpc>
+                <a:spcPct val="130000"/>
+              </a:lnSpc>
+              <a:buNone/>
+            </a:pPr>
+            <a:r>
+              <a:rPr lang="en-US" sz="900" u="sng" dirty="0">
+                <a:solidFill>
+                  <a:srgbClr val="4491A9"/>
+                </a:solidFill>
+                <a:latin typeface="Roboto Condensed" pitchFamily="34" charset="0"/>
+                <a:ea typeface="Roboto Condensed" pitchFamily="34" charset="-122"/>
+                <a:cs typeface="Roboto Condensed" pitchFamily="34" charset="-120"/>
+                <a:hlinkClick r:id="rId13" invalidUrl="" action="" tgtFrame="" tooltip="" history="1" highlightClick="0" endSnd="0">
+                  <a:extLst>
+                    <a:ext uri="{A12FA001-AC4F-418D-AE19-62706E023703}">
+                      <ahyp:hlinkClr xmlns:ahyp="http://schemas.microsoft.com/office/drawing/2018/hyperlinkcolor" val="tx"/>
+                    </a:ext>
+                  </a:extLst>
+                </a:hlinkClick>
+              </a:rPr>
+              <a:t/>
+            </a:r>
+            <a:pPr indent="0" marL="0">
+              <a:lnSpc>
+                <a:spcPct val="130000"/>
+              </a:lnSpc>
+              <a:buNone/>
+            </a:pPr>
+            <a:r>
+              <a:rPr lang="en-US" sz="900" b="1" dirty="0">
+                <a:solidFill>
+                  <a:srgbClr val="EC5C2A"/>
+                </a:solidFill>
+                <a:latin typeface="Roboto Condensed" pitchFamily="34" charset="0"/>
+                <a:ea typeface="Roboto Condensed" pitchFamily="34" charset="-122"/>
+                <a:cs typeface="Roboto Condensed" pitchFamily="34" charset="-120"/>
+              </a:rPr>
+              <a:t/>
+            </a:r>
+            <a:pPr indent="0" marL="0">
+              <a:lnSpc>
+                <a:spcPct val="130000"/>
+              </a:lnSpc>
+              <a:buNone/>
+            </a:pPr>
+            <a:r>
+              <a:rPr lang="en-US" sz="900" dirty="0">
+                <a:solidFill>
+                  <a:srgbClr val="404040"/>
+                </a:solidFill>
+                <a:latin typeface="Roboto Condensed" pitchFamily="34" charset="0"/>
+                <a:ea typeface="Roboto Condensed" pitchFamily="34" charset="-122"/>
+                <a:cs typeface="Roboto Condensed" pitchFamily="34" charset="-120"/>
+              </a:rPr>
+              <a:t/>
+            </a:r>
+            <a:pPr indent="0" marL="0">
+              <a:lnSpc>
+                <a:spcPct val="130000"/>
+              </a:lnSpc>
+              <a:buNone/>
+            </a:pPr>
+            <a:r>
+              <a:rPr lang="en-US" sz="900" u="sng" dirty="0">
+                <a:solidFill>
+                  <a:srgbClr val="4491A9"/>
+                </a:solidFill>
+                <a:latin typeface="Roboto Condensed" pitchFamily="34" charset="0"/>
+                <a:ea typeface="Roboto Condensed" pitchFamily="34" charset="-122"/>
+                <a:cs typeface="Roboto Condensed" pitchFamily="34" charset="-120"/>
+                <a:hlinkClick r:id="rId14" invalidUrl="" action="" tgtFrame="" tooltip="" history="1" highlightClick="0" endSnd="0">
+                  <a:extLst>
+                    <a:ext uri="{A12FA001-AC4F-418D-AE19-62706E023703}">
+                      <ahyp:hlinkClr xmlns:ahyp="http://schemas.microsoft.com/office/drawing/2018/hyperlinkcolor" val="tx"/>
+                    </a:ext>
+                  </a:extLst>
+                </a:hlinkClick>
+              </a:rPr>
+              <a:t/>
+            </a:r>
+            <a:pPr indent="0" marL="0">
+              <a:lnSpc>
+                <a:spcPct val="130000"/>
+              </a:lnSpc>
+              <a:buNone/>
+            </a:pPr>
+            <a:r>
+              <a:rPr lang="en-US" sz="900" b="1" dirty="0">
+                <a:solidFill>
+                  <a:srgbClr val="EC5C2A"/>
+                </a:solidFill>
+                <a:latin typeface="Roboto Condensed" pitchFamily="34" charset="0"/>
+                <a:ea typeface="Roboto Condensed" pitchFamily="34" charset="-122"/>
+                <a:cs typeface="Roboto Condensed" pitchFamily="34" charset="-120"/>
+              </a:rPr>
+              <a:t/>
+            </a:r>
+            <a:pPr indent="0" marL="0">
+              <a:lnSpc>
+                <a:spcPct val="130000"/>
+              </a:lnSpc>
+              <a:buNone/>
+            </a:pPr>
+            <a:r>
+              <a:rPr lang="en-US" sz="900" dirty="0">
+                <a:solidFill>
+                  <a:srgbClr val="404040"/>
+                </a:solidFill>
+                <a:latin typeface="Roboto Condensed" pitchFamily="34" charset="0"/>
+                <a:ea typeface="Roboto Condensed" pitchFamily="34" charset="-122"/>
+                <a:cs typeface="Roboto Condensed" pitchFamily="34" charset="-120"/>
+              </a:rPr>
+              <a:t/>
+            </a:r>
+            <a:pPr indent="0" marL="0">
+              <a:lnSpc>
+                <a:spcPct val="130000"/>
+              </a:lnSpc>
+              <a:buNone/>
+            </a:pPr>
+            <a:r>
+              <a:rPr lang="en-US" sz="900" u="sng" dirty="0">
+                <a:solidFill>
+                  <a:srgbClr val="4491A9"/>
+                </a:solidFill>
+                <a:latin typeface="Roboto Condensed" pitchFamily="34" charset="0"/>
+                <a:ea typeface="Roboto Condensed" pitchFamily="34" charset="-122"/>
+                <a:cs typeface="Roboto Condensed" pitchFamily="34" charset="-120"/>
+                <a:hlinkClick r:id="rId15" invalidUrl="" action="" tgtFrame="" tooltip="" history="1" highlightClick="0" endSnd="0">
+                  <a:extLst>
+                    <a:ext uri="{A12FA001-AC4F-418D-AE19-62706E023703}">
+                      <ahyp:hlinkClr xmlns:ahyp="http://schemas.microsoft.com/office/drawing/2018/hyperlinkcolor" val="tx"/>
+                    </a:ext>
+                  </a:extLst>
+                </a:hlinkClick>
+              </a:rPr>
+              <a:t/>
+            </a:r>
+            <a:pPr indent="0" marL="0">
+              <a:lnSpc>
+                <a:spcPct val="130000"/>
+              </a:lnSpc>
+              <a:buNone/>
+            </a:pPr>
+            <a:r>
+              <a:rPr lang="en-US" sz="900" b="1" dirty="0">
+                <a:solidFill>
+                  <a:srgbClr val="EC5C2A"/>
+                </a:solidFill>
+                <a:latin typeface="Roboto Condensed" pitchFamily="34" charset="0"/>
+                <a:ea typeface="Roboto Condensed" pitchFamily="34" charset="-122"/>
+                <a:cs typeface="Roboto Condensed" pitchFamily="34" charset="-120"/>
+              </a:rPr>
+              <a:t/>
+            </a:r>
+            <a:pPr indent="0" marL="0">
+              <a:lnSpc>
+                <a:spcPct val="130000"/>
+              </a:lnSpc>
+              <a:buNone/>
+            </a:pPr>
+            <a:r>
+              <a:rPr lang="en-US" sz="900" dirty="0">
+                <a:solidFill>
+                  <a:srgbClr val="404040"/>
+                </a:solidFill>
+                <a:latin typeface="Roboto Condensed" pitchFamily="34" charset="0"/>
+                <a:ea typeface="Roboto Condensed" pitchFamily="34" charset="-122"/>
+                <a:cs typeface="Roboto Condensed" pitchFamily="34" charset="-120"/>
+              </a:rPr>
+              <a:t/>
+            </a:r>
+            <a:pPr indent="0" marL="0">
+              <a:lnSpc>
+                <a:spcPct val="130000"/>
+              </a:lnSpc>
+              <a:buNone/>
+            </a:pPr>
+            <a:r>
+              <a:rPr lang="en-US" sz="900" u="sng" dirty="0">
+                <a:solidFill>
+                  <a:srgbClr val="4491A9"/>
+                </a:solidFill>
+                <a:latin typeface="Roboto Condensed" pitchFamily="34" charset="0"/>
+                <a:ea typeface="Roboto Condensed" pitchFamily="34" charset="-122"/>
+                <a:cs typeface="Roboto Condensed" pitchFamily="34" charset="-120"/>
+                <a:hlinkClick r:id="rId16" invalidUrl="" action="" tgtFrame="" tooltip="" history="1" highlightClick="0" endSnd="0">
+                  <a:extLst>
+                    <a:ext uri="{A12FA001-AC4F-418D-AE19-62706E023703}">
+                      <ahyp:hlinkClr xmlns:ahyp="http://schemas.microsoft.com/office/drawing/2018/hyperlinkcolor" val="tx"/>
+                    </a:ext>
+                  </a:extLst>
+                </a:hlinkClick>
+              </a:rPr>
+              <a:t/>
+            </a:r>
+            <a:endParaRPr lang="en-US" sz="900" dirty="0"/>
+          </a:p>
+        </p:txBody>
+      </p:sp>
+      <p:sp>
+        <p:nvSpPr>
+          <p:cNvPr id="8" name="Shape 6"/>
+          <p:cNvSpPr/>
+          <p:nvPr/>
+        </p:nvSpPr>
+        <p:spPr>
+          <a:xfrm>
+            <a:off x="548640" y="6355080"/>
+            <a:ext cx="11094415" cy="0"/>
+          </a:xfrm>
+          <a:prstGeom prst="line">
+            <a:avLst/>
+          </a:prstGeom>
+          <a:noFill/>
+          <a:ln w="6350">
+            <a:solidFill>
+              <a:srgbClr val="C2C2C6"/>
+            </a:solidFill>
+            <a:prstDash val="solid"/>
+          </a:ln>
+        </p:spPr>
+      </p:sp>
+      <p:sp>
+        <p:nvSpPr>
+          <p:cNvPr id="9" name="Text 7"/>
+          <p:cNvSpPr/>
+          <p:nvPr/>
+        </p:nvSpPr>
+        <p:spPr>
+          <a:xfrm>
+            <a:off x="548640" y="6446520"/>
+            <a:ext cx="7315200" cy="274320"/>
+          </a:xfrm>
+          <a:prstGeom prst="rect">
+            <a:avLst/>
+          </a:prstGeom>
+          <a:noFill/>
+          <a:ln/>
+        </p:spPr>
+        <p:txBody>
+          <a:bodyPr wrap="square" rtlCol="0" anchor="ctr"/>
+          <a:lstStyle/>
+          <a:p>
+            <a:pPr indent="0" marL="0">
+              <a:buNone/>
+            </a:pPr>
+            <a:r>
+              <a:rPr lang="en-US" sz="900" spc="200" kern="0" dirty="0">
+                <a:solidFill>
+                  <a:srgbClr val="6B6B6F"/>
+                </a:solidFill>
+                <a:latin typeface="Roboto Condensed" pitchFamily="34" charset="0"/>
+                <a:ea typeface="Roboto Condensed" pitchFamily="34" charset="-122"/>
+                <a:cs typeface="Roboto Condensed" pitchFamily="34" charset="-120"/>
+              </a:rPr>
+              <a:t>RW Institute · Regional Campus Series</a:t>
+            </a:r>
+            <a:endParaRPr lang="en-US" sz="900" dirty="0"/>
+          </a:p>
+        </p:txBody>
+      </p:sp>
+      <p:sp>
+        <p:nvSpPr>
+          <p:cNvPr id="10" name="Text 8"/>
+          <p:cNvSpPr/>
+          <p:nvPr/>
+        </p:nvSpPr>
+        <p:spPr>
+          <a:xfrm>
+            <a:off x="11277295" y="6446520"/>
+            <a:ext cx="365760" cy="274320"/>
+          </a:xfrm>
+          <a:prstGeom prst="rect">
+            <a:avLst/>
+          </a:prstGeom>
+          <a:noFill/>
+          <a:ln/>
+        </p:spPr>
+        <p:txBody>
+          <a:bodyPr wrap="square" rtlCol="0" anchor="ctr"/>
+          <a:lstStyle/>
+          <a:p>
+            <a:pPr algn="r" indent="0" marL="0">
+              <a:buNone/>
+            </a:pPr>
+            <a:r>
+              <a:rPr lang="en-US" sz="900" dirty="0">
+                <a:solidFill>
+                  <a:srgbClr val="6B6B6F"/>
+                </a:solidFill>
+                <a:latin typeface="Roboto Condensed" pitchFamily="34" charset="0"/>
+                <a:ea typeface="Roboto Condensed" pitchFamily="34" charset="-122"/>
+                <a:cs typeface="Roboto Condensed" pitchFamily="34" charset="-120"/>
+              </a:rPr>
+              <a:t>14</a:t>
+            </a:r>
+            <a:endParaRPr lang="en-US" sz="900" dirty="0"/>
+          </a:p>
+        </p:txBody>
+      </p:sp>
+    </p:spTree>
+  </p:cSld>
+  <p:clrMapOvr>
+    <a:masterClrMapping/>
+  </p:clrMapOvr>
+</p:sld>
+</file>
+
+<file path=ppt/slides/slide15.xml><?xml version="1.0" encoding="utf-8"?>
+<p:sld xmlns:a="http://schemas.openxmlformats.org/drawingml/2006/main" xmlns:p="http://schemas.openxmlformats.org/presentationml/2006/main" xmlns:r="http://schemas.openxmlformats.org/officeDocument/2006/relationships">
+  <p:cSld>
+    <p:spTree>
+      <p:nvGrpSpPr>
+        <p:cNvPr id="1" name=""/>
+        <p:cNvGrpSpPr/>
+        <p:nvPr/>
+      </p:nvGrpSpPr>
+      <p:grpSpPr/>
+      <p:sp>
+        <p:nvSpPr>
+          <p:cNvPr id="2" name="Text 0"/>
+          <p:cNvSpPr/>
+          <p:nvPr/>
+        </p:nvSpPr>
+        <p:spPr>
+          <a:xfrm>
+            <a:off x="548640" y="457200"/>
+            <a:ext cx="10972800" cy="320040"/>
+          </a:xfrm>
+          <a:prstGeom prst="rect">
+            <a:avLst/>
+          </a:prstGeom>
+          <a:noFill/>
+          <a:ln/>
+        </p:spPr>
+        <p:txBody>
+          <a:bodyPr wrap="square" rtlCol="0" anchor="ctr"/>
+          <a:lstStyle/>
+          <a:p>
+            <a:pPr indent="0" marL="0">
+              <a:buNone/>
+            </a:pPr>
+            <a:r>
+              <a:rPr lang="en-US" sz="1000" b="1" spc="400" kern="0" dirty="0">
+                <a:solidFill>
+                  <a:srgbClr val="EC5C2A"/>
+                </a:solidFill>
+                <a:latin typeface="Roboto" pitchFamily="34" charset="0"/>
+                <a:ea typeface="Roboto" pitchFamily="34" charset="-122"/>
+                <a:cs typeface="Roboto" pitchFamily="34" charset="-120"/>
+              </a:rPr>
+              <a:t>REFERENCES</a:t>
+            </a:r>
+            <a:endParaRPr lang="en-US" sz="1000" dirty="0"/>
+          </a:p>
+        </p:txBody>
+      </p:sp>
+      <p:sp>
+        <p:nvSpPr>
+          <p:cNvPr id="3" name="Text 1"/>
+          <p:cNvSpPr/>
+          <p:nvPr/>
+        </p:nvSpPr>
+        <p:spPr>
+          <a:xfrm>
+            <a:off x="548640" y="868680"/>
+            <a:ext cx="10972800" cy="960120"/>
+          </a:xfrm>
+          <a:prstGeom prst="rect">
+            <a:avLst/>
+          </a:prstGeom>
+          <a:noFill/>
+          <a:ln/>
+        </p:spPr>
+        <p:txBody>
+          <a:bodyPr wrap="square" rtlCol="0" anchor="ctr"/>
+          <a:lstStyle/>
+          <a:p>
+            <a:pPr indent="0" marL="0">
+              <a:buNone/>
+            </a:pPr>
+            <a:r>
+              <a:rPr lang="en-US" sz="2800" b="1" dirty="0">
+                <a:solidFill>
+                  <a:srgbClr val="3C3F44"/>
+                </a:solidFill>
+                <a:latin typeface="Roboto" pitchFamily="34" charset="0"/>
+                <a:ea typeface="Roboto" pitchFamily="34" charset="-122"/>
+                <a:cs typeface="Roboto" pitchFamily="34" charset="-120"/>
+              </a:rPr>
+              <a:t>Further reading</a:t>
+            </a:r>
+            <a:endParaRPr lang="en-US" sz="2800" dirty="0"/>
+          </a:p>
+        </p:txBody>
+      </p:sp>
+      <p:sp>
+        <p:nvSpPr>
+          <p:cNvPr id="4" name="Shape 2"/>
+          <p:cNvSpPr/>
+          <p:nvPr/>
+        </p:nvSpPr>
+        <p:spPr>
+          <a:xfrm>
+            <a:off x="548640" y="1874520"/>
+            <a:ext cx="914400" cy="0"/>
+          </a:xfrm>
+          <a:prstGeom prst="line">
+            <a:avLst/>
+          </a:prstGeom>
+          <a:noFill/>
+          <a:ln w="38100">
+            <a:solidFill>
+              <a:srgbClr val="EC5C2A"/>
+            </a:solidFill>
+            <a:prstDash val="solid"/>
+          </a:ln>
+        </p:spPr>
+        <p:txBody>
+          <a:bodyPr/>
+          <a:p/>
+        </p:txBody>
+      </p:sp>
+      <p:sp>
+        <p:nvSpPr>
+          <p:cNvPr id="5" name="Text 3"/>
+          <p:cNvSpPr/>
+          <p:nvPr/>
+        </p:nvSpPr>
+        <p:spPr>
+          <a:xfrm>
+            <a:off x="548640" y="2103120"/>
+            <a:ext cx="10972800" cy="365760"/>
+          </a:xfrm>
+          <a:prstGeom prst="rect">
+            <a:avLst/>
+          </a:prstGeom>
+          <a:noFill/>
+          <a:ln/>
+        </p:spPr>
+        <p:txBody>
+          <a:bodyPr wrap="square" rtlCol="0" anchor="ctr"/>
+          <a:lstStyle/>
+          <a:p>
+            <a:pPr indent="0" marL="0">
+              <a:buNone/>
+            </a:pPr>
+            <a:r>
+              <a:rPr lang="en-US" sz="1100" i="1" dirty="0">
+                <a:solidFill>
+                  <a:srgbClr val="6B6B6F"/>
+                </a:solidFill>
+                <a:latin typeface="Roboto" pitchFamily="34" charset="0"/>
+                <a:ea typeface="Roboto" pitchFamily="34" charset="-122"/>
+                <a:cs typeface="Roboto" pitchFamily="34" charset="-120"/>
+              </a:rPr>
+              <a:t>Why these sources support the claims in this deck. Entries [5], [6], [8], [9].</a:t>
+            </a:r>
+            <a:endParaRPr lang="en-US" sz="1100" dirty="0"/>
+          </a:p>
+        </p:txBody>
+      </p:sp>
+      <p:sp>
+        <p:nvSpPr>
+          <p:cNvPr id="6" name="Text 4"/>
+          <p:cNvSpPr/>
+          <p:nvPr/>
+        </p:nvSpPr>
+        <p:spPr>
+          <a:xfrm>
+            <a:off x="548640" y="2606040"/>
+            <a:ext cx="5486400" cy="3657600"/>
+          </a:xfrm>
+          <a:prstGeom prst="rect">
+            <a:avLst/>
+          </a:prstGeom>
+          <a:noFill/>
+          <a:ln/>
+        </p:spPr>
+        <p:txBody>
+          <a:bodyPr wrap="square" rtlCol="0" anchor="ctr"/>
+          <a:lstStyle/>
+          <a:p>
+            <a:pPr indent="0" marL="0">
+              <a:lnSpc>
+                <a:spcPct val="130000"/>
+              </a:lnSpc>
+              <a:buNone/>
+            </a:pPr>
+            <a:r>
+              <a:rPr lang="en-US" sz="900" b="1" dirty="0">
+                <a:solidFill>
+                  <a:srgbClr val="EC5C2A"/>
+                </a:solidFill>
+                <a:latin typeface="Roboto Condensed" pitchFamily="34" charset="0"/>
+                <a:ea typeface="Roboto Condensed" pitchFamily="34" charset="-122"/>
+                <a:cs typeface="Roboto Condensed" pitchFamily="34" charset="-120"/>
+              </a:rPr>
+              <a:t>[5] </a:t>
+            </a:r>
+            <a:pPr indent="0" marL="0">
+              <a:lnSpc>
+                <a:spcPct val="130000"/>
+              </a:lnSpc>
+              <a:buNone/>
+            </a:pPr>
+            <a:r>
+              <a:rPr lang="en-US" sz="900" dirty="0" b="0">
+                <a:solidFill>
+                  <a:srgbClr val="404040"/>
+                </a:solidFill>
+                <a:latin typeface="Roboto Condensed" pitchFamily="34" charset="0"/>
+                <a:ea typeface="Roboto Condensed" pitchFamily="34" charset="-122"/>
+                <a:cs typeface="Roboto Condensed" pitchFamily="34" charset="-120"/>
+              </a:rPr>
+              <a:t>Penner et al. (2005). Prosocial Behavior: Multilevel Perspectives. Annual Review of Psychology, 56.
+</a:t>
+            </a:r>
+            <a:pPr indent="0" marL="0">
+              <a:lnSpc>
+                <a:spcPct val="130000"/>
+              </a:lnSpc>
+              <a:buNone/>
+            </a:pPr>
+            <a:r>
+              <a:rPr lang="en-US" sz="900" u="sng" dirty="0" b="0">
+                <a:solidFill>
+                  <a:srgbClr val="4491A9"/>
+                </a:solidFill>
+                <a:latin typeface="Roboto Condensed" pitchFamily="34" charset="0"/>
+                <a:ea typeface="Roboto Condensed" pitchFamily="34" charset="-122"/>
+                <a:cs typeface="Roboto Condensed" pitchFamily="34" charset="-120"/>
+                <a:hlinkClick r:id="rId1" invalidUrl="" action="" tgtFrame="" tooltip="" history="1" highlightClick="0" endSnd="0">
+                  <a:extLst>
+                    <a:ext uri="{A12FA001-AC4F-418D-AE19-62706E023703}">
+                      <ahyp:hlinkClr xmlns:ahyp="http://schemas.microsoft.com/office/drawing/2018/hyperlinkcolor" val="tx"/>
+                    </a:ext>
+                  </a:extLst>
+                </a:hlinkClick>
+              </a:rPr>
+              <a:t>https://doi.org/10.1146/annurev.psych.56.091103.070141
+</a:t>
+            </a:r>
+            <a:pPr indent="0" marL="0">
+              <a:lnSpc>
+                <a:spcPct val="130000"/>
+              </a:lnSpc>
+              <a:buNone/>
+            </a:pPr>
+            <a:r>
+              <a:rPr lang="en-US" sz="900" b="0" dirty="0">
+                <a:solidFill>
+                  <a:srgbClr val="EC5C2A"/>
+                </a:solidFill>
+                <a:latin typeface="Roboto Condensed" pitchFamily="34" charset="0"/>
+                <a:ea typeface="Roboto Condensed" pitchFamily="34" charset="-122"/>
+                <a:cs typeface="Roboto Condensed" pitchFamily="34" charset="-120"/>
+              </a:rPr>
+              <a:t>This is the canonical review of prosocial behavior across individual, dyadic, and group levels, including the conditions under which helping becomes part of self-concept rather than a one-off act. Slides 5 and 6 build on it to describe identity-level prosocial change as something that generalizes across life domains and persists. The review distinguishes situational helping, which fades, from identity-anchored helping, which compounds. That distinction is why we measure identity language at six and twelve months rather than satisfaction immediately after the event.
+</a:t>
+            </a:r>
+            <a:pPr indent="0" marL="0">
+              <a:lnSpc>
+                <a:spcPct val="130000"/>
+              </a:lnSpc>
+              <a:buNone/>
+            </a:pPr>
+            <a:r>
+              <a:rPr lang="en-US" sz="900" dirty="0" b="1">
+                <a:solidFill>
+                  <a:srgbClr val="404040"/>
+                </a:solidFill>
+                <a:latin typeface="Roboto Condensed" pitchFamily="34" charset="0"/>
+                <a:ea typeface="Roboto Condensed" pitchFamily="34" charset="-122"/>
+                <a:cs typeface="Roboto Condensed" pitchFamily="34" charset="-120"/>
+              </a:rPr>
+              <a:t>[6] </a:t>
+            </a:r>
+            <a:pPr indent="0" marL="0">
+              <a:lnSpc>
+                <a:spcPct val="130000"/>
+              </a:lnSpc>
+              <a:buNone/>
+            </a:pPr>
+            <a:r>
+              <a:rPr lang="en-US" sz="900" u="sng" dirty="0" b="0">
+                <a:solidFill>
+                  <a:srgbClr val="4491A9"/>
+                </a:solidFill>
+                <a:latin typeface="Roboto Condensed" pitchFamily="34" charset="0"/>
+                <a:ea typeface="Roboto Condensed" pitchFamily="34" charset="-122"/>
+                <a:cs typeface="Roboto Condensed" pitchFamily="34" charset="-120"/>
+                <a:hlinkClick r:id="rId2" invalidUrl="" action="" tgtFrame="" tooltip="" history="1" highlightClick="0" endSnd="0">
+                  <a:extLst>
+                    <a:ext uri="{A12FA001-AC4F-418D-AE19-62706E023703}">
+                      <ahyp:hlinkClr xmlns:ahyp="http://schemas.microsoft.com/office/drawing/2018/hyperlinkcolor" val="tx"/>
+                    </a:ext>
+                  </a:extLst>
+                </a:hlinkClick>
+              </a:rPr>
+              <a:t>Tajfel &amp; Turner (1979). An Integrative Theory of Intergroup Conflict.
+</a:t>
+            </a:r>
+            <a:pPr indent="0" marL="0">
+              <a:lnSpc>
+                <a:spcPct val="130000"/>
+              </a:lnSpc>
+              <a:buNone/>
+            </a:pPr>
+            <a:r>
+              <a:rPr lang="en-US" sz="900" b="0" dirty="0">
+                <a:solidFill>
+                  <a:srgbClr val="EC5C2A"/>
+                </a:solidFill>
+                <a:latin typeface="Roboto Condensed" pitchFamily="34" charset="0"/>
+                <a:ea typeface="Roboto Condensed" pitchFamily="34" charset="-122"/>
+                <a:cs typeface="Roboto Condensed" pitchFamily="34" charset="-120"/>
+              </a:rPr>
+              <a:t>https://doi.org/10.1016/S0065-2601(05)37005-5
+</a:t>
+            </a:r>
+            <a:pPr indent="0" marL="0">
+              <a:lnSpc>
+                <a:spcPct val="130000"/>
+              </a:lnSpc>
+              <a:buNone/>
+            </a:pPr>
+            <a:r>
+              <a:rPr lang="en-US" sz="900" dirty="0" b="0">
+                <a:solidFill>
+                  <a:srgbClr val="404040"/>
+                </a:solidFill>
+                <a:latin typeface="Roboto Condensed" pitchFamily="34" charset="0"/>
+                <a:ea typeface="Roboto Condensed" pitchFamily="34" charset="-122"/>
+                <a:cs typeface="Roboto Condensed" pitchFamily="34" charset="-120"/>
+              </a:rPr>
+              <a:t>Social Identity Theory establishes that group membership is a core component of self-concept and that shared identity drives behavior beyond what individual motivation explains. Slide 4 uses this to ground the cohort-as-amplifier claim: a multi-company peer group continues for six months because shared identity sustains the new practice. Slide 6 extends it to the company side, where the employer becomes associated with prosocial identity. Without the cohort architecture, individual motivation has to carry the whole load, and most programs lose people within a quarter.</a:t>
+            </a:r>
+            <a:pPr indent="0" marL="0">
+              <a:lnSpc>
+                <a:spcPct val="130000"/>
+              </a:lnSpc>
+              <a:buNone/>
+            </a:pPr>
+            <a:r>
+              <a:rPr lang="en-US" sz="900" u="sng" dirty="0">
+                <a:solidFill>
+                  <a:srgbClr val="4491A9"/>
+                </a:solidFill>
+                <a:latin typeface="Roboto Condensed" pitchFamily="34" charset="0"/>
+                <a:ea typeface="Roboto Condensed" pitchFamily="34" charset="-122"/>
+                <a:cs typeface="Roboto Condensed" pitchFamily="34" charset="-120"/>
+                <a:hlinkClick r:id="rId3" invalidUrl="" action="" tgtFrame="" tooltip="" history="1" highlightClick="0" endSnd="0">
+                  <a:extLst>
+                    <a:ext uri="{A12FA001-AC4F-418D-AE19-62706E023703}">
+                      <ahyp:hlinkClr xmlns:ahyp="http://schemas.microsoft.com/office/drawing/2018/hyperlinkcolor" val="tx"/>
+                    </a:ext>
+                  </a:extLst>
+                </a:hlinkClick>
+              </a:rPr>
+              <a:t/>
+            </a:r>
+            <a:pPr indent="0" marL="0">
+              <a:lnSpc>
+                <a:spcPct val="130000"/>
+              </a:lnSpc>
+              <a:buNone/>
+            </a:pPr>
+            <a:r>
+              <a:rPr lang="en-US" sz="900" b="1" dirty="0">
+                <a:solidFill>
+                  <a:srgbClr val="EC5C2A"/>
+                </a:solidFill>
+                <a:latin typeface="Roboto Condensed" pitchFamily="34" charset="0"/>
+                <a:ea typeface="Roboto Condensed" pitchFamily="34" charset="-122"/>
+                <a:cs typeface="Roboto Condensed" pitchFamily="34" charset="-120"/>
+              </a:rPr>
+              <a:t/>
+            </a:r>
+            <a:pPr indent="0" marL="0">
+              <a:lnSpc>
+                <a:spcPct val="130000"/>
+              </a:lnSpc>
+              <a:buNone/>
+            </a:pPr>
+            <a:r>
+              <a:rPr lang="en-US" sz="900" dirty="0">
+                <a:solidFill>
+                  <a:srgbClr val="404040"/>
+                </a:solidFill>
+                <a:latin typeface="Roboto Condensed" pitchFamily="34" charset="0"/>
+                <a:ea typeface="Roboto Condensed" pitchFamily="34" charset="-122"/>
+                <a:cs typeface="Roboto Condensed" pitchFamily="34" charset="-120"/>
+              </a:rPr>
+              <a:t/>
+            </a:r>
+            <a:pPr indent="0" marL="0">
+              <a:lnSpc>
+                <a:spcPct val="130000"/>
+              </a:lnSpc>
+              <a:buNone/>
+            </a:pPr>
+            <a:r>
+              <a:rPr lang="en-US" sz="900" u="sng" dirty="0">
+                <a:solidFill>
+                  <a:srgbClr val="4491A9"/>
+                </a:solidFill>
+                <a:latin typeface="Roboto Condensed" pitchFamily="34" charset="0"/>
+                <a:ea typeface="Roboto Condensed" pitchFamily="34" charset="-122"/>
+                <a:cs typeface="Roboto Condensed" pitchFamily="34" charset="-120"/>
+                <a:hlinkClick r:id="rId4" invalidUrl="" action="" tgtFrame="" tooltip="" history="1" highlightClick="0" endSnd="0">
+                  <a:extLst>
+                    <a:ext uri="{A12FA001-AC4F-418D-AE19-62706E023703}">
+                      <ahyp:hlinkClr xmlns:ahyp="http://schemas.microsoft.com/office/drawing/2018/hyperlinkcolor" val="tx"/>
+                    </a:ext>
+                  </a:extLst>
+                </a:hlinkClick>
+              </a:rPr>
+              <a:t/>
+            </a:r>
+            <a:pPr indent="0" marL="0">
+              <a:lnSpc>
+                <a:spcPct val="130000"/>
+              </a:lnSpc>
+              <a:buNone/>
+            </a:pPr>
+            <a:r>
+              <a:rPr lang="en-US" sz="900" b="1" dirty="0">
+                <a:solidFill>
+                  <a:srgbClr val="EC5C2A"/>
+                </a:solidFill>
+                <a:latin typeface="Roboto Condensed" pitchFamily="34" charset="0"/>
+                <a:ea typeface="Roboto Condensed" pitchFamily="34" charset="-122"/>
+                <a:cs typeface="Roboto Condensed" pitchFamily="34" charset="-120"/>
+              </a:rPr>
+              <a:t/>
+            </a:r>
+            <a:pPr indent="0" marL="0">
+              <a:lnSpc>
+                <a:spcPct val="130000"/>
+              </a:lnSpc>
+              <a:buNone/>
+            </a:pPr>
+            <a:r>
+              <a:rPr lang="en-US" sz="900" dirty="0">
+                <a:solidFill>
+                  <a:srgbClr val="404040"/>
+                </a:solidFill>
+                <a:latin typeface="Roboto Condensed" pitchFamily="34" charset="0"/>
+                <a:ea typeface="Roboto Condensed" pitchFamily="34" charset="-122"/>
+                <a:cs typeface="Roboto Condensed" pitchFamily="34" charset="-120"/>
+              </a:rPr>
+              <a:t/>
+            </a:r>
+            <a:pPr indent="0" marL="0">
+              <a:lnSpc>
+                <a:spcPct val="130000"/>
+              </a:lnSpc>
+              <a:buNone/>
+            </a:pPr>
+            <a:r>
+              <a:rPr lang="en-US" sz="900" u="sng" dirty="0">
+                <a:solidFill>
+                  <a:srgbClr val="4491A9"/>
+                </a:solidFill>
+                <a:latin typeface="Roboto Condensed" pitchFamily="34" charset="0"/>
+                <a:ea typeface="Roboto Condensed" pitchFamily="34" charset="-122"/>
+                <a:cs typeface="Roboto Condensed" pitchFamily="34" charset="-120"/>
+                <a:hlinkClick r:id="rId5" invalidUrl="" action="" tgtFrame="" tooltip="" history="1" highlightClick="0" endSnd="0">
+                  <a:extLst>
+                    <a:ext uri="{A12FA001-AC4F-418D-AE19-62706E023703}">
+                      <ahyp:hlinkClr xmlns:ahyp="http://schemas.microsoft.com/office/drawing/2018/hyperlinkcolor" val="tx"/>
+                    </a:ext>
+                  </a:extLst>
+                </a:hlinkClick>
+              </a:rPr>
+              <a:t/>
+            </a:r>
+            <a:pPr indent="0" marL="0">
+              <a:lnSpc>
+                <a:spcPct val="130000"/>
+              </a:lnSpc>
+              <a:buNone/>
+            </a:pPr>
+            <a:r>
+              <a:rPr lang="en-US" sz="900" b="1" dirty="0">
+                <a:solidFill>
+                  <a:srgbClr val="EC5C2A"/>
+                </a:solidFill>
+                <a:latin typeface="Roboto Condensed" pitchFamily="34" charset="0"/>
+                <a:ea typeface="Roboto Condensed" pitchFamily="34" charset="-122"/>
+                <a:cs typeface="Roboto Condensed" pitchFamily="34" charset="-120"/>
+              </a:rPr>
+              <a:t/>
+            </a:r>
+            <a:pPr indent="0" marL="0">
+              <a:lnSpc>
+                <a:spcPct val="130000"/>
+              </a:lnSpc>
+              <a:buNone/>
+            </a:pPr>
+            <a:r>
+              <a:rPr lang="en-US" sz="900" dirty="0">
+                <a:solidFill>
+                  <a:srgbClr val="404040"/>
+                </a:solidFill>
+                <a:latin typeface="Roboto Condensed" pitchFamily="34" charset="0"/>
+                <a:ea typeface="Roboto Condensed" pitchFamily="34" charset="-122"/>
+                <a:cs typeface="Roboto Condensed" pitchFamily="34" charset="-120"/>
+              </a:rPr>
+              <a:t/>
+            </a:r>
+            <a:pPr indent="0" marL="0">
+              <a:lnSpc>
+                <a:spcPct val="130000"/>
+              </a:lnSpc>
+              <a:buNone/>
+            </a:pPr>
+            <a:r>
+              <a:rPr lang="en-US" sz="900" u="sng" dirty="0">
+                <a:solidFill>
+                  <a:srgbClr val="4491A9"/>
+                </a:solidFill>
+                <a:latin typeface="Roboto Condensed" pitchFamily="34" charset="0"/>
+                <a:ea typeface="Roboto Condensed" pitchFamily="34" charset="-122"/>
+                <a:cs typeface="Roboto Condensed" pitchFamily="34" charset="-120"/>
+                <a:hlinkClick r:id="rId6" invalidUrl="" action="" tgtFrame="" tooltip="" history="1" highlightClick="0" endSnd="0">
+                  <a:extLst>
+                    <a:ext uri="{A12FA001-AC4F-418D-AE19-62706E023703}">
+                      <ahyp:hlinkClr xmlns:ahyp="http://schemas.microsoft.com/office/drawing/2018/hyperlinkcolor" val="tx"/>
+                    </a:ext>
+                  </a:extLst>
+                </a:hlinkClick>
+              </a:rPr>
+              <a:t/>
+            </a:r>
+            <a:pPr indent="0" marL="0">
+              <a:lnSpc>
+                <a:spcPct val="130000"/>
+              </a:lnSpc>
+              <a:buNone/>
+            </a:pPr>
+            <a:r>
+              <a:rPr lang="en-US" sz="900" b="1" dirty="0">
+                <a:solidFill>
+                  <a:srgbClr val="EC5C2A"/>
+                </a:solidFill>
+                <a:latin typeface="Roboto Condensed" pitchFamily="34" charset="0"/>
+                <a:ea typeface="Roboto Condensed" pitchFamily="34" charset="-122"/>
+                <a:cs typeface="Roboto Condensed" pitchFamily="34" charset="-120"/>
+              </a:rPr>
+              <a:t/>
+            </a:r>
+            <a:pPr indent="0" marL="0">
+              <a:lnSpc>
+                <a:spcPct val="130000"/>
+              </a:lnSpc>
+              <a:buNone/>
+            </a:pPr>
+            <a:r>
+              <a:rPr lang="en-US" sz="900" dirty="0">
+                <a:solidFill>
+                  <a:srgbClr val="404040"/>
+                </a:solidFill>
+                <a:latin typeface="Roboto Condensed" pitchFamily="34" charset="0"/>
+                <a:ea typeface="Roboto Condensed" pitchFamily="34" charset="-122"/>
+                <a:cs typeface="Roboto Condensed" pitchFamily="34" charset="-120"/>
+              </a:rPr>
+              <a:t/>
+            </a:r>
+            <a:pPr indent="0" marL="0">
+              <a:lnSpc>
+                <a:spcPct val="130000"/>
+              </a:lnSpc>
+              <a:buNone/>
+            </a:pPr>
+            <a:r>
+              <a:rPr lang="en-US" sz="900" u="sng" dirty="0">
+                <a:solidFill>
+                  <a:srgbClr val="4491A9"/>
+                </a:solidFill>
+                <a:latin typeface="Roboto Condensed" pitchFamily="34" charset="0"/>
+                <a:ea typeface="Roboto Condensed" pitchFamily="34" charset="-122"/>
+                <a:cs typeface="Roboto Condensed" pitchFamily="34" charset="-120"/>
+                <a:hlinkClick r:id="rId7" invalidUrl="" action="" tgtFrame="" tooltip="" history="1" highlightClick="0" endSnd="0">
+                  <a:extLst>
+                    <a:ext uri="{A12FA001-AC4F-418D-AE19-62706E023703}">
+                      <ahyp:hlinkClr xmlns:ahyp="http://schemas.microsoft.com/office/drawing/2018/hyperlinkcolor" val="tx"/>
+                    </a:ext>
+                  </a:extLst>
+                </a:hlinkClick>
+              </a:rPr>
+              <a:t/>
+            </a:r>
+            <a:pPr indent="0" marL="0">
+              <a:lnSpc>
+                <a:spcPct val="130000"/>
+              </a:lnSpc>
+              <a:buNone/>
+            </a:pPr>
+            <a:r>
+              <a:rPr lang="en-US" sz="900" b="1" dirty="0">
+                <a:solidFill>
+                  <a:srgbClr val="EC5C2A"/>
+                </a:solidFill>
+                <a:latin typeface="Roboto Condensed" pitchFamily="34" charset="0"/>
+                <a:ea typeface="Roboto Condensed" pitchFamily="34" charset="-122"/>
+                <a:cs typeface="Roboto Condensed" pitchFamily="34" charset="-120"/>
+              </a:rPr>
+              <a:t/>
+            </a:r>
+            <a:pPr indent="0" marL="0">
+              <a:lnSpc>
+                <a:spcPct val="130000"/>
+              </a:lnSpc>
+              <a:buNone/>
+            </a:pPr>
+            <a:r>
+              <a:rPr lang="en-US" sz="900" dirty="0">
+                <a:solidFill>
+                  <a:srgbClr val="404040"/>
+                </a:solidFill>
+                <a:latin typeface="Roboto Condensed" pitchFamily="34" charset="0"/>
+                <a:ea typeface="Roboto Condensed" pitchFamily="34" charset="-122"/>
+                <a:cs typeface="Roboto Condensed" pitchFamily="34" charset="-120"/>
+              </a:rPr>
+              <a:t/>
+            </a:r>
+            <a:pPr indent="0" marL="0">
+              <a:lnSpc>
+                <a:spcPct val="130000"/>
+              </a:lnSpc>
+              <a:buNone/>
+            </a:pPr>
+            <a:r>
+              <a:rPr lang="en-US" sz="900" u="sng" dirty="0">
+                <a:solidFill>
+                  <a:srgbClr val="4491A9"/>
+                </a:solidFill>
+                <a:latin typeface="Roboto Condensed" pitchFamily="34" charset="0"/>
+                <a:ea typeface="Roboto Condensed" pitchFamily="34" charset="-122"/>
+                <a:cs typeface="Roboto Condensed" pitchFamily="34" charset="-120"/>
+                <a:hlinkClick r:id="rId8" invalidUrl="" action="" tgtFrame="" tooltip="" history="1" highlightClick="0" endSnd="0">
+                  <a:extLst>
+                    <a:ext uri="{A12FA001-AC4F-418D-AE19-62706E023703}">
+                      <ahyp:hlinkClr xmlns:ahyp="http://schemas.microsoft.com/office/drawing/2018/hyperlinkcolor" val="tx"/>
+                    </a:ext>
+                  </a:extLst>
+                </a:hlinkClick>
+              </a:rPr>
+              <a:t/>
+            </a:r>
+            <a:endParaRPr lang="en-US" sz="900" dirty="0"/>
+          </a:p>
+        </p:txBody>
+      </p:sp>
+      <p:sp>
+        <p:nvSpPr>
+          <p:cNvPr id="7" name="Text 5"/>
+          <p:cNvSpPr/>
+          <p:nvPr/>
+        </p:nvSpPr>
+        <p:spPr>
+          <a:xfrm>
+            <a:off x="6309360" y="2606040"/>
+            <a:ext cx="5486400" cy="3657600"/>
+          </a:xfrm>
+          <a:prstGeom prst="rect">
+            <a:avLst/>
+          </a:prstGeom>
+          <a:noFill/>
+          <a:ln/>
+        </p:spPr>
+        <p:txBody>
+          <a:bodyPr wrap="square" rtlCol="0" anchor="ctr"/>
+          <a:lstStyle/>
+          <a:p>
+            <a:pPr indent="0" marL="0">
+              <a:lnSpc>
+                <a:spcPct val="130000"/>
+              </a:lnSpc>
+              <a:buNone/>
+            </a:pPr>
+            <a:r>
+              <a:rPr lang="en-US" sz="900" b="1" dirty="0">
+                <a:solidFill>
+                  <a:srgbClr val="EC5C2A"/>
+                </a:solidFill>
+                <a:latin typeface="Roboto Condensed" pitchFamily="34" charset="0"/>
+                <a:ea typeface="Roboto Condensed" pitchFamily="34" charset="-122"/>
+                <a:cs typeface="Roboto Condensed" pitchFamily="34" charset="-120"/>
+              </a:rPr>
+              <a:t>[8] </a:t>
+            </a:r>
+            <a:pPr indent="0" marL="0">
+              <a:lnSpc>
+                <a:spcPct val="130000"/>
+              </a:lnSpc>
+              <a:buNone/>
+            </a:pPr>
+            <a:r>
+              <a:rPr lang="en-US" sz="900" dirty="0" b="0">
+                <a:solidFill>
+                  <a:srgbClr val="404040"/>
+                </a:solidFill>
+                <a:latin typeface="Roboto Condensed" pitchFamily="34" charset="0"/>
+                <a:ea typeface="Roboto Condensed" pitchFamily="34" charset="-122"/>
+                <a:cs typeface="Roboto Condensed" pitchFamily="34" charset="-120"/>
+              </a:rPr>
+              <a:t>Haslam, S.A. (2004). Psychology in Organizations: The Social Identity Approach.
+</a:t>
+            </a:r>
+            <a:pPr indent="0" marL="0">
+              <a:lnSpc>
+                <a:spcPct val="130000"/>
+              </a:lnSpc>
+              <a:buNone/>
+            </a:pPr>
+            <a:r>
+              <a:rPr lang="en-US" sz="900" u="sng" dirty="0" b="0">
+                <a:solidFill>
+                  <a:srgbClr val="4491A9"/>
+                </a:solidFill>
+                <a:latin typeface="Roboto Condensed" pitchFamily="34" charset="0"/>
+                <a:ea typeface="Roboto Condensed" pitchFamily="34" charset="-122"/>
+                <a:cs typeface="Roboto Condensed" pitchFamily="34" charset="-120"/>
+                <a:hlinkClick r:id="rId9" invalidUrl="" action="" tgtFrame="" tooltip="" history="1" highlightClick="0" endSnd="0">
+                  <a:extLst>
+                    <a:ext uri="{A12FA001-AC4F-418D-AE19-62706E023703}">
+                      <ahyp:hlinkClr xmlns:ahyp="http://schemas.microsoft.com/office/drawing/2018/hyperlinkcolor" val="tx"/>
+                    </a:ext>
+                  </a:extLst>
+                </a:hlinkClick>
+              </a:rPr>
+              <a:t>https://doi.org/10.4135/9781446278819
+</a:t>
+            </a:r>
+            <a:pPr indent="0" marL="0">
+              <a:lnSpc>
+                <a:spcPct val="130000"/>
+              </a:lnSpc>
+              <a:buNone/>
+            </a:pPr>
+            <a:r>
+              <a:rPr lang="en-US" sz="900" b="0" dirty="0">
+                <a:solidFill>
+                  <a:srgbClr val="EC5C2A"/>
+                </a:solidFill>
+                <a:latin typeface="Roboto Condensed" pitchFamily="34" charset="0"/>
+                <a:ea typeface="Roboto Condensed" pitchFamily="34" charset="-122"/>
+                <a:cs typeface="Roboto Condensed" pitchFamily="34" charset="-120"/>
+              </a:rPr>
+              <a:t>Haslam translates Social Identity Theory into organizational contexts, showing how shared identity shapes leadership, communication, and behavioral norms inside companies. It is paired with Tajfel and Turner on slide 4 because the cohort is not an abstract psychological group; it is a working community of practice across companies, which is the unit Haslam analyzes. The book also supports the design of champion networks, where identity-based norms scale faster and more durably than rule-based compliance. This grounds the claim that a small trained cohort is a structural intervention.
+</a:t>
+            </a:r>
+            <a:pPr indent="0" marL="0">
+              <a:lnSpc>
+                <a:spcPct val="130000"/>
+              </a:lnSpc>
+              <a:buNone/>
+            </a:pPr>
+            <a:r>
+              <a:rPr lang="en-US" sz="900" dirty="0" b="1">
+                <a:solidFill>
+                  <a:srgbClr val="404040"/>
+                </a:solidFill>
+                <a:latin typeface="Roboto Condensed" pitchFamily="34" charset="0"/>
+                <a:ea typeface="Roboto Condensed" pitchFamily="34" charset="-122"/>
+                <a:cs typeface="Roboto Condensed" pitchFamily="34" charset="-120"/>
+              </a:rPr>
+              <a:t>[9] </a:t>
+            </a:r>
+            <a:pPr indent="0" marL="0">
+              <a:lnSpc>
+                <a:spcPct val="130000"/>
+              </a:lnSpc>
+              <a:buNone/>
+            </a:pPr>
+            <a:r>
+              <a:rPr lang="en-US" sz="900" u="sng" dirty="0" b="0">
+                <a:solidFill>
+                  <a:srgbClr val="4491A9"/>
+                </a:solidFill>
+                <a:latin typeface="Roboto Condensed" pitchFamily="34" charset="0"/>
+                <a:ea typeface="Roboto Condensed" pitchFamily="34" charset="-122"/>
+                <a:cs typeface="Roboto Condensed" pitchFamily="34" charset="-120"/>
+                <a:hlinkClick r:id="rId10" invalidUrl="" action="" tgtFrame="" tooltip="" history="1" highlightClick="0" endSnd="0">
+                  <a:extLst>
+                    <a:ext uri="{A12FA001-AC4F-418D-AE19-62706E023703}">
+                      <ahyp:hlinkClr xmlns:ahyp="http://schemas.microsoft.com/office/drawing/2018/hyperlinkcolor" val="tx"/>
+                    </a:ext>
+                  </a:extLst>
+                </a:hlinkClick>
+              </a:rPr>
+              <a:t>Kolb, D.A. (1984). Experiential Learning.
+</a:t>
+            </a:r>
+            <a:pPr indent="0" marL="0">
+              <a:lnSpc>
+                <a:spcPct val="130000"/>
+              </a:lnSpc>
+              <a:buNone/>
+            </a:pPr>
+            <a:r>
+              <a:rPr lang="en-US" sz="900" b="0" dirty="0">
+                <a:solidFill>
+                  <a:srgbClr val="EC5C2A"/>
+                </a:solidFill>
+                <a:latin typeface="Roboto Condensed" pitchFamily="34" charset="0"/>
+                <a:ea typeface="Roboto Condensed" pitchFamily="34" charset="-122"/>
+                <a:cs typeface="Roboto Condensed" pitchFamily="34" charset="-120"/>
+              </a:rPr>
+              <a:t>https://www.pearson.com/en-us/subject-catalog/p/experiential-learning-experience-as-the-source-of-learning-and-development/P200000003115
+</a:t>
+            </a:r>
+            <a:pPr indent="0" marL="0">
+              <a:lnSpc>
+                <a:spcPct val="130000"/>
+              </a:lnSpc>
+              <a:buNone/>
+            </a:pPr>
+            <a:r>
+              <a:rPr lang="en-US" sz="900" dirty="0" b="0">
+                <a:solidFill>
+                  <a:srgbClr val="404040"/>
+                </a:solidFill>
+                <a:latin typeface="Roboto Condensed" pitchFamily="34" charset="0"/>
+                <a:ea typeface="Roboto Condensed" pitchFamily="34" charset="-122"/>
+                <a:cs typeface="Roboto Condensed" pitchFamily="34" charset="-120"/>
+              </a:rPr>
+              <a:t>Kolb's experiential learning cycle (concrete experience, reflective observation, abstract conceptualization, active experimentation) is the basis for the slide 4 claim that practice, not lecture, is what produces skill acquisition. Adults do not learn facilitation by reading about it. They learn by doing it, getting feedback, adjusting, and doing it again. The two-day campus is built around this cycle, with live briefs and debriefs followed by structured reflection rather than instruction. Without the experiential loop, knowledge transfers but behavior does not.</a:t>
+            </a:r>
+            <a:pPr indent="0" marL="0">
+              <a:lnSpc>
+                <a:spcPct val="130000"/>
+              </a:lnSpc>
+              <a:buNone/>
+            </a:pPr>
+            <a:r>
+              <a:rPr lang="en-US" sz="900" u="sng" dirty="0">
+                <a:solidFill>
+                  <a:srgbClr val="4491A9"/>
+                </a:solidFill>
+                <a:latin typeface="Roboto Condensed" pitchFamily="34" charset="0"/>
+                <a:ea typeface="Roboto Condensed" pitchFamily="34" charset="-122"/>
+                <a:cs typeface="Roboto Condensed" pitchFamily="34" charset="-120"/>
+                <a:hlinkClick r:id="rId11" invalidUrl="" action="" tgtFrame="" tooltip="" history="1" highlightClick="0" endSnd="0">
+                  <a:extLst>
+                    <a:ext uri="{A12FA001-AC4F-418D-AE19-62706E023703}">
+                      <ahyp:hlinkClr xmlns:ahyp="http://schemas.microsoft.com/office/drawing/2018/hyperlinkcolor" val="tx"/>
+                    </a:ext>
+                  </a:extLst>
+                </a:hlinkClick>
+              </a:rPr>
+              <a:t/>
+            </a:r>
+            <a:pPr indent="0" marL="0">
+              <a:lnSpc>
+                <a:spcPct val="130000"/>
+              </a:lnSpc>
+              <a:buNone/>
+            </a:pPr>
+            <a:r>
+              <a:rPr lang="en-US" sz="900" b="1" dirty="0">
+                <a:solidFill>
+                  <a:srgbClr val="EC5C2A"/>
+                </a:solidFill>
+                <a:latin typeface="Roboto Condensed" pitchFamily="34" charset="0"/>
+                <a:ea typeface="Roboto Condensed" pitchFamily="34" charset="-122"/>
+                <a:cs typeface="Roboto Condensed" pitchFamily="34" charset="-120"/>
+              </a:rPr>
+              <a:t/>
+            </a:r>
+            <a:pPr indent="0" marL="0">
+              <a:lnSpc>
+                <a:spcPct val="130000"/>
+              </a:lnSpc>
+              <a:buNone/>
+            </a:pPr>
+            <a:r>
+              <a:rPr lang="en-US" sz="900" dirty="0">
+                <a:solidFill>
+                  <a:srgbClr val="404040"/>
+                </a:solidFill>
+                <a:latin typeface="Roboto Condensed" pitchFamily="34" charset="0"/>
+                <a:ea typeface="Roboto Condensed" pitchFamily="34" charset="-122"/>
+                <a:cs typeface="Roboto Condensed" pitchFamily="34" charset="-120"/>
+              </a:rPr>
+              <a:t/>
+            </a:r>
+            <a:pPr indent="0" marL="0">
+              <a:lnSpc>
+                <a:spcPct val="130000"/>
+              </a:lnSpc>
+              <a:buNone/>
+            </a:pPr>
+            <a:r>
+              <a:rPr lang="en-US" sz="900" u="sng" dirty="0">
+                <a:solidFill>
+                  <a:srgbClr val="4491A9"/>
+                </a:solidFill>
+                <a:latin typeface="Roboto Condensed" pitchFamily="34" charset="0"/>
+                <a:ea typeface="Roboto Condensed" pitchFamily="34" charset="-122"/>
+                <a:cs typeface="Roboto Condensed" pitchFamily="34" charset="-120"/>
+                <a:hlinkClick r:id="rId12" invalidUrl="" action="" tgtFrame="" tooltip="" history="1" highlightClick="0" endSnd="0">
+                  <a:extLst>
+                    <a:ext uri="{A12FA001-AC4F-418D-AE19-62706E023703}">
+                      <ahyp:hlinkClr xmlns:ahyp="http://schemas.microsoft.com/office/drawing/2018/hyperlinkcolor" val="tx"/>
+                    </a:ext>
+                  </a:extLst>
+                </a:hlinkClick>
+              </a:rPr>
+              <a:t/>
+            </a:r>
+            <a:pPr indent="0" marL="0">
+              <a:lnSpc>
+                <a:spcPct val="130000"/>
+              </a:lnSpc>
+              <a:buNone/>
+            </a:pPr>
+            <a:r>
+              <a:rPr lang="en-US" sz="900" b="1" dirty="0">
+                <a:solidFill>
+                  <a:srgbClr val="EC5C2A"/>
+                </a:solidFill>
+                <a:latin typeface="Roboto Condensed" pitchFamily="34" charset="0"/>
+                <a:ea typeface="Roboto Condensed" pitchFamily="34" charset="-122"/>
+                <a:cs typeface="Roboto Condensed" pitchFamily="34" charset="-120"/>
+              </a:rPr>
+              <a:t/>
+            </a:r>
+            <a:pPr indent="0" marL="0">
+              <a:lnSpc>
+                <a:spcPct val="130000"/>
+              </a:lnSpc>
+              <a:buNone/>
+            </a:pPr>
+            <a:r>
+              <a:rPr lang="en-US" sz="900" dirty="0">
+                <a:solidFill>
+                  <a:srgbClr val="404040"/>
+                </a:solidFill>
+                <a:latin typeface="Roboto Condensed" pitchFamily="34" charset="0"/>
+                <a:ea typeface="Roboto Condensed" pitchFamily="34" charset="-122"/>
+                <a:cs typeface="Roboto Condensed" pitchFamily="34" charset="-120"/>
+              </a:rPr>
+              <a:t/>
+            </a:r>
+            <a:pPr indent="0" marL="0">
+              <a:lnSpc>
+                <a:spcPct val="130000"/>
+              </a:lnSpc>
+              <a:buNone/>
+            </a:pPr>
+            <a:r>
+              <a:rPr lang="en-US" sz="900" u="sng" dirty="0">
+                <a:solidFill>
+                  <a:srgbClr val="4491A9"/>
+                </a:solidFill>
+                <a:latin typeface="Roboto Condensed" pitchFamily="34" charset="0"/>
+                <a:ea typeface="Roboto Condensed" pitchFamily="34" charset="-122"/>
+                <a:cs typeface="Roboto Condensed" pitchFamily="34" charset="-120"/>
+                <a:hlinkClick r:id="rId13" invalidUrl="" action="" tgtFrame="" tooltip="" history="1" highlightClick="0" endSnd="0">
+                  <a:extLst>
+                    <a:ext uri="{A12FA001-AC4F-418D-AE19-62706E023703}">
+                      <ahyp:hlinkClr xmlns:ahyp="http://schemas.microsoft.com/office/drawing/2018/hyperlinkcolor" val="tx"/>
+                    </a:ext>
+                  </a:extLst>
+                </a:hlinkClick>
+              </a:rPr>
+              <a:t/>
+            </a:r>
+            <a:pPr indent="0" marL="0">
+              <a:lnSpc>
+                <a:spcPct val="130000"/>
+              </a:lnSpc>
+              <a:buNone/>
+            </a:pPr>
+            <a:r>
+              <a:rPr lang="en-US" sz="900" b="1" dirty="0">
+                <a:solidFill>
+                  <a:srgbClr val="EC5C2A"/>
+                </a:solidFill>
+                <a:latin typeface="Roboto Condensed" pitchFamily="34" charset="0"/>
+                <a:ea typeface="Roboto Condensed" pitchFamily="34" charset="-122"/>
+                <a:cs typeface="Roboto Condensed" pitchFamily="34" charset="-120"/>
+              </a:rPr>
+              <a:t/>
+            </a:r>
+            <a:pPr indent="0" marL="0">
+              <a:lnSpc>
+                <a:spcPct val="130000"/>
+              </a:lnSpc>
+              <a:buNone/>
+            </a:pPr>
+            <a:r>
+              <a:rPr lang="en-US" sz="900" dirty="0">
+                <a:solidFill>
+                  <a:srgbClr val="404040"/>
+                </a:solidFill>
+                <a:latin typeface="Roboto Condensed" pitchFamily="34" charset="0"/>
+                <a:ea typeface="Roboto Condensed" pitchFamily="34" charset="-122"/>
+                <a:cs typeface="Roboto Condensed" pitchFamily="34" charset="-120"/>
+              </a:rPr>
+              <a:t/>
+            </a:r>
+            <a:pPr indent="0" marL="0">
+              <a:lnSpc>
+                <a:spcPct val="130000"/>
+              </a:lnSpc>
+              <a:buNone/>
+            </a:pPr>
+            <a:r>
+              <a:rPr lang="en-US" sz="900" u="sng" dirty="0">
+                <a:solidFill>
+                  <a:srgbClr val="4491A9"/>
+                </a:solidFill>
+                <a:latin typeface="Roboto Condensed" pitchFamily="34" charset="0"/>
+                <a:ea typeface="Roboto Condensed" pitchFamily="34" charset="-122"/>
+                <a:cs typeface="Roboto Condensed" pitchFamily="34" charset="-120"/>
+                <a:hlinkClick r:id="rId14" invalidUrl="" action="" tgtFrame="" tooltip="" history="1" highlightClick="0" endSnd="0">
+                  <a:extLst>
+                    <a:ext uri="{A12FA001-AC4F-418D-AE19-62706E023703}">
+                      <ahyp:hlinkClr xmlns:ahyp="http://schemas.microsoft.com/office/drawing/2018/hyperlinkcolor" val="tx"/>
+                    </a:ext>
+                  </a:extLst>
+                </a:hlinkClick>
+              </a:rPr>
+              <a:t/>
+            </a:r>
+            <a:pPr indent="0" marL="0">
+              <a:lnSpc>
+                <a:spcPct val="130000"/>
+              </a:lnSpc>
+              <a:buNone/>
+            </a:pPr>
+            <a:r>
+              <a:rPr lang="en-US" sz="900" b="1" dirty="0">
+                <a:solidFill>
+                  <a:srgbClr val="EC5C2A"/>
+                </a:solidFill>
+                <a:latin typeface="Roboto Condensed" pitchFamily="34" charset="0"/>
+                <a:ea typeface="Roboto Condensed" pitchFamily="34" charset="-122"/>
+                <a:cs typeface="Roboto Condensed" pitchFamily="34" charset="-120"/>
+              </a:rPr>
+              <a:t/>
+            </a:r>
+            <a:pPr indent="0" marL="0">
+              <a:lnSpc>
+                <a:spcPct val="130000"/>
+              </a:lnSpc>
+              <a:buNone/>
+            </a:pPr>
+            <a:r>
+              <a:rPr lang="en-US" sz="900" dirty="0">
+                <a:solidFill>
+                  <a:srgbClr val="404040"/>
+                </a:solidFill>
+                <a:latin typeface="Roboto Condensed" pitchFamily="34" charset="0"/>
+                <a:ea typeface="Roboto Condensed" pitchFamily="34" charset="-122"/>
+                <a:cs typeface="Roboto Condensed" pitchFamily="34" charset="-120"/>
+              </a:rPr>
+              <a:t/>
+            </a:r>
+            <a:pPr indent="0" marL="0">
+              <a:lnSpc>
+                <a:spcPct val="130000"/>
+              </a:lnSpc>
+              <a:buNone/>
+            </a:pPr>
+            <a:r>
+              <a:rPr lang="en-US" sz="900" u="sng" dirty="0">
+                <a:solidFill>
+                  <a:srgbClr val="4491A9"/>
+                </a:solidFill>
+                <a:latin typeface="Roboto Condensed" pitchFamily="34" charset="0"/>
+                <a:ea typeface="Roboto Condensed" pitchFamily="34" charset="-122"/>
+                <a:cs typeface="Roboto Condensed" pitchFamily="34" charset="-120"/>
+                <a:hlinkClick r:id="rId15" invalidUrl="" action="" tgtFrame="" tooltip="" history="1" highlightClick="0" endSnd="0">
+                  <a:extLst>
+                    <a:ext uri="{A12FA001-AC4F-418D-AE19-62706E023703}">
+                      <ahyp:hlinkClr xmlns:ahyp="http://schemas.microsoft.com/office/drawing/2018/hyperlinkcolor" val="tx"/>
+                    </a:ext>
+                  </a:extLst>
+                </a:hlinkClick>
+              </a:rPr>
+              <a:t/>
+            </a:r>
+            <a:pPr indent="0" marL="0">
+              <a:lnSpc>
+                <a:spcPct val="130000"/>
+              </a:lnSpc>
+              <a:buNone/>
+            </a:pPr>
+            <a:r>
+              <a:rPr lang="en-US" sz="900" b="1" dirty="0">
+                <a:solidFill>
+                  <a:srgbClr val="EC5C2A"/>
+                </a:solidFill>
+                <a:latin typeface="Roboto Condensed" pitchFamily="34" charset="0"/>
+                <a:ea typeface="Roboto Condensed" pitchFamily="34" charset="-122"/>
+                <a:cs typeface="Roboto Condensed" pitchFamily="34" charset="-120"/>
+              </a:rPr>
+              <a:t/>
+            </a:r>
+            <a:pPr indent="0" marL="0">
+              <a:lnSpc>
+                <a:spcPct val="130000"/>
+              </a:lnSpc>
+              <a:buNone/>
+            </a:pPr>
+            <a:r>
+              <a:rPr lang="en-US" sz="900" dirty="0">
+                <a:solidFill>
+                  <a:srgbClr val="404040"/>
+                </a:solidFill>
+                <a:latin typeface="Roboto Condensed" pitchFamily="34" charset="0"/>
+                <a:ea typeface="Roboto Condensed" pitchFamily="34" charset="-122"/>
+                <a:cs typeface="Roboto Condensed" pitchFamily="34" charset="-120"/>
+              </a:rPr>
+              <a:t/>
+            </a:r>
+            <a:pPr indent="0" marL="0">
+              <a:lnSpc>
+                <a:spcPct val="130000"/>
+              </a:lnSpc>
+              <a:buNone/>
+            </a:pPr>
+            <a:r>
+              <a:rPr lang="en-US" sz="900" u="sng" dirty="0">
+                <a:solidFill>
+                  <a:srgbClr val="4491A9"/>
+                </a:solidFill>
+                <a:latin typeface="Roboto Condensed" pitchFamily="34" charset="0"/>
+                <a:ea typeface="Roboto Condensed" pitchFamily="34" charset="-122"/>
+                <a:cs typeface="Roboto Condensed" pitchFamily="34" charset="-120"/>
+                <a:hlinkClick r:id="rId16" invalidUrl="" action="" tgtFrame="" tooltip="" history="1" highlightClick="0" endSnd="0">
+                  <a:extLst>
+                    <a:ext uri="{A12FA001-AC4F-418D-AE19-62706E023703}">
+                      <ahyp:hlinkClr xmlns:ahyp="http://schemas.microsoft.com/office/drawing/2018/hyperlinkcolor" val="tx"/>
+                    </a:ext>
+                  </a:extLst>
+                </a:hlinkClick>
+              </a:rPr>
+              <a:t/>
+            </a:r>
+            <a:endParaRPr lang="en-US" sz="900" dirty="0"/>
+          </a:p>
+        </p:txBody>
+      </p:sp>
+      <p:sp>
+        <p:nvSpPr>
+          <p:cNvPr id="8" name="Shape 6"/>
+          <p:cNvSpPr/>
+          <p:nvPr/>
+        </p:nvSpPr>
+        <p:spPr>
+          <a:xfrm>
+            <a:off x="548640" y="6355080"/>
+            <a:ext cx="11094415" cy="0"/>
+          </a:xfrm>
+          <a:prstGeom prst="line">
+            <a:avLst/>
+          </a:prstGeom>
+          <a:noFill/>
+          <a:ln w="6350">
+            <a:solidFill>
+              <a:srgbClr val="C2C2C6"/>
+            </a:solidFill>
+            <a:prstDash val="solid"/>
+          </a:ln>
+        </p:spPr>
+      </p:sp>
+      <p:sp>
+        <p:nvSpPr>
+          <p:cNvPr id="9" name="Text 7"/>
+          <p:cNvSpPr/>
+          <p:nvPr/>
+        </p:nvSpPr>
+        <p:spPr>
+          <a:xfrm>
+            <a:off x="548640" y="6446520"/>
+            <a:ext cx="7315200" cy="274320"/>
+          </a:xfrm>
+          <a:prstGeom prst="rect">
+            <a:avLst/>
+          </a:prstGeom>
+          <a:noFill/>
+          <a:ln/>
+        </p:spPr>
+        <p:txBody>
+          <a:bodyPr wrap="square" rtlCol="0" anchor="ctr"/>
+          <a:lstStyle/>
+          <a:p>
+            <a:pPr indent="0" marL="0">
+              <a:buNone/>
+            </a:pPr>
+            <a:r>
+              <a:rPr lang="en-US" sz="900" spc="200" kern="0" dirty="0">
+                <a:solidFill>
+                  <a:srgbClr val="6B6B6F"/>
+                </a:solidFill>
+                <a:latin typeface="Roboto Condensed" pitchFamily="34" charset="0"/>
+                <a:ea typeface="Roboto Condensed" pitchFamily="34" charset="-122"/>
+                <a:cs typeface="Roboto Condensed" pitchFamily="34" charset="-120"/>
+              </a:rPr>
+              <a:t>RW Institute · Regional Campus Series</a:t>
+            </a:r>
+            <a:endParaRPr lang="en-US" sz="900" dirty="0"/>
+          </a:p>
+        </p:txBody>
+      </p:sp>
+      <p:sp>
+        <p:nvSpPr>
+          <p:cNvPr id="10" name="Text 8"/>
+          <p:cNvSpPr/>
+          <p:nvPr/>
+        </p:nvSpPr>
+        <p:spPr>
+          <a:xfrm>
+            <a:off x="11277295" y="6446520"/>
+            <a:ext cx="365760" cy="274320"/>
+          </a:xfrm>
+          <a:prstGeom prst="rect">
+            <a:avLst/>
+          </a:prstGeom>
+          <a:noFill/>
+          <a:ln/>
+        </p:spPr>
+        <p:txBody>
+          <a:bodyPr wrap="square" rtlCol="0" anchor="ctr"/>
+          <a:lstStyle/>
+          <a:p>
+            <a:pPr algn="r" indent="0" marL="0">
+              <a:buNone/>
+            </a:pPr>
+            <a:r>
+              <a:rPr lang="en-US" sz="900" dirty="0">
+                <a:solidFill>
+                  <a:srgbClr val="6B6B6F"/>
+                </a:solidFill>
+                <a:latin typeface="Roboto Condensed" pitchFamily="34" charset="0"/>
+                <a:ea typeface="Roboto Condensed" pitchFamily="34" charset="-122"/>
+                <a:cs typeface="Roboto Condensed" pitchFamily="34" charset="-120"/>
+              </a:rPr>
+              <a:t>15</a:t>
+            </a:r>
+            <a:endParaRPr lang="en-US" sz="900" dirty="0"/>
+          </a:p>
+        </p:txBody>
+      </p:sp>
+    </p:spTree>
+  </p:cSld>
+  <p:clrMapOvr>
+    <a:masterClrMapping/>
+  </p:clrMapOvr>
+</p:sld>
+</file>
+
+<file path=ppt/slides/slide16.xml><?xml version="1.0" encoding="utf-8"?>
+<p:sld xmlns:a="http://schemas.openxmlformats.org/drawingml/2006/main" xmlns:p="http://schemas.openxmlformats.org/presentationml/2006/main" xmlns:r="http://schemas.openxmlformats.org/officeDocument/2006/relationships">
+  <p:cSld>
+    <p:spTree>
+      <p:nvGrpSpPr>
+        <p:cNvPr id="1" name=""/>
+        <p:cNvGrpSpPr/>
+        <p:nvPr/>
+      </p:nvGrpSpPr>
+      <p:grpSpPr/>
+      <p:sp>
+        <p:nvSpPr>
+          <p:cNvPr id="2" name="Text 0"/>
+          <p:cNvSpPr/>
+          <p:nvPr/>
+        </p:nvSpPr>
+        <p:spPr>
+          <a:xfrm>
+            <a:off x="548640" y="457200"/>
+            <a:ext cx="10972800" cy="320040"/>
+          </a:xfrm>
+          <a:prstGeom prst="rect">
+            <a:avLst/>
+          </a:prstGeom>
+          <a:noFill/>
+          <a:ln/>
+        </p:spPr>
+        <p:txBody>
+          <a:bodyPr wrap="square" rtlCol="0" anchor="ctr"/>
+          <a:lstStyle/>
+          <a:p>
+            <a:pPr indent="0" marL="0">
+              <a:buNone/>
+            </a:pPr>
+            <a:r>
+              <a:rPr lang="en-US" sz="1000" b="1" spc="400" kern="0" dirty="0">
+                <a:solidFill>
+                  <a:srgbClr val="EC5C2A"/>
+                </a:solidFill>
+                <a:latin typeface="Roboto" pitchFamily="34" charset="0"/>
+                <a:ea typeface="Roboto" pitchFamily="34" charset="-122"/>
+                <a:cs typeface="Roboto" pitchFamily="34" charset="-120"/>
+              </a:rPr>
+              <a:t>REFERENCES</a:t>
+            </a:r>
+            <a:endParaRPr lang="en-US" sz="1000" dirty="0"/>
+          </a:p>
+        </p:txBody>
+      </p:sp>
+      <p:sp>
+        <p:nvSpPr>
+          <p:cNvPr id="3" name="Text 1"/>
+          <p:cNvSpPr/>
+          <p:nvPr/>
+        </p:nvSpPr>
+        <p:spPr>
+          <a:xfrm>
+            <a:off x="548640" y="868680"/>
+            <a:ext cx="10972800" cy="960120"/>
+          </a:xfrm>
+          <a:prstGeom prst="rect">
+            <a:avLst/>
+          </a:prstGeom>
+          <a:noFill/>
+          <a:ln/>
+        </p:spPr>
+        <p:txBody>
+          <a:bodyPr wrap="square" rtlCol="0" anchor="ctr"/>
+          <a:lstStyle/>
+          <a:p>
+            <a:pPr indent="0" marL="0">
+              <a:buNone/>
+            </a:pPr>
+            <a:r>
+              <a:rPr lang="en-US" sz="2800" b="1" dirty="0">
+                <a:solidFill>
+                  <a:srgbClr val="3C3F44"/>
+                </a:solidFill>
+                <a:latin typeface="Roboto" pitchFamily="34" charset="0"/>
+                <a:ea typeface="Roboto" pitchFamily="34" charset="-122"/>
+                <a:cs typeface="Roboto" pitchFamily="34" charset="-120"/>
+              </a:rPr>
+              <a:t>Further reading</a:t>
+            </a:r>
+            <a:endParaRPr lang="en-US" sz="2800" dirty="0"/>
+          </a:p>
+        </p:txBody>
+      </p:sp>
+      <p:sp>
+        <p:nvSpPr>
+          <p:cNvPr id="4" name="Shape 2"/>
+          <p:cNvSpPr/>
+          <p:nvPr/>
+        </p:nvSpPr>
+        <p:spPr>
+          <a:xfrm>
+            <a:off x="548640" y="1874520"/>
+            <a:ext cx="914400" cy="0"/>
+          </a:xfrm>
+          <a:prstGeom prst="line">
+            <a:avLst/>
+          </a:prstGeom>
+          <a:noFill/>
+          <a:ln w="38100">
+            <a:solidFill>
+              <a:srgbClr val="EC5C2A"/>
+            </a:solidFill>
+            <a:prstDash val="solid"/>
+          </a:ln>
+        </p:spPr>
+        <p:txBody>
+          <a:bodyPr/>
+          <a:p/>
+        </p:txBody>
+      </p:sp>
+      <p:sp>
+        <p:nvSpPr>
+          <p:cNvPr id="5" name="Text 3"/>
+          <p:cNvSpPr/>
+          <p:nvPr/>
+        </p:nvSpPr>
+        <p:spPr>
+          <a:xfrm>
+            <a:off x="548640" y="2103120"/>
+            <a:ext cx="10972800" cy="365760"/>
+          </a:xfrm>
+          <a:prstGeom prst="rect">
+            <a:avLst/>
+          </a:prstGeom>
+          <a:noFill/>
+          <a:ln/>
+        </p:spPr>
+        <p:txBody>
+          <a:bodyPr wrap="square" rtlCol="0" anchor="ctr"/>
+          <a:lstStyle/>
+          <a:p>
+            <a:pPr indent="0" marL="0">
+              <a:buNone/>
+            </a:pPr>
+            <a:r>
+              <a:rPr lang="en-US" sz="1100" i="1" dirty="0">
+                <a:solidFill>
+                  <a:srgbClr val="6B6B6F"/>
+                </a:solidFill>
+                <a:latin typeface="Roboto" pitchFamily="34" charset="0"/>
+                <a:ea typeface="Roboto" pitchFamily="34" charset="-122"/>
+                <a:cs typeface="Roboto" pitchFamily="34" charset="-120"/>
+              </a:rPr>
+              <a:t>Why these sources support the claims in this deck. Entries [10], [11], [12], [13].</a:t>
+            </a:r>
+            <a:endParaRPr lang="en-US" sz="1100" dirty="0"/>
+          </a:p>
+        </p:txBody>
+      </p:sp>
+      <p:sp>
+        <p:nvSpPr>
+          <p:cNvPr id="6" name="Text 4"/>
+          <p:cNvSpPr/>
+          <p:nvPr/>
+        </p:nvSpPr>
+        <p:spPr>
+          <a:xfrm>
+            <a:off x="548640" y="2606040"/>
+            <a:ext cx="5486400" cy="3657600"/>
+          </a:xfrm>
+          <a:prstGeom prst="rect">
+            <a:avLst/>
+          </a:prstGeom>
+          <a:noFill/>
+          <a:ln/>
+        </p:spPr>
+        <p:txBody>
+          <a:bodyPr wrap="square" rtlCol="0" anchor="ctr"/>
+          <a:lstStyle/>
+          <a:p>
+            <a:pPr indent="0" marL="0">
+              <a:lnSpc>
+                <a:spcPct val="130000"/>
+              </a:lnSpc>
+              <a:buNone/>
+            </a:pPr>
+            <a:r>
+              <a:rPr lang="en-US" sz="900" b="1" dirty="0">
+                <a:solidFill>
+                  <a:srgbClr val="EC5C2A"/>
+                </a:solidFill>
+                <a:latin typeface="Roboto Condensed" pitchFamily="34" charset="0"/>
+                <a:ea typeface="Roboto Condensed" pitchFamily="34" charset="-122"/>
+                <a:cs typeface="Roboto Condensed" pitchFamily="34" charset="-120"/>
+              </a:rPr>
+              <a:t>[10] </a:t>
+            </a:r>
+            <a:pPr indent="0" marL="0">
+              <a:lnSpc>
+                <a:spcPct val="130000"/>
+              </a:lnSpc>
+              <a:buNone/>
+            </a:pPr>
+            <a:r>
+              <a:rPr lang="en-US" sz="900" dirty="0" b="0">
+                <a:solidFill>
+                  <a:srgbClr val="404040"/>
+                </a:solidFill>
+                <a:latin typeface="Roboto Condensed" pitchFamily="34" charset="0"/>
+                <a:ea typeface="Roboto Condensed" pitchFamily="34" charset="-122"/>
+                <a:cs typeface="Roboto Condensed" pitchFamily="34" charset="-120"/>
+              </a:rPr>
+              <a:t>Grant, A.M. (2008). The Significance of Task Significance. Journal of Applied Psychology, 93(1).
+</a:t>
+            </a:r>
+            <a:pPr indent="0" marL="0">
+              <a:lnSpc>
+                <a:spcPct val="130000"/>
+              </a:lnSpc>
+              <a:buNone/>
+            </a:pPr>
+            <a:r>
+              <a:rPr lang="en-US" sz="900" u="sng" dirty="0" b="0">
+                <a:solidFill>
+                  <a:srgbClr val="4491A9"/>
+                </a:solidFill>
+                <a:latin typeface="Roboto Condensed" pitchFamily="34" charset="0"/>
+                <a:ea typeface="Roboto Condensed" pitchFamily="34" charset="-122"/>
+                <a:cs typeface="Roboto Condensed" pitchFamily="34" charset="-120"/>
+                <a:hlinkClick r:id="rId1" invalidUrl="" action="" tgtFrame="" tooltip="" history="1" highlightClick="0" endSnd="0">
+                  <a:extLst>
+                    <a:ext uri="{A12FA001-AC4F-418D-AE19-62706E023703}">
+                      <ahyp:hlinkClr xmlns:ahyp="http://schemas.microsoft.com/office/drawing/2018/hyperlinkcolor" val="tx"/>
+                    </a:ext>
+                  </a:extLst>
+                </a:hlinkClick>
+              </a:rPr>
+              <a:t>https://doi.org/10.1037/0021-9010.93.1.108
+</a:t>
+            </a:r>
+            <a:pPr indent="0" marL="0">
+              <a:lnSpc>
+                <a:spcPct val="130000"/>
+              </a:lnSpc>
+              <a:buNone/>
+            </a:pPr>
+            <a:r>
+              <a:rPr lang="en-US" sz="900" b="0" dirty="0">
+                <a:solidFill>
+                  <a:srgbClr val="EC5C2A"/>
+                </a:solidFill>
+                <a:latin typeface="Roboto Condensed" pitchFamily="34" charset="0"/>
+                <a:ea typeface="Roboto Condensed" pitchFamily="34" charset="-122"/>
+                <a:cs typeface="Roboto Condensed" pitchFamily="34" charset="-120"/>
+              </a:rPr>
+              <a:t>Grant's field experiments showed that brief direct contact between workers and the beneficiaries of their work produced sustained increases in effort and performance for over a month after the contact ended. That is the direct evidence cited on slide 5 for the durability of beneficiary contact, and it is one of the strongest behavioral results in the prosocial-motivation literature. The mechanism matters: hearing a beneficiary's story (not statistics, not goals) is what produces the effect. The Brief operationalizes this by opening every experience with a specific person, not a category of need.
+</a:t>
+            </a:r>
+            <a:pPr indent="0" marL="0">
+              <a:lnSpc>
+                <a:spcPct val="130000"/>
+              </a:lnSpc>
+              <a:buNone/>
+            </a:pPr>
+            <a:r>
+              <a:rPr lang="en-US" sz="900" dirty="0" b="1">
+                <a:solidFill>
+                  <a:srgbClr val="404040"/>
+                </a:solidFill>
+                <a:latin typeface="Roboto Condensed" pitchFamily="34" charset="0"/>
+                <a:ea typeface="Roboto Condensed" pitchFamily="34" charset="-122"/>
+                <a:cs typeface="Roboto Condensed" pitchFamily="34" charset="-120"/>
+              </a:rPr>
+              <a:t>[11] </a:t>
+            </a:r>
+            <a:pPr indent="0" marL="0">
+              <a:lnSpc>
+                <a:spcPct val="130000"/>
+              </a:lnSpc>
+              <a:buNone/>
+            </a:pPr>
+            <a:r>
+              <a:rPr lang="en-US" sz="900" u="sng" dirty="0" b="0">
+                <a:solidFill>
+                  <a:srgbClr val="4491A9"/>
+                </a:solidFill>
+                <a:latin typeface="Roboto Condensed" pitchFamily="34" charset="0"/>
+                <a:ea typeface="Roboto Condensed" pitchFamily="34" charset="-122"/>
+                <a:cs typeface="Roboto Condensed" pitchFamily="34" charset="-120"/>
+                <a:hlinkClick r:id="rId2" invalidUrl="" action="" tgtFrame="" tooltip="" history="1" highlightClick="0" endSnd="0">
+                  <a:extLst>
+                    <a:ext uri="{A12FA001-AC4F-418D-AE19-62706E023703}">
+                      <ahyp:hlinkClr xmlns:ahyp="http://schemas.microsoft.com/office/drawing/2018/hyperlinkcolor" val="tx"/>
+                    </a:ext>
+                  </a:extLst>
+                </a:hlinkClick>
+              </a:rPr>
+              <a:t>Mitchell, T.D. (2008). Traditional vs. Critical Service-Learning. MJCSL, 14(2).
+</a:t>
+            </a:r>
+            <a:pPr indent="0" marL="0">
+              <a:lnSpc>
+                <a:spcPct val="130000"/>
+              </a:lnSpc>
+              <a:buNone/>
+            </a:pPr>
+            <a:r>
+              <a:rPr lang="en-US" sz="900" b="0" dirty="0">
+                <a:solidFill>
+                  <a:srgbClr val="EC5C2A"/>
+                </a:solidFill>
+                <a:latin typeface="Roboto Condensed" pitchFamily="34" charset="0"/>
+                <a:ea typeface="Roboto Condensed" pitchFamily="34" charset="-122"/>
+                <a:cs typeface="Roboto Condensed" pitchFamily="34" charset="-120"/>
+              </a:rPr>
+              <a:t>https://quod.lib.umich.edu/m/mjcsl/3239521.0014.205
+</a:t>
+            </a:r>
+            <a:pPr indent="0" marL="0">
+              <a:lnSpc>
+                <a:spcPct val="130000"/>
+              </a:lnSpc>
+              <a:buNone/>
+            </a:pPr>
+            <a:r>
+              <a:rPr lang="en-US" sz="900" dirty="0" b="0">
+                <a:solidFill>
+                  <a:srgbClr val="404040"/>
+                </a:solidFill>
+                <a:latin typeface="Roboto Condensed" pitchFamily="34" charset="0"/>
+                <a:ea typeface="Roboto Condensed" pitchFamily="34" charset="-122"/>
+                <a:cs typeface="Roboto Condensed" pitchFamily="34" charset="-120"/>
+              </a:rPr>
+              <a:t>Mitchell distinguishes traditional service-learning, which centers the helper and treats beneficiaries as objects of charity, from critical service-learning, which redistributes power and frames the work as solidarity rather than service. Slides 5 and 6 use this directly when they describe scoping projects with partners rather than for them. The 'with' posture is not a tone preference; it is a design requirement for the experience to produce the conditions for positive intergroup contact. Programs that skip this end up reinforcing the very assumptions they meant to challenge.</a:t>
+            </a:r>
+            <a:pPr indent="0" marL="0">
+              <a:lnSpc>
+                <a:spcPct val="130000"/>
+              </a:lnSpc>
+              <a:buNone/>
+            </a:pPr>
+            <a:r>
+              <a:rPr lang="en-US" sz="900" u="sng" dirty="0">
+                <a:solidFill>
+                  <a:srgbClr val="4491A9"/>
+                </a:solidFill>
+                <a:latin typeface="Roboto Condensed" pitchFamily="34" charset="0"/>
+                <a:ea typeface="Roboto Condensed" pitchFamily="34" charset="-122"/>
+                <a:cs typeface="Roboto Condensed" pitchFamily="34" charset="-120"/>
+                <a:hlinkClick r:id="rId3" invalidUrl="" action="" tgtFrame="" tooltip="" history="1" highlightClick="0" endSnd="0">
+                  <a:extLst>
+                    <a:ext uri="{A12FA001-AC4F-418D-AE19-62706E023703}">
+                      <ahyp:hlinkClr xmlns:ahyp="http://schemas.microsoft.com/office/drawing/2018/hyperlinkcolor" val="tx"/>
+                    </a:ext>
+                  </a:extLst>
+                </a:hlinkClick>
+              </a:rPr>
+              <a:t/>
+            </a:r>
+            <a:pPr indent="0" marL="0">
+              <a:lnSpc>
+                <a:spcPct val="130000"/>
+              </a:lnSpc>
+              <a:buNone/>
+            </a:pPr>
+            <a:r>
+              <a:rPr lang="en-US" sz="900" b="1" dirty="0">
+                <a:solidFill>
+                  <a:srgbClr val="EC5C2A"/>
+                </a:solidFill>
+                <a:latin typeface="Roboto Condensed" pitchFamily="34" charset="0"/>
+                <a:ea typeface="Roboto Condensed" pitchFamily="34" charset="-122"/>
+                <a:cs typeface="Roboto Condensed" pitchFamily="34" charset="-120"/>
+              </a:rPr>
+              <a:t/>
+            </a:r>
+            <a:pPr indent="0" marL="0">
+              <a:lnSpc>
+                <a:spcPct val="130000"/>
+              </a:lnSpc>
+              <a:buNone/>
+            </a:pPr>
+            <a:r>
+              <a:rPr lang="en-US" sz="900" dirty="0">
+                <a:solidFill>
+                  <a:srgbClr val="404040"/>
+                </a:solidFill>
+                <a:latin typeface="Roboto Condensed" pitchFamily="34" charset="0"/>
+                <a:ea typeface="Roboto Condensed" pitchFamily="34" charset="-122"/>
+                <a:cs typeface="Roboto Condensed" pitchFamily="34" charset="-120"/>
+              </a:rPr>
+              <a:t/>
+            </a:r>
+            <a:pPr indent="0" marL="0">
+              <a:lnSpc>
+                <a:spcPct val="130000"/>
+              </a:lnSpc>
+              <a:buNone/>
+            </a:pPr>
+            <a:r>
+              <a:rPr lang="en-US" sz="900" u="sng" dirty="0">
+                <a:solidFill>
+                  <a:srgbClr val="4491A9"/>
+                </a:solidFill>
+                <a:latin typeface="Roboto Condensed" pitchFamily="34" charset="0"/>
+                <a:ea typeface="Roboto Condensed" pitchFamily="34" charset="-122"/>
+                <a:cs typeface="Roboto Condensed" pitchFamily="34" charset="-120"/>
+                <a:hlinkClick r:id="rId4" invalidUrl="" action="" tgtFrame="" tooltip="" history="1" highlightClick="0" endSnd="0">
+                  <a:extLst>
+                    <a:ext uri="{A12FA001-AC4F-418D-AE19-62706E023703}">
+                      <ahyp:hlinkClr xmlns:ahyp="http://schemas.microsoft.com/office/drawing/2018/hyperlinkcolor" val="tx"/>
+                    </a:ext>
+                  </a:extLst>
+                </a:hlinkClick>
+              </a:rPr>
+              <a:t/>
+            </a:r>
+            <a:pPr indent="0" marL="0">
+              <a:lnSpc>
+                <a:spcPct val="130000"/>
+              </a:lnSpc>
+              <a:buNone/>
+            </a:pPr>
+            <a:r>
+              <a:rPr lang="en-US" sz="900" b="1" dirty="0">
+                <a:solidFill>
+                  <a:srgbClr val="EC5C2A"/>
+                </a:solidFill>
+                <a:latin typeface="Roboto Condensed" pitchFamily="34" charset="0"/>
+                <a:ea typeface="Roboto Condensed" pitchFamily="34" charset="-122"/>
+                <a:cs typeface="Roboto Condensed" pitchFamily="34" charset="-120"/>
+              </a:rPr>
+              <a:t/>
+            </a:r>
+            <a:pPr indent="0" marL="0">
+              <a:lnSpc>
+                <a:spcPct val="130000"/>
+              </a:lnSpc>
+              <a:buNone/>
+            </a:pPr>
+            <a:r>
+              <a:rPr lang="en-US" sz="900" dirty="0">
+                <a:solidFill>
+                  <a:srgbClr val="404040"/>
+                </a:solidFill>
+                <a:latin typeface="Roboto Condensed" pitchFamily="34" charset="0"/>
+                <a:ea typeface="Roboto Condensed" pitchFamily="34" charset="-122"/>
+                <a:cs typeface="Roboto Condensed" pitchFamily="34" charset="-120"/>
+              </a:rPr>
+              <a:t/>
+            </a:r>
+            <a:pPr indent="0" marL="0">
+              <a:lnSpc>
+                <a:spcPct val="130000"/>
+              </a:lnSpc>
+              <a:buNone/>
+            </a:pPr>
+            <a:r>
+              <a:rPr lang="en-US" sz="900" u="sng" dirty="0">
+                <a:solidFill>
+                  <a:srgbClr val="4491A9"/>
+                </a:solidFill>
+                <a:latin typeface="Roboto Condensed" pitchFamily="34" charset="0"/>
+                <a:ea typeface="Roboto Condensed" pitchFamily="34" charset="-122"/>
+                <a:cs typeface="Roboto Condensed" pitchFamily="34" charset="-120"/>
+                <a:hlinkClick r:id="rId5" invalidUrl="" action="" tgtFrame="" tooltip="" history="1" highlightClick="0" endSnd="0">
+                  <a:extLst>
+                    <a:ext uri="{A12FA001-AC4F-418D-AE19-62706E023703}">
+                      <ahyp:hlinkClr xmlns:ahyp="http://schemas.microsoft.com/office/drawing/2018/hyperlinkcolor" val="tx"/>
+                    </a:ext>
+                  </a:extLst>
+                </a:hlinkClick>
+              </a:rPr>
+              <a:t/>
+            </a:r>
+            <a:pPr indent="0" marL="0">
+              <a:lnSpc>
+                <a:spcPct val="130000"/>
+              </a:lnSpc>
+              <a:buNone/>
+            </a:pPr>
+            <a:r>
+              <a:rPr lang="en-US" sz="900" b="1" dirty="0">
+                <a:solidFill>
+                  <a:srgbClr val="EC5C2A"/>
+                </a:solidFill>
+                <a:latin typeface="Roboto Condensed" pitchFamily="34" charset="0"/>
+                <a:ea typeface="Roboto Condensed" pitchFamily="34" charset="-122"/>
+                <a:cs typeface="Roboto Condensed" pitchFamily="34" charset="-120"/>
+              </a:rPr>
+              <a:t/>
+            </a:r>
+            <a:pPr indent="0" marL="0">
+              <a:lnSpc>
+                <a:spcPct val="130000"/>
+              </a:lnSpc>
+              <a:buNone/>
+            </a:pPr>
+            <a:r>
+              <a:rPr lang="en-US" sz="900" dirty="0">
+                <a:solidFill>
+                  <a:srgbClr val="404040"/>
+                </a:solidFill>
+                <a:latin typeface="Roboto Condensed" pitchFamily="34" charset="0"/>
+                <a:ea typeface="Roboto Condensed" pitchFamily="34" charset="-122"/>
+                <a:cs typeface="Roboto Condensed" pitchFamily="34" charset="-120"/>
+              </a:rPr>
+              <a:t/>
+            </a:r>
+            <a:pPr indent="0" marL="0">
+              <a:lnSpc>
+                <a:spcPct val="130000"/>
+              </a:lnSpc>
+              <a:buNone/>
+            </a:pPr>
+            <a:r>
+              <a:rPr lang="en-US" sz="900" u="sng" dirty="0">
+                <a:solidFill>
+                  <a:srgbClr val="4491A9"/>
+                </a:solidFill>
+                <a:latin typeface="Roboto Condensed" pitchFamily="34" charset="0"/>
+                <a:ea typeface="Roboto Condensed" pitchFamily="34" charset="-122"/>
+                <a:cs typeface="Roboto Condensed" pitchFamily="34" charset="-120"/>
+                <a:hlinkClick r:id="rId6" invalidUrl="" action="" tgtFrame="" tooltip="" history="1" highlightClick="0" endSnd="0">
+                  <a:extLst>
+                    <a:ext uri="{A12FA001-AC4F-418D-AE19-62706E023703}">
+                      <ahyp:hlinkClr xmlns:ahyp="http://schemas.microsoft.com/office/drawing/2018/hyperlinkcolor" val="tx"/>
+                    </a:ext>
+                  </a:extLst>
+                </a:hlinkClick>
+              </a:rPr>
+              <a:t/>
+            </a:r>
+            <a:pPr indent="0" marL="0">
+              <a:lnSpc>
+                <a:spcPct val="130000"/>
+              </a:lnSpc>
+              <a:buNone/>
+            </a:pPr>
+            <a:r>
+              <a:rPr lang="en-US" sz="900" b="1" dirty="0">
+                <a:solidFill>
+                  <a:srgbClr val="EC5C2A"/>
+                </a:solidFill>
+                <a:latin typeface="Roboto Condensed" pitchFamily="34" charset="0"/>
+                <a:ea typeface="Roboto Condensed" pitchFamily="34" charset="-122"/>
+                <a:cs typeface="Roboto Condensed" pitchFamily="34" charset="-120"/>
+              </a:rPr>
+              <a:t/>
+            </a:r>
+            <a:pPr indent="0" marL="0">
+              <a:lnSpc>
+                <a:spcPct val="130000"/>
+              </a:lnSpc>
+              <a:buNone/>
+            </a:pPr>
+            <a:r>
+              <a:rPr lang="en-US" sz="900" dirty="0">
+                <a:solidFill>
+                  <a:srgbClr val="404040"/>
+                </a:solidFill>
+                <a:latin typeface="Roboto Condensed" pitchFamily="34" charset="0"/>
+                <a:ea typeface="Roboto Condensed" pitchFamily="34" charset="-122"/>
+                <a:cs typeface="Roboto Condensed" pitchFamily="34" charset="-120"/>
+              </a:rPr>
+              <a:t/>
+            </a:r>
+            <a:pPr indent="0" marL="0">
+              <a:lnSpc>
+                <a:spcPct val="130000"/>
+              </a:lnSpc>
+              <a:buNone/>
+            </a:pPr>
+            <a:r>
+              <a:rPr lang="en-US" sz="900" u="sng" dirty="0">
+                <a:solidFill>
+                  <a:srgbClr val="4491A9"/>
+                </a:solidFill>
+                <a:latin typeface="Roboto Condensed" pitchFamily="34" charset="0"/>
+                <a:ea typeface="Roboto Condensed" pitchFamily="34" charset="-122"/>
+                <a:cs typeface="Roboto Condensed" pitchFamily="34" charset="-120"/>
+                <a:hlinkClick r:id="rId7" invalidUrl="" action="" tgtFrame="" tooltip="" history="1" highlightClick="0" endSnd="0">
+                  <a:extLst>
+                    <a:ext uri="{A12FA001-AC4F-418D-AE19-62706E023703}">
+                      <ahyp:hlinkClr xmlns:ahyp="http://schemas.microsoft.com/office/drawing/2018/hyperlinkcolor" val="tx"/>
+                    </a:ext>
+                  </a:extLst>
+                </a:hlinkClick>
+              </a:rPr>
+              <a:t/>
+            </a:r>
+            <a:pPr indent="0" marL="0">
+              <a:lnSpc>
+                <a:spcPct val="130000"/>
+              </a:lnSpc>
+              <a:buNone/>
+            </a:pPr>
+            <a:r>
+              <a:rPr lang="en-US" sz="900" b="1" dirty="0">
+                <a:solidFill>
+                  <a:srgbClr val="EC5C2A"/>
+                </a:solidFill>
+                <a:latin typeface="Roboto Condensed" pitchFamily="34" charset="0"/>
+                <a:ea typeface="Roboto Condensed" pitchFamily="34" charset="-122"/>
+                <a:cs typeface="Roboto Condensed" pitchFamily="34" charset="-120"/>
+              </a:rPr>
+              <a:t/>
+            </a:r>
+            <a:pPr indent="0" marL="0">
+              <a:lnSpc>
+                <a:spcPct val="130000"/>
+              </a:lnSpc>
+              <a:buNone/>
+            </a:pPr>
+            <a:r>
+              <a:rPr lang="en-US" sz="900" dirty="0">
+                <a:solidFill>
+                  <a:srgbClr val="404040"/>
+                </a:solidFill>
+                <a:latin typeface="Roboto Condensed" pitchFamily="34" charset="0"/>
+                <a:ea typeface="Roboto Condensed" pitchFamily="34" charset="-122"/>
+                <a:cs typeface="Roboto Condensed" pitchFamily="34" charset="-120"/>
+              </a:rPr>
+              <a:t/>
+            </a:r>
+            <a:pPr indent="0" marL="0">
+              <a:lnSpc>
+                <a:spcPct val="130000"/>
+              </a:lnSpc>
+              <a:buNone/>
+            </a:pPr>
+            <a:r>
+              <a:rPr lang="en-US" sz="900" u="sng" dirty="0">
+                <a:solidFill>
+                  <a:srgbClr val="4491A9"/>
+                </a:solidFill>
+                <a:latin typeface="Roboto Condensed" pitchFamily="34" charset="0"/>
+                <a:ea typeface="Roboto Condensed" pitchFamily="34" charset="-122"/>
+                <a:cs typeface="Roboto Condensed" pitchFamily="34" charset="-120"/>
+                <a:hlinkClick r:id="rId8" invalidUrl="" action="" tgtFrame="" tooltip="" history="1" highlightClick="0" endSnd="0">
+                  <a:extLst>
+                    <a:ext uri="{A12FA001-AC4F-418D-AE19-62706E023703}">
+                      <ahyp:hlinkClr xmlns:ahyp="http://schemas.microsoft.com/office/drawing/2018/hyperlinkcolor" val="tx"/>
+                    </a:ext>
+                  </a:extLst>
+                </a:hlinkClick>
+              </a:rPr>
+              <a:t/>
+            </a:r>
+            <a:endParaRPr lang="en-US" sz="900" dirty="0"/>
+          </a:p>
+        </p:txBody>
+      </p:sp>
+      <p:sp>
+        <p:nvSpPr>
+          <p:cNvPr id="7" name="Text 5"/>
+          <p:cNvSpPr/>
+          <p:nvPr/>
+        </p:nvSpPr>
+        <p:spPr>
+          <a:xfrm>
+            <a:off x="6309360" y="2606040"/>
+            <a:ext cx="5486400" cy="3657600"/>
+          </a:xfrm>
+          <a:prstGeom prst="rect">
+            <a:avLst/>
+          </a:prstGeom>
+          <a:noFill/>
+          <a:ln/>
+        </p:spPr>
+        <p:txBody>
+          <a:bodyPr wrap="square" rtlCol="0" anchor="ctr"/>
+          <a:lstStyle/>
+          <a:p>
+            <a:pPr indent="0" marL="0">
+              <a:lnSpc>
+                <a:spcPct val="130000"/>
+              </a:lnSpc>
+              <a:buNone/>
+            </a:pPr>
+            <a:r>
+              <a:rPr lang="en-US" sz="900" b="1" dirty="0">
+                <a:solidFill>
+                  <a:srgbClr val="EC5C2A"/>
+                </a:solidFill>
+                <a:latin typeface="Roboto Condensed" pitchFamily="34" charset="0"/>
+                <a:ea typeface="Roboto Condensed" pitchFamily="34" charset="-122"/>
+                <a:cs typeface="Roboto Condensed" pitchFamily="34" charset="-120"/>
+              </a:rPr>
+              <a:t>[12] </a:t>
+            </a:r>
+            <a:pPr indent="0" marL="0">
+              <a:lnSpc>
+                <a:spcPct val="130000"/>
+              </a:lnSpc>
+              <a:buNone/>
+            </a:pPr>
+            <a:r>
+              <a:rPr lang="en-US" sz="900" dirty="0" b="0">
+                <a:solidFill>
+                  <a:srgbClr val="404040"/>
+                </a:solidFill>
+                <a:latin typeface="Roboto Condensed" pitchFamily="34" charset="0"/>
+                <a:ea typeface="Roboto Condensed" pitchFamily="34" charset="-122"/>
+                <a:cs typeface="Roboto Condensed" pitchFamily="34" charset="-120"/>
+              </a:rPr>
+              <a:t>Pettigrew &amp; Tropp (2006). Meta-Analytic Test of Intergroup Contact Theory. JPSP, 90(5).
+</a:t>
+            </a:r>
+            <a:pPr indent="0" marL="0">
+              <a:lnSpc>
+                <a:spcPct val="130000"/>
+              </a:lnSpc>
+              <a:buNone/>
+            </a:pPr>
+            <a:r>
+              <a:rPr lang="en-US" sz="900" u="sng" dirty="0" b="0">
+                <a:solidFill>
+                  <a:srgbClr val="4491A9"/>
+                </a:solidFill>
+                <a:latin typeface="Roboto Condensed" pitchFamily="34" charset="0"/>
+                <a:ea typeface="Roboto Condensed" pitchFamily="34" charset="-122"/>
+                <a:cs typeface="Roboto Condensed" pitchFamily="34" charset="-120"/>
+                <a:hlinkClick r:id="rId9" invalidUrl="" action="" tgtFrame="" tooltip="" history="1" highlightClick="0" endSnd="0">
+                  <a:extLst>
+                    <a:ext uri="{A12FA001-AC4F-418D-AE19-62706E023703}">
+                      <ahyp:hlinkClr xmlns:ahyp="http://schemas.microsoft.com/office/drawing/2018/hyperlinkcolor" val="tx"/>
+                    </a:ext>
+                  </a:extLst>
+                </a:hlinkClick>
+              </a:rPr>
+              <a:t>https://doi.org/10.1037/0022-3514.90.5.751
+</a:t>
+            </a:r>
+            <a:pPr indent="0" marL="0">
+              <a:lnSpc>
+                <a:spcPct val="130000"/>
+              </a:lnSpc>
+              <a:buNone/>
+            </a:pPr>
+            <a:r>
+              <a:rPr lang="en-US" sz="900" b="0" dirty="0">
+                <a:solidFill>
+                  <a:srgbClr val="EC5C2A"/>
+                </a:solidFill>
+                <a:latin typeface="Roboto Condensed" pitchFamily="34" charset="0"/>
+                <a:ea typeface="Roboto Condensed" pitchFamily="34" charset="-122"/>
+                <a:cs typeface="Roboto Condensed" pitchFamily="34" charset="-120"/>
+              </a:rPr>
+              <a:t>This meta-analysis of 515 studies established that positive cross-group contact reliably reduces prejudice across contexts. The effect is strongest when contact involves equal status, shared goals, cooperation, and institutional support. Slides 5 and 6 cite it for the conditions under which volunteer contact produces lasting attitude change rather than reinforcing prior beliefs. Pettigrew and Tropp also showed that friendship-level engagement produces meaningfully stronger effects than acquaintance-level contact, which is why the program is designed for repeated, recurring relationships rather than one-day events.
+</a:t>
+            </a:r>
+            <a:pPr indent="0" marL="0">
+              <a:lnSpc>
+                <a:spcPct val="130000"/>
+              </a:lnSpc>
+              <a:buNone/>
+            </a:pPr>
+            <a:r>
+              <a:rPr lang="en-US" sz="900" dirty="0" b="1">
+                <a:solidFill>
+                  <a:srgbClr val="404040"/>
+                </a:solidFill>
+                <a:latin typeface="Roboto Condensed" pitchFamily="34" charset="0"/>
+                <a:ea typeface="Roboto Condensed" pitchFamily="34" charset="-122"/>
+                <a:cs typeface="Roboto Condensed" pitchFamily="34" charset="-120"/>
+              </a:rPr>
+              <a:t>[13] </a:t>
+            </a:r>
+            <a:pPr indent="0" marL="0">
+              <a:lnSpc>
+                <a:spcPct val="130000"/>
+              </a:lnSpc>
+              <a:buNone/>
+            </a:pPr>
+            <a:r>
+              <a:rPr lang="en-US" sz="900" u="sng" dirty="0" b="0">
+                <a:solidFill>
+                  <a:srgbClr val="4491A9"/>
+                </a:solidFill>
+                <a:latin typeface="Roboto Condensed" pitchFamily="34" charset="0"/>
+                <a:ea typeface="Roboto Condensed" pitchFamily="34" charset="-122"/>
+                <a:cs typeface="Roboto Condensed" pitchFamily="34" charset="-120"/>
+                <a:hlinkClick r:id="rId10" invalidUrl="" action="" tgtFrame="" tooltip="" history="1" highlightClick="0" endSnd="0">
+                  <a:extLst>
+                    <a:ext uri="{A12FA001-AC4F-418D-AE19-62706E023703}">
+                      <ahyp:hlinkClr xmlns:ahyp="http://schemas.microsoft.com/office/drawing/2018/hyperlinkcolor" val="tx"/>
+                    </a:ext>
+                  </a:extLst>
+                </a:hlinkClick>
+              </a:rPr>
+              <a:t>Aquino &amp; Reed (2002). The Self-Importance of Moral Identity. JPSP, 83(6).
+</a:t>
+            </a:r>
+            <a:pPr indent="0" marL="0">
+              <a:lnSpc>
+                <a:spcPct val="130000"/>
+              </a:lnSpc>
+              <a:buNone/>
+            </a:pPr>
+            <a:r>
+              <a:rPr lang="en-US" sz="900" b="0" dirty="0">
+                <a:solidFill>
+                  <a:srgbClr val="EC5C2A"/>
+                </a:solidFill>
+                <a:latin typeface="Roboto Condensed" pitchFamily="34" charset="0"/>
+                <a:ea typeface="Roboto Condensed" pitchFamily="34" charset="-122"/>
+                <a:cs typeface="Roboto Condensed" pitchFamily="34" charset="-120"/>
+              </a:rPr>
+              <a:t>https://doi.org/10.1037/0022-3514.83.6.1423
+</a:t>
+            </a:r>
+            <a:pPr indent="0" marL="0">
+              <a:lnSpc>
+                <a:spcPct val="130000"/>
+              </a:lnSpc>
+              <a:buNone/>
+            </a:pPr>
+            <a:r>
+              <a:rPr lang="en-US" sz="900" dirty="0" b="0">
+                <a:solidFill>
+                  <a:srgbClr val="404040"/>
+                </a:solidFill>
+                <a:latin typeface="Roboto Condensed" pitchFamily="34" charset="0"/>
+                <a:ea typeface="Roboto Condensed" pitchFamily="34" charset="-122"/>
+                <a:cs typeface="Roboto Condensed" pitchFamily="34" charset="-120"/>
+              </a:rPr>
+              <a:t>Aquino and Reed developed the moral identity scale and showed that when moral identity is central to self-concept, prosocial behavior generalizes across contexts and persists over time. Slide 6 uses this to support the claim that prosocial identity change carries from the volunteer setting into other parts of life. The shift the slide describes (from 'I did a good thing' to 'this is part of who I am') is the operational definition of moral identity becoming self-defining. Without that internalization, behavior remains tied to the situation and decays once the cue disappears.</a:t>
+            </a:r>
+            <a:pPr indent="0" marL="0">
+              <a:lnSpc>
+                <a:spcPct val="130000"/>
+              </a:lnSpc>
+              <a:buNone/>
+            </a:pPr>
+            <a:r>
+              <a:rPr lang="en-US" sz="900" u="sng" dirty="0">
+                <a:solidFill>
+                  <a:srgbClr val="4491A9"/>
+                </a:solidFill>
+                <a:latin typeface="Roboto Condensed" pitchFamily="34" charset="0"/>
+                <a:ea typeface="Roboto Condensed" pitchFamily="34" charset="-122"/>
+                <a:cs typeface="Roboto Condensed" pitchFamily="34" charset="-120"/>
+                <a:hlinkClick r:id="rId11" invalidUrl="" action="" tgtFrame="" tooltip="" history="1" highlightClick="0" endSnd="0">
+                  <a:extLst>
+                    <a:ext uri="{A12FA001-AC4F-418D-AE19-62706E023703}">
+                      <ahyp:hlinkClr xmlns:ahyp="http://schemas.microsoft.com/office/drawing/2018/hyperlinkcolor" val="tx"/>
+                    </a:ext>
+                  </a:extLst>
+                </a:hlinkClick>
+              </a:rPr>
+              <a:t/>
+            </a:r>
+            <a:pPr indent="0" marL="0">
+              <a:lnSpc>
+                <a:spcPct val="130000"/>
+              </a:lnSpc>
+              <a:buNone/>
+            </a:pPr>
+            <a:r>
+              <a:rPr lang="en-US" sz="900" b="1" dirty="0">
+                <a:solidFill>
+                  <a:srgbClr val="EC5C2A"/>
+                </a:solidFill>
+                <a:latin typeface="Roboto Condensed" pitchFamily="34" charset="0"/>
+                <a:ea typeface="Roboto Condensed" pitchFamily="34" charset="-122"/>
+                <a:cs typeface="Roboto Condensed" pitchFamily="34" charset="-120"/>
+              </a:rPr>
+              <a:t/>
+            </a:r>
+            <a:pPr indent="0" marL="0">
+              <a:lnSpc>
+                <a:spcPct val="130000"/>
+              </a:lnSpc>
+              <a:buNone/>
+            </a:pPr>
+            <a:r>
+              <a:rPr lang="en-US" sz="900" dirty="0">
+                <a:solidFill>
+                  <a:srgbClr val="404040"/>
+                </a:solidFill>
+                <a:latin typeface="Roboto Condensed" pitchFamily="34" charset="0"/>
+                <a:ea typeface="Roboto Condensed" pitchFamily="34" charset="-122"/>
+                <a:cs typeface="Roboto Condensed" pitchFamily="34" charset="-120"/>
+              </a:rPr>
+              <a:t/>
+            </a:r>
+            <a:pPr indent="0" marL="0">
+              <a:lnSpc>
+                <a:spcPct val="130000"/>
+              </a:lnSpc>
+              <a:buNone/>
+            </a:pPr>
+            <a:r>
+              <a:rPr lang="en-US" sz="900" u="sng" dirty="0">
+                <a:solidFill>
+                  <a:srgbClr val="4491A9"/>
+                </a:solidFill>
+                <a:latin typeface="Roboto Condensed" pitchFamily="34" charset="0"/>
+                <a:ea typeface="Roboto Condensed" pitchFamily="34" charset="-122"/>
+                <a:cs typeface="Roboto Condensed" pitchFamily="34" charset="-120"/>
+                <a:hlinkClick r:id="rId12" invalidUrl="" action="" tgtFrame="" tooltip="" history="1" highlightClick="0" endSnd="0">
+                  <a:extLst>
+                    <a:ext uri="{A12FA001-AC4F-418D-AE19-62706E023703}">
+                      <ahyp:hlinkClr xmlns:ahyp="http://schemas.microsoft.com/office/drawing/2018/hyperlinkcolor" val="tx"/>
+                    </a:ext>
+                  </a:extLst>
+                </a:hlinkClick>
+              </a:rPr>
+              <a:t/>
+            </a:r>
+            <a:pPr indent="0" marL="0">
+              <a:lnSpc>
+                <a:spcPct val="130000"/>
+              </a:lnSpc>
+              <a:buNone/>
+            </a:pPr>
+            <a:r>
+              <a:rPr lang="en-US" sz="900" b="1" dirty="0">
+                <a:solidFill>
+                  <a:srgbClr val="EC5C2A"/>
+                </a:solidFill>
+                <a:latin typeface="Roboto Condensed" pitchFamily="34" charset="0"/>
+                <a:ea typeface="Roboto Condensed" pitchFamily="34" charset="-122"/>
+                <a:cs typeface="Roboto Condensed" pitchFamily="34" charset="-120"/>
+              </a:rPr>
+              <a:t/>
+            </a:r>
+            <a:pPr indent="0" marL="0">
+              <a:lnSpc>
+                <a:spcPct val="130000"/>
+              </a:lnSpc>
+              <a:buNone/>
+            </a:pPr>
+            <a:r>
+              <a:rPr lang="en-US" sz="900" dirty="0">
+                <a:solidFill>
+                  <a:srgbClr val="404040"/>
+                </a:solidFill>
+                <a:latin typeface="Roboto Condensed" pitchFamily="34" charset="0"/>
+                <a:ea typeface="Roboto Condensed" pitchFamily="34" charset="-122"/>
+                <a:cs typeface="Roboto Condensed" pitchFamily="34" charset="-120"/>
+              </a:rPr>
+              <a:t/>
+            </a:r>
+            <a:pPr indent="0" marL="0">
+              <a:lnSpc>
+                <a:spcPct val="130000"/>
+              </a:lnSpc>
+              <a:buNone/>
+            </a:pPr>
+            <a:r>
+              <a:rPr lang="en-US" sz="900" u="sng" dirty="0">
+                <a:solidFill>
+                  <a:srgbClr val="4491A9"/>
+                </a:solidFill>
+                <a:latin typeface="Roboto Condensed" pitchFamily="34" charset="0"/>
+                <a:ea typeface="Roboto Condensed" pitchFamily="34" charset="-122"/>
+                <a:cs typeface="Roboto Condensed" pitchFamily="34" charset="-120"/>
+                <a:hlinkClick r:id="rId13" invalidUrl="" action="" tgtFrame="" tooltip="" history="1" highlightClick="0" endSnd="0">
+                  <a:extLst>
+                    <a:ext uri="{A12FA001-AC4F-418D-AE19-62706E023703}">
+                      <ahyp:hlinkClr xmlns:ahyp="http://schemas.microsoft.com/office/drawing/2018/hyperlinkcolor" val="tx"/>
+                    </a:ext>
+                  </a:extLst>
+                </a:hlinkClick>
+              </a:rPr>
+              <a:t/>
+            </a:r>
+            <a:pPr indent="0" marL="0">
+              <a:lnSpc>
+                <a:spcPct val="130000"/>
+              </a:lnSpc>
+              <a:buNone/>
+            </a:pPr>
+            <a:r>
+              <a:rPr lang="en-US" sz="900" b="1" dirty="0">
+                <a:solidFill>
+                  <a:srgbClr val="EC5C2A"/>
+                </a:solidFill>
+                <a:latin typeface="Roboto Condensed" pitchFamily="34" charset="0"/>
+                <a:ea typeface="Roboto Condensed" pitchFamily="34" charset="-122"/>
+                <a:cs typeface="Roboto Condensed" pitchFamily="34" charset="-120"/>
+              </a:rPr>
+              <a:t/>
+            </a:r>
+            <a:pPr indent="0" marL="0">
+              <a:lnSpc>
+                <a:spcPct val="130000"/>
+              </a:lnSpc>
+              <a:buNone/>
+            </a:pPr>
+            <a:r>
+              <a:rPr lang="en-US" sz="900" dirty="0">
+                <a:solidFill>
+                  <a:srgbClr val="404040"/>
+                </a:solidFill>
+                <a:latin typeface="Roboto Condensed" pitchFamily="34" charset="0"/>
+                <a:ea typeface="Roboto Condensed" pitchFamily="34" charset="-122"/>
+                <a:cs typeface="Roboto Condensed" pitchFamily="34" charset="-120"/>
+              </a:rPr>
+              <a:t/>
+            </a:r>
+            <a:pPr indent="0" marL="0">
+              <a:lnSpc>
+                <a:spcPct val="130000"/>
+              </a:lnSpc>
+              <a:buNone/>
+            </a:pPr>
+            <a:r>
+              <a:rPr lang="en-US" sz="900" u="sng" dirty="0">
+                <a:solidFill>
+                  <a:srgbClr val="4491A9"/>
+                </a:solidFill>
+                <a:latin typeface="Roboto Condensed" pitchFamily="34" charset="0"/>
+                <a:ea typeface="Roboto Condensed" pitchFamily="34" charset="-122"/>
+                <a:cs typeface="Roboto Condensed" pitchFamily="34" charset="-120"/>
+                <a:hlinkClick r:id="rId14" invalidUrl="" action="" tgtFrame="" tooltip="" history="1" highlightClick="0" endSnd="0">
+                  <a:extLst>
+                    <a:ext uri="{A12FA001-AC4F-418D-AE19-62706E023703}">
+                      <ahyp:hlinkClr xmlns:ahyp="http://schemas.microsoft.com/office/drawing/2018/hyperlinkcolor" val="tx"/>
+                    </a:ext>
+                  </a:extLst>
+                </a:hlinkClick>
+              </a:rPr>
+              <a:t/>
+            </a:r>
+            <a:pPr indent="0" marL="0">
+              <a:lnSpc>
+                <a:spcPct val="130000"/>
+              </a:lnSpc>
+              <a:buNone/>
+            </a:pPr>
+            <a:r>
+              <a:rPr lang="en-US" sz="900" b="1" dirty="0">
+                <a:solidFill>
+                  <a:srgbClr val="EC5C2A"/>
+                </a:solidFill>
+                <a:latin typeface="Roboto Condensed" pitchFamily="34" charset="0"/>
+                <a:ea typeface="Roboto Condensed" pitchFamily="34" charset="-122"/>
+                <a:cs typeface="Roboto Condensed" pitchFamily="34" charset="-120"/>
+              </a:rPr>
+              <a:t/>
+            </a:r>
+            <a:pPr indent="0" marL="0">
+              <a:lnSpc>
+                <a:spcPct val="130000"/>
+              </a:lnSpc>
+              <a:buNone/>
+            </a:pPr>
+            <a:r>
+              <a:rPr lang="en-US" sz="900" dirty="0">
+                <a:solidFill>
+                  <a:srgbClr val="404040"/>
+                </a:solidFill>
+                <a:latin typeface="Roboto Condensed" pitchFamily="34" charset="0"/>
+                <a:ea typeface="Roboto Condensed" pitchFamily="34" charset="-122"/>
+                <a:cs typeface="Roboto Condensed" pitchFamily="34" charset="-120"/>
+              </a:rPr>
+              <a:t/>
+            </a:r>
+            <a:pPr indent="0" marL="0">
+              <a:lnSpc>
+                <a:spcPct val="130000"/>
+              </a:lnSpc>
+              <a:buNone/>
+            </a:pPr>
+            <a:r>
+              <a:rPr lang="en-US" sz="900" u="sng" dirty="0">
+                <a:solidFill>
+                  <a:srgbClr val="4491A9"/>
+                </a:solidFill>
+                <a:latin typeface="Roboto Condensed" pitchFamily="34" charset="0"/>
+                <a:ea typeface="Roboto Condensed" pitchFamily="34" charset="-122"/>
+                <a:cs typeface="Roboto Condensed" pitchFamily="34" charset="-120"/>
+                <a:hlinkClick r:id="rId15" invalidUrl="" action="" tgtFrame="" tooltip="" history="1" highlightClick="0" endSnd="0">
+                  <a:extLst>
+                    <a:ext uri="{A12FA001-AC4F-418D-AE19-62706E023703}">
+                      <ahyp:hlinkClr xmlns:ahyp="http://schemas.microsoft.com/office/drawing/2018/hyperlinkcolor" val="tx"/>
+                    </a:ext>
+                  </a:extLst>
+                </a:hlinkClick>
+              </a:rPr>
+              <a:t/>
+            </a:r>
+            <a:pPr indent="0" marL="0">
+              <a:lnSpc>
+                <a:spcPct val="130000"/>
+              </a:lnSpc>
+              <a:buNone/>
+            </a:pPr>
+            <a:r>
+              <a:rPr lang="en-US" sz="900" b="1" dirty="0">
+                <a:solidFill>
+                  <a:srgbClr val="EC5C2A"/>
+                </a:solidFill>
+                <a:latin typeface="Roboto Condensed" pitchFamily="34" charset="0"/>
+                <a:ea typeface="Roboto Condensed" pitchFamily="34" charset="-122"/>
+                <a:cs typeface="Roboto Condensed" pitchFamily="34" charset="-120"/>
+              </a:rPr>
+              <a:t/>
+            </a:r>
+            <a:pPr indent="0" marL="0">
+              <a:lnSpc>
+                <a:spcPct val="130000"/>
+              </a:lnSpc>
+              <a:buNone/>
+            </a:pPr>
+            <a:r>
+              <a:rPr lang="en-US" sz="900" dirty="0">
+                <a:solidFill>
+                  <a:srgbClr val="404040"/>
+                </a:solidFill>
+                <a:latin typeface="Roboto Condensed" pitchFamily="34" charset="0"/>
+                <a:ea typeface="Roboto Condensed" pitchFamily="34" charset="-122"/>
+                <a:cs typeface="Roboto Condensed" pitchFamily="34" charset="-120"/>
+              </a:rPr>
+              <a:t/>
+            </a:r>
+            <a:pPr indent="0" marL="0">
+              <a:lnSpc>
+                <a:spcPct val="130000"/>
+              </a:lnSpc>
+              <a:buNone/>
+            </a:pPr>
+            <a:r>
+              <a:rPr lang="en-US" sz="900" u="sng" dirty="0">
+                <a:solidFill>
+                  <a:srgbClr val="4491A9"/>
+                </a:solidFill>
+                <a:latin typeface="Roboto Condensed" pitchFamily="34" charset="0"/>
+                <a:ea typeface="Roboto Condensed" pitchFamily="34" charset="-122"/>
+                <a:cs typeface="Roboto Condensed" pitchFamily="34" charset="-120"/>
+                <a:hlinkClick r:id="rId16" invalidUrl="" action="" tgtFrame="" tooltip="" history="1" highlightClick="0" endSnd="0">
+                  <a:extLst>
+                    <a:ext uri="{A12FA001-AC4F-418D-AE19-62706E023703}">
+                      <ahyp:hlinkClr xmlns:ahyp="http://schemas.microsoft.com/office/drawing/2018/hyperlinkcolor" val="tx"/>
+                    </a:ext>
+                  </a:extLst>
+                </a:hlinkClick>
+              </a:rPr>
+              <a:t/>
+            </a:r>
+            <a:endParaRPr lang="en-US" sz="900" dirty="0"/>
+          </a:p>
+        </p:txBody>
+      </p:sp>
+      <p:sp>
+        <p:nvSpPr>
+          <p:cNvPr id="8" name="Shape 6"/>
+          <p:cNvSpPr/>
+          <p:nvPr/>
+        </p:nvSpPr>
+        <p:spPr>
+          <a:xfrm>
+            <a:off x="548640" y="6355080"/>
+            <a:ext cx="11094415" cy="0"/>
+          </a:xfrm>
+          <a:prstGeom prst="line">
+            <a:avLst/>
+          </a:prstGeom>
+          <a:noFill/>
+          <a:ln w="6350">
+            <a:solidFill>
+              <a:srgbClr val="C2C2C6"/>
+            </a:solidFill>
+            <a:prstDash val="solid"/>
+          </a:ln>
+        </p:spPr>
+      </p:sp>
+      <p:sp>
+        <p:nvSpPr>
+          <p:cNvPr id="9" name="Text 7"/>
+          <p:cNvSpPr/>
+          <p:nvPr/>
+        </p:nvSpPr>
+        <p:spPr>
+          <a:xfrm>
+            <a:off x="548640" y="6446520"/>
+            <a:ext cx="7315200" cy="274320"/>
+          </a:xfrm>
+          <a:prstGeom prst="rect">
+            <a:avLst/>
+          </a:prstGeom>
+          <a:noFill/>
+          <a:ln/>
+        </p:spPr>
+        <p:txBody>
+          <a:bodyPr wrap="square" rtlCol="0" anchor="ctr"/>
+          <a:lstStyle/>
+          <a:p>
+            <a:pPr indent="0" marL="0">
+              <a:buNone/>
+            </a:pPr>
+            <a:r>
+              <a:rPr lang="en-US" sz="900" spc="200" kern="0" dirty="0">
+                <a:solidFill>
+                  <a:srgbClr val="6B6B6F"/>
+                </a:solidFill>
+                <a:latin typeface="Roboto Condensed" pitchFamily="34" charset="0"/>
+                <a:ea typeface="Roboto Condensed" pitchFamily="34" charset="-122"/>
+                <a:cs typeface="Roboto Condensed" pitchFamily="34" charset="-120"/>
+              </a:rPr>
+              <a:t>RW Institute · Regional Campus Series</a:t>
+            </a:r>
+            <a:endParaRPr lang="en-US" sz="900" dirty="0"/>
+          </a:p>
+        </p:txBody>
+      </p:sp>
+      <p:sp>
+        <p:nvSpPr>
+          <p:cNvPr id="10" name="Text 8"/>
+          <p:cNvSpPr/>
+          <p:nvPr/>
+        </p:nvSpPr>
+        <p:spPr>
+          <a:xfrm>
+            <a:off x="11277295" y="6446520"/>
+            <a:ext cx="365760" cy="274320"/>
+          </a:xfrm>
+          <a:prstGeom prst="rect">
+            <a:avLst/>
+          </a:prstGeom>
+          <a:noFill/>
+          <a:ln/>
+        </p:spPr>
+        <p:txBody>
+          <a:bodyPr wrap="square" rtlCol="0" anchor="ctr"/>
+          <a:lstStyle/>
+          <a:p>
+            <a:pPr algn="r" indent="0" marL="0">
+              <a:buNone/>
+            </a:pPr>
+            <a:r>
+              <a:rPr lang="en-US" sz="900" dirty="0">
+                <a:solidFill>
+                  <a:srgbClr val="6B6B6F"/>
+                </a:solidFill>
+                <a:latin typeface="Roboto Condensed" pitchFamily="34" charset="0"/>
+                <a:ea typeface="Roboto Condensed" pitchFamily="34" charset="-122"/>
+                <a:cs typeface="Roboto Condensed" pitchFamily="34" charset="-120"/>
+              </a:rPr>
+              <a:t>16</a:t>
+            </a:r>
+            <a:endParaRPr lang="en-US" sz="900" dirty="0"/>
+          </a:p>
+        </p:txBody>
+      </p:sp>
+    </p:spTree>
+  </p:cSld>
+  <p:clrMapOvr>
+    <a:masterClrMapping/>
+  </p:clrMapOvr>
+</p:sld>
+</file>
+
+<file path=ppt/slides/slide17.xml><?xml version="1.0" encoding="utf-8"?>
+<p:sld xmlns:a="http://schemas.openxmlformats.org/drawingml/2006/main" xmlns:p="http://schemas.openxmlformats.org/presentationml/2006/main" xmlns:r="http://schemas.openxmlformats.org/officeDocument/2006/relationships">
+  <p:cSld>
+    <p:spTree>
+      <p:nvGrpSpPr>
+        <p:cNvPr id="1" name=""/>
+        <p:cNvGrpSpPr/>
+        <p:nvPr/>
+      </p:nvGrpSpPr>
+      <p:grpSpPr/>
+      <p:sp>
+        <p:nvSpPr>
+          <p:cNvPr id="2" name="Text 0"/>
+          <p:cNvSpPr/>
+          <p:nvPr/>
+        </p:nvSpPr>
+        <p:spPr>
+          <a:xfrm>
+            <a:off x="548640" y="457200"/>
+            <a:ext cx="10972800" cy="320040"/>
+          </a:xfrm>
+          <a:prstGeom prst="rect">
+            <a:avLst/>
+          </a:prstGeom>
+          <a:noFill/>
+          <a:ln/>
+        </p:spPr>
+        <p:txBody>
+          <a:bodyPr wrap="square" rtlCol="0" anchor="ctr"/>
+          <a:lstStyle/>
+          <a:p>
+            <a:pPr indent="0" marL="0">
+              <a:buNone/>
+            </a:pPr>
+            <a:r>
+              <a:rPr lang="en-US" sz="1000" b="1" spc="400" kern="0" dirty="0">
+                <a:solidFill>
+                  <a:srgbClr val="EC5C2A"/>
+                </a:solidFill>
+                <a:latin typeface="Roboto" pitchFamily="34" charset="0"/>
+                <a:ea typeface="Roboto" pitchFamily="34" charset="-122"/>
+                <a:cs typeface="Roboto" pitchFamily="34" charset="-120"/>
+              </a:rPr>
+              <a:t>REFERENCES</a:t>
+            </a:r>
+            <a:endParaRPr lang="en-US" sz="1000" dirty="0"/>
+          </a:p>
+        </p:txBody>
+      </p:sp>
+      <p:sp>
+        <p:nvSpPr>
+          <p:cNvPr id="3" name="Text 1"/>
+          <p:cNvSpPr/>
+          <p:nvPr/>
+        </p:nvSpPr>
+        <p:spPr>
+          <a:xfrm>
+            <a:off x="548640" y="868680"/>
+            <a:ext cx="10972800" cy="960120"/>
+          </a:xfrm>
+          <a:prstGeom prst="rect">
+            <a:avLst/>
+          </a:prstGeom>
+          <a:noFill/>
+          <a:ln/>
+        </p:spPr>
+        <p:txBody>
+          <a:bodyPr wrap="square" rtlCol="0" anchor="ctr"/>
+          <a:lstStyle/>
+          <a:p>
+            <a:pPr indent="0" marL="0">
+              <a:buNone/>
+            </a:pPr>
+            <a:r>
+              <a:rPr lang="en-US" sz="2800" b="1" dirty="0">
+                <a:solidFill>
+                  <a:srgbClr val="3C3F44"/>
+                </a:solidFill>
+                <a:latin typeface="Roboto" pitchFamily="34" charset="0"/>
+                <a:ea typeface="Roboto" pitchFamily="34" charset="-122"/>
+                <a:cs typeface="Roboto" pitchFamily="34" charset="-120"/>
+              </a:rPr>
+              <a:t>Further reading</a:t>
+            </a:r>
+            <a:endParaRPr lang="en-US" sz="2800" dirty="0"/>
+          </a:p>
+        </p:txBody>
+      </p:sp>
+      <p:sp>
+        <p:nvSpPr>
+          <p:cNvPr id="4" name="Shape 2"/>
+          <p:cNvSpPr/>
+          <p:nvPr/>
+        </p:nvSpPr>
+        <p:spPr>
+          <a:xfrm>
+            <a:off x="548640" y="1874520"/>
+            <a:ext cx="914400" cy="0"/>
+          </a:xfrm>
+          <a:prstGeom prst="line">
+            <a:avLst/>
+          </a:prstGeom>
+          <a:noFill/>
+          <a:ln w="38100">
+            <a:solidFill>
+              <a:srgbClr val="EC5C2A"/>
+            </a:solidFill>
+            <a:prstDash val="solid"/>
+          </a:ln>
+        </p:spPr>
+        <p:txBody>
+          <a:bodyPr/>
+          <a:p/>
+        </p:txBody>
+      </p:sp>
+      <p:sp>
+        <p:nvSpPr>
+          <p:cNvPr id="5" name="Text 3"/>
+          <p:cNvSpPr/>
+          <p:nvPr/>
+        </p:nvSpPr>
+        <p:spPr>
+          <a:xfrm>
+            <a:off x="548640" y="2103120"/>
+            <a:ext cx="10972800" cy="365760"/>
+          </a:xfrm>
+          <a:prstGeom prst="rect">
+            <a:avLst/>
+          </a:prstGeom>
+          <a:noFill/>
+          <a:ln/>
+        </p:spPr>
+        <p:txBody>
+          <a:bodyPr wrap="square" rtlCol="0" anchor="ctr"/>
+          <a:lstStyle/>
+          <a:p>
+            <a:pPr indent="0" marL="0">
+              <a:buNone/>
+            </a:pPr>
+            <a:r>
+              <a:rPr lang="en-US" sz="1100" i="1" dirty="0">
+                <a:solidFill>
+                  <a:srgbClr val="6B6B6F"/>
+                </a:solidFill>
+                <a:latin typeface="Roboto" pitchFamily="34" charset="0"/>
+                <a:ea typeface="Roboto" pitchFamily="34" charset="-122"/>
+                <a:cs typeface="Roboto" pitchFamily="34" charset="-120"/>
+              </a:rPr>
+              <a:t>Why these sources support the claims in this deck. Entries [14], [17], [18], [19].</a:t>
+            </a:r>
+            <a:endParaRPr lang="en-US" sz="1100" dirty="0"/>
+          </a:p>
+        </p:txBody>
+      </p:sp>
+      <p:sp>
+        <p:nvSpPr>
+          <p:cNvPr id="6" name="Text 4"/>
+          <p:cNvSpPr/>
+          <p:nvPr/>
+        </p:nvSpPr>
+        <p:spPr>
+          <a:xfrm>
+            <a:off x="548640" y="2606040"/>
+            <a:ext cx="5486400" cy="3657600"/>
+          </a:xfrm>
+          <a:prstGeom prst="rect">
+            <a:avLst/>
+          </a:prstGeom>
+          <a:noFill/>
+          <a:ln/>
+        </p:spPr>
+        <p:txBody>
+          <a:bodyPr wrap="square" rtlCol="0" anchor="ctr"/>
+          <a:lstStyle/>
+          <a:p>
+            <a:pPr indent="0" marL="0">
+              <a:lnSpc>
+                <a:spcPct val="130000"/>
+              </a:lnSpc>
+              <a:buNone/>
+            </a:pPr>
+            <a:r>
+              <a:rPr lang="en-US" sz="900" b="1" dirty="0">
+                <a:solidFill>
+                  <a:srgbClr val="EC5C2A"/>
+                </a:solidFill>
+                <a:latin typeface="Roboto Condensed" pitchFamily="34" charset="0"/>
+                <a:ea typeface="Roboto Condensed" pitchFamily="34" charset="-122"/>
+                <a:cs typeface="Roboto Condensed" pitchFamily="34" charset="-120"/>
+              </a:rPr>
+              <a:t>[14] </a:t>
+            </a:r>
+            <a:pPr indent="0" marL="0">
+              <a:lnSpc>
+                <a:spcPct val="130000"/>
+              </a:lnSpc>
+              <a:buNone/>
+            </a:pPr>
+            <a:r>
+              <a:rPr lang="en-US" sz="900" dirty="0" b="0">
+                <a:solidFill>
+                  <a:srgbClr val="404040"/>
+                </a:solidFill>
+                <a:latin typeface="Roboto Condensed" pitchFamily="34" charset="0"/>
+                <a:ea typeface="Roboto Condensed" pitchFamily="34" charset="-122"/>
+                <a:cs typeface="Roboto Condensed" pitchFamily="34" charset="-120"/>
+              </a:rPr>
+              <a:t>Rodell, J.B. (2013). Finding Meaning through Volunteering. AMJ, 56(5).
+</a:t>
+            </a:r>
+            <a:pPr indent="0" marL="0">
+              <a:lnSpc>
+                <a:spcPct val="130000"/>
+              </a:lnSpc>
+              <a:buNone/>
+            </a:pPr>
+            <a:r>
+              <a:rPr lang="en-US" sz="900" u="sng" dirty="0" b="0">
+                <a:solidFill>
+                  <a:srgbClr val="4491A9"/>
+                </a:solidFill>
+                <a:latin typeface="Roboto Condensed" pitchFamily="34" charset="0"/>
+                <a:ea typeface="Roboto Condensed" pitchFamily="34" charset="-122"/>
+                <a:cs typeface="Roboto Condensed" pitchFamily="34" charset="-120"/>
+                <a:hlinkClick r:id="rId1" invalidUrl="" action="" tgtFrame="" tooltip="" history="1" highlightClick="0" endSnd="0">
+                  <a:extLst>
+                    <a:ext uri="{A12FA001-AC4F-418D-AE19-62706E023703}">
+                      <ahyp:hlinkClr xmlns:ahyp="http://schemas.microsoft.com/office/drawing/2018/hyperlinkcolor" val="tx"/>
+                    </a:ext>
+                  </a:extLst>
+                </a:hlinkClick>
+              </a:rPr>
+              <a:t>https://doi.org/10.5465/amj.2012.0611
+</a:t>
+            </a:r>
+            <a:pPr indent="0" marL="0">
+              <a:lnSpc>
+                <a:spcPct val="130000"/>
+              </a:lnSpc>
+              <a:buNone/>
+            </a:pPr>
+            <a:r>
+              <a:rPr lang="en-US" sz="900" b="0" dirty="0">
+                <a:solidFill>
+                  <a:srgbClr val="EC5C2A"/>
+                </a:solidFill>
+                <a:latin typeface="Roboto Condensed" pitchFamily="34" charset="0"/>
+                <a:ea typeface="Roboto Condensed" pitchFamily="34" charset="-122"/>
+                <a:cs typeface="Roboto Condensed" pitchFamily="34" charset="-120"/>
+              </a:rPr>
+              <a:t>Rodell's study of working adults found that employee volunteering increases work meaningfulness and job performance, mediated by the employee's experience of meaning rather than by hours volunteered. This supports the slide 11 claim that trained champions improve every experience they touch and that the program affects retention and engagement, not just participation. It also supports the slide 6 case that the company benefits when prosocial identity is supported by the employer. The mechanism is meaning, not activity, which is why volume of events without facilitation does not produce the engagement gains companies expect.
+</a:t>
+            </a:r>
+            <a:pPr indent="0" marL="0">
+              <a:lnSpc>
+                <a:spcPct val="130000"/>
+              </a:lnSpc>
+              <a:buNone/>
+            </a:pPr>
+            <a:r>
+              <a:rPr lang="en-US" sz="900" dirty="0" b="1">
+                <a:solidFill>
+                  <a:srgbClr val="404040"/>
+                </a:solidFill>
+                <a:latin typeface="Roboto Condensed" pitchFamily="34" charset="0"/>
+                <a:ea typeface="Roboto Condensed" pitchFamily="34" charset="-122"/>
+                <a:cs typeface="Roboto Condensed" pitchFamily="34" charset="-120"/>
+              </a:rPr>
+              <a:t>[17] </a:t>
+            </a:r>
+            <a:pPr indent="0" marL="0">
+              <a:lnSpc>
+                <a:spcPct val="130000"/>
+              </a:lnSpc>
+              <a:buNone/>
+            </a:pPr>
+            <a:r>
+              <a:rPr lang="en-US" sz="900" u="sng" dirty="0" b="0">
+                <a:solidFill>
+                  <a:srgbClr val="4491A9"/>
+                </a:solidFill>
+                <a:latin typeface="Roboto Condensed" pitchFamily="34" charset="0"/>
+                <a:ea typeface="Roboto Condensed" pitchFamily="34" charset="-122"/>
+                <a:cs typeface="Roboto Condensed" pitchFamily="34" charset="-120"/>
+                <a:hlinkClick r:id="rId2" invalidUrl="" action="" tgtFrame="" tooltip="" history="1" highlightClick="0" endSnd="0">
+                  <a:extLst>
+                    <a:ext uri="{A12FA001-AC4F-418D-AE19-62706E023703}">
+                      <ahyp:hlinkClr xmlns:ahyp="http://schemas.microsoft.com/office/drawing/2018/hyperlinkcolor" val="tx"/>
+                    </a:ext>
+                  </a:extLst>
+                </a:hlinkClick>
+              </a:rPr>
+              <a:t>Lally, P., et al. (2010). How Are Habits Formed. EJSP, 40(6).
+</a:t>
+            </a:r>
+            <a:pPr indent="0" marL="0">
+              <a:lnSpc>
+                <a:spcPct val="130000"/>
+              </a:lnSpc>
+              <a:buNone/>
+            </a:pPr>
+            <a:r>
+              <a:rPr lang="en-US" sz="900" b="0" dirty="0">
+                <a:solidFill>
+                  <a:srgbClr val="EC5C2A"/>
+                </a:solidFill>
+                <a:latin typeface="Roboto Condensed" pitchFamily="34" charset="0"/>
+                <a:ea typeface="Roboto Condensed" pitchFamily="34" charset="-122"/>
+                <a:cs typeface="Roboto Condensed" pitchFamily="34" charset="-120"/>
+              </a:rPr>
+              <a:t>https://doi.org/10.1002/ejsp.674
+</a:t>
+            </a:r>
+            <a:pPr indent="0" marL="0">
+              <a:lnSpc>
+                <a:spcPct val="130000"/>
+              </a:lnSpc>
+              <a:buNone/>
+            </a:pPr>
+            <a:r>
+              <a:rPr lang="en-US" sz="900" dirty="0" b="0">
+                <a:solidFill>
+                  <a:srgbClr val="404040"/>
+                </a:solidFill>
+                <a:latin typeface="Roboto Condensed" pitchFamily="34" charset="0"/>
+                <a:ea typeface="Roboto Condensed" pitchFamily="34" charset="-122"/>
+                <a:cs typeface="Roboto Condensed" pitchFamily="34" charset="-120"/>
+              </a:rPr>
+              <a:t>Lally's longitudinal study found that automaticity for a new daily behavior took a median of 66 days, with a range of 18 to 254 depending on complexity. Behavior consistency in the early weeks predicted whether the habit took hold. Slide 9 uses this to ground the claim that complex prosocial behaviors require repeated, spaced practice to reach automaticity, which is why the Stage 2 credential requires six months of sustained implementation. A two-day training builds capability; the cohort and the spacing are what convert capability into habit.</a:t>
+            </a:r>
+            <a:pPr indent="0" marL="0">
+              <a:lnSpc>
+                <a:spcPct val="130000"/>
+              </a:lnSpc>
+              <a:buNone/>
+            </a:pPr>
+            <a:r>
+              <a:rPr lang="en-US" sz="900" u="sng" dirty="0">
+                <a:solidFill>
+                  <a:srgbClr val="4491A9"/>
+                </a:solidFill>
+                <a:latin typeface="Roboto Condensed" pitchFamily="34" charset="0"/>
+                <a:ea typeface="Roboto Condensed" pitchFamily="34" charset="-122"/>
+                <a:cs typeface="Roboto Condensed" pitchFamily="34" charset="-120"/>
+                <a:hlinkClick r:id="rId3" invalidUrl="" action="" tgtFrame="" tooltip="" history="1" highlightClick="0" endSnd="0">
+                  <a:extLst>
+                    <a:ext uri="{A12FA001-AC4F-418D-AE19-62706E023703}">
+                      <ahyp:hlinkClr xmlns:ahyp="http://schemas.microsoft.com/office/drawing/2018/hyperlinkcolor" val="tx"/>
+                    </a:ext>
+                  </a:extLst>
+                </a:hlinkClick>
+              </a:rPr>
+              <a:t/>
+            </a:r>
+            <a:pPr indent="0" marL="0">
+              <a:lnSpc>
+                <a:spcPct val="130000"/>
+              </a:lnSpc>
+              <a:buNone/>
+            </a:pPr>
+            <a:r>
+              <a:rPr lang="en-US" sz="900" b="1" dirty="0">
+                <a:solidFill>
+                  <a:srgbClr val="EC5C2A"/>
+                </a:solidFill>
+                <a:latin typeface="Roboto Condensed" pitchFamily="34" charset="0"/>
+                <a:ea typeface="Roboto Condensed" pitchFamily="34" charset="-122"/>
+                <a:cs typeface="Roboto Condensed" pitchFamily="34" charset="-120"/>
+              </a:rPr>
+              <a:t/>
+            </a:r>
+            <a:pPr indent="0" marL="0">
+              <a:lnSpc>
+                <a:spcPct val="130000"/>
+              </a:lnSpc>
+              <a:buNone/>
+            </a:pPr>
+            <a:r>
+              <a:rPr lang="en-US" sz="900" dirty="0">
+                <a:solidFill>
+                  <a:srgbClr val="404040"/>
+                </a:solidFill>
+                <a:latin typeface="Roboto Condensed" pitchFamily="34" charset="0"/>
+                <a:ea typeface="Roboto Condensed" pitchFamily="34" charset="-122"/>
+                <a:cs typeface="Roboto Condensed" pitchFamily="34" charset="-120"/>
+              </a:rPr>
+              <a:t/>
+            </a:r>
+            <a:pPr indent="0" marL="0">
+              <a:lnSpc>
+                <a:spcPct val="130000"/>
+              </a:lnSpc>
+              <a:buNone/>
+            </a:pPr>
+            <a:r>
+              <a:rPr lang="en-US" sz="900" u="sng" dirty="0">
+                <a:solidFill>
+                  <a:srgbClr val="4491A9"/>
+                </a:solidFill>
+                <a:latin typeface="Roboto Condensed" pitchFamily="34" charset="0"/>
+                <a:ea typeface="Roboto Condensed" pitchFamily="34" charset="-122"/>
+                <a:cs typeface="Roboto Condensed" pitchFamily="34" charset="-120"/>
+                <a:hlinkClick r:id="rId4" invalidUrl="" action="" tgtFrame="" tooltip="" history="1" highlightClick="0" endSnd="0">
+                  <a:extLst>
+                    <a:ext uri="{A12FA001-AC4F-418D-AE19-62706E023703}">
+                      <ahyp:hlinkClr xmlns:ahyp="http://schemas.microsoft.com/office/drawing/2018/hyperlinkcolor" val="tx"/>
+                    </a:ext>
+                  </a:extLst>
+                </a:hlinkClick>
+              </a:rPr>
+              <a:t/>
+            </a:r>
+            <a:pPr indent="0" marL="0">
+              <a:lnSpc>
+                <a:spcPct val="130000"/>
+              </a:lnSpc>
+              <a:buNone/>
+            </a:pPr>
+            <a:r>
+              <a:rPr lang="en-US" sz="900" b="1" dirty="0">
+                <a:solidFill>
+                  <a:srgbClr val="EC5C2A"/>
+                </a:solidFill>
+                <a:latin typeface="Roboto Condensed" pitchFamily="34" charset="0"/>
+                <a:ea typeface="Roboto Condensed" pitchFamily="34" charset="-122"/>
+                <a:cs typeface="Roboto Condensed" pitchFamily="34" charset="-120"/>
+              </a:rPr>
+              <a:t/>
+            </a:r>
+            <a:pPr indent="0" marL="0">
+              <a:lnSpc>
+                <a:spcPct val="130000"/>
+              </a:lnSpc>
+              <a:buNone/>
+            </a:pPr>
+            <a:r>
+              <a:rPr lang="en-US" sz="900" dirty="0">
+                <a:solidFill>
+                  <a:srgbClr val="404040"/>
+                </a:solidFill>
+                <a:latin typeface="Roboto Condensed" pitchFamily="34" charset="0"/>
+                <a:ea typeface="Roboto Condensed" pitchFamily="34" charset="-122"/>
+                <a:cs typeface="Roboto Condensed" pitchFamily="34" charset="-120"/>
+              </a:rPr>
+              <a:t/>
+            </a:r>
+            <a:pPr indent="0" marL="0">
+              <a:lnSpc>
+                <a:spcPct val="130000"/>
+              </a:lnSpc>
+              <a:buNone/>
+            </a:pPr>
+            <a:r>
+              <a:rPr lang="en-US" sz="900" u="sng" dirty="0">
+                <a:solidFill>
+                  <a:srgbClr val="4491A9"/>
+                </a:solidFill>
+                <a:latin typeface="Roboto Condensed" pitchFamily="34" charset="0"/>
+                <a:ea typeface="Roboto Condensed" pitchFamily="34" charset="-122"/>
+                <a:cs typeface="Roboto Condensed" pitchFamily="34" charset="-120"/>
+                <a:hlinkClick r:id="rId5" invalidUrl="" action="" tgtFrame="" tooltip="" history="1" highlightClick="0" endSnd="0">
+                  <a:extLst>
+                    <a:ext uri="{A12FA001-AC4F-418D-AE19-62706E023703}">
+                      <ahyp:hlinkClr xmlns:ahyp="http://schemas.microsoft.com/office/drawing/2018/hyperlinkcolor" val="tx"/>
+                    </a:ext>
+                  </a:extLst>
+                </a:hlinkClick>
+              </a:rPr>
+              <a:t/>
+            </a:r>
+            <a:pPr indent="0" marL="0">
+              <a:lnSpc>
+                <a:spcPct val="130000"/>
+              </a:lnSpc>
+              <a:buNone/>
+            </a:pPr>
+            <a:r>
+              <a:rPr lang="en-US" sz="900" b="1" dirty="0">
+                <a:solidFill>
+                  <a:srgbClr val="EC5C2A"/>
+                </a:solidFill>
+                <a:latin typeface="Roboto Condensed" pitchFamily="34" charset="0"/>
+                <a:ea typeface="Roboto Condensed" pitchFamily="34" charset="-122"/>
+                <a:cs typeface="Roboto Condensed" pitchFamily="34" charset="-120"/>
+              </a:rPr>
+              <a:t/>
+            </a:r>
+            <a:pPr indent="0" marL="0">
+              <a:lnSpc>
+                <a:spcPct val="130000"/>
+              </a:lnSpc>
+              <a:buNone/>
+            </a:pPr>
+            <a:r>
+              <a:rPr lang="en-US" sz="900" dirty="0">
+                <a:solidFill>
+                  <a:srgbClr val="404040"/>
+                </a:solidFill>
+                <a:latin typeface="Roboto Condensed" pitchFamily="34" charset="0"/>
+                <a:ea typeface="Roboto Condensed" pitchFamily="34" charset="-122"/>
+                <a:cs typeface="Roboto Condensed" pitchFamily="34" charset="-120"/>
+              </a:rPr>
+              <a:t/>
+            </a:r>
+            <a:pPr indent="0" marL="0">
+              <a:lnSpc>
+                <a:spcPct val="130000"/>
+              </a:lnSpc>
+              <a:buNone/>
+            </a:pPr>
+            <a:r>
+              <a:rPr lang="en-US" sz="900" u="sng" dirty="0">
+                <a:solidFill>
+                  <a:srgbClr val="4491A9"/>
+                </a:solidFill>
+                <a:latin typeface="Roboto Condensed" pitchFamily="34" charset="0"/>
+                <a:ea typeface="Roboto Condensed" pitchFamily="34" charset="-122"/>
+                <a:cs typeface="Roboto Condensed" pitchFamily="34" charset="-120"/>
+                <a:hlinkClick r:id="rId6" invalidUrl="" action="" tgtFrame="" tooltip="" history="1" highlightClick="0" endSnd="0">
+                  <a:extLst>
+                    <a:ext uri="{A12FA001-AC4F-418D-AE19-62706E023703}">
+                      <ahyp:hlinkClr xmlns:ahyp="http://schemas.microsoft.com/office/drawing/2018/hyperlinkcolor" val="tx"/>
+                    </a:ext>
+                  </a:extLst>
+                </a:hlinkClick>
+              </a:rPr>
+              <a:t/>
+            </a:r>
+            <a:pPr indent="0" marL="0">
+              <a:lnSpc>
+                <a:spcPct val="130000"/>
+              </a:lnSpc>
+              <a:buNone/>
+            </a:pPr>
+            <a:r>
+              <a:rPr lang="en-US" sz="900" b="1" dirty="0">
+                <a:solidFill>
+                  <a:srgbClr val="EC5C2A"/>
+                </a:solidFill>
+                <a:latin typeface="Roboto Condensed" pitchFamily="34" charset="0"/>
+                <a:ea typeface="Roboto Condensed" pitchFamily="34" charset="-122"/>
+                <a:cs typeface="Roboto Condensed" pitchFamily="34" charset="-120"/>
+              </a:rPr>
+              <a:t/>
+            </a:r>
+            <a:pPr indent="0" marL="0">
+              <a:lnSpc>
+                <a:spcPct val="130000"/>
+              </a:lnSpc>
+              <a:buNone/>
+            </a:pPr>
+            <a:r>
+              <a:rPr lang="en-US" sz="900" dirty="0">
+                <a:solidFill>
+                  <a:srgbClr val="404040"/>
+                </a:solidFill>
+                <a:latin typeface="Roboto Condensed" pitchFamily="34" charset="0"/>
+                <a:ea typeface="Roboto Condensed" pitchFamily="34" charset="-122"/>
+                <a:cs typeface="Roboto Condensed" pitchFamily="34" charset="-120"/>
+              </a:rPr>
+              <a:t/>
+            </a:r>
+            <a:pPr indent="0" marL="0">
+              <a:lnSpc>
+                <a:spcPct val="130000"/>
+              </a:lnSpc>
+              <a:buNone/>
+            </a:pPr>
+            <a:r>
+              <a:rPr lang="en-US" sz="900" u="sng" dirty="0">
+                <a:solidFill>
+                  <a:srgbClr val="4491A9"/>
+                </a:solidFill>
+                <a:latin typeface="Roboto Condensed" pitchFamily="34" charset="0"/>
+                <a:ea typeface="Roboto Condensed" pitchFamily="34" charset="-122"/>
+                <a:cs typeface="Roboto Condensed" pitchFamily="34" charset="-120"/>
+                <a:hlinkClick r:id="rId7" invalidUrl="" action="" tgtFrame="" tooltip="" history="1" highlightClick="0" endSnd="0">
+                  <a:extLst>
+                    <a:ext uri="{A12FA001-AC4F-418D-AE19-62706E023703}">
+                      <ahyp:hlinkClr xmlns:ahyp="http://schemas.microsoft.com/office/drawing/2018/hyperlinkcolor" val="tx"/>
+                    </a:ext>
+                  </a:extLst>
+                </a:hlinkClick>
+              </a:rPr>
+              <a:t/>
+            </a:r>
+            <a:pPr indent="0" marL="0">
+              <a:lnSpc>
+                <a:spcPct val="130000"/>
+              </a:lnSpc>
+              <a:buNone/>
+            </a:pPr>
+            <a:r>
+              <a:rPr lang="en-US" sz="900" b="1" dirty="0">
+                <a:solidFill>
+                  <a:srgbClr val="EC5C2A"/>
+                </a:solidFill>
+                <a:latin typeface="Roboto Condensed" pitchFamily="34" charset="0"/>
+                <a:ea typeface="Roboto Condensed" pitchFamily="34" charset="-122"/>
+                <a:cs typeface="Roboto Condensed" pitchFamily="34" charset="-120"/>
+              </a:rPr>
+              <a:t/>
+            </a:r>
+            <a:pPr indent="0" marL="0">
+              <a:lnSpc>
+                <a:spcPct val="130000"/>
+              </a:lnSpc>
+              <a:buNone/>
+            </a:pPr>
+            <a:r>
+              <a:rPr lang="en-US" sz="900" dirty="0">
+                <a:solidFill>
+                  <a:srgbClr val="404040"/>
+                </a:solidFill>
+                <a:latin typeface="Roboto Condensed" pitchFamily="34" charset="0"/>
+                <a:ea typeface="Roboto Condensed" pitchFamily="34" charset="-122"/>
+                <a:cs typeface="Roboto Condensed" pitchFamily="34" charset="-120"/>
+              </a:rPr>
+              <a:t/>
+            </a:r>
+            <a:pPr indent="0" marL="0">
+              <a:lnSpc>
+                <a:spcPct val="130000"/>
+              </a:lnSpc>
+              <a:buNone/>
+            </a:pPr>
+            <a:r>
+              <a:rPr lang="en-US" sz="900" u="sng" dirty="0">
+                <a:solidFill>
+                  <a:srgbClr val="4491A9"/>
+                </a:solidFill>
+                <a:latin typeface="Roboto Condensed" pitchFamily="34" charset="0"/>
+                <a:ea typeface="Roboto Condensed" pitchFamily="34" charset="-122"/>
+                <a:cs typeface="Roboto Condensed" pitchFamily="34" charset="-120"/>
+                <a:hlinkClick r:id="rId8" invalidUrl="" action="" tgtFrame="" tooltip="" history="1" highlightClick="0" endSnd="0">
+                  <a:extLst>
+                    <a:ext uri="{A12FA001-AC4F-418D-AE19-62706E023703}">
+                      <ahyp:hlinkClr xmlns:ahyp="http://schemas.microsoft.com/office/drawing/2018/hyperlinkcolor" val="tx"/>
+                    </a:ext>
+                  </a:extLst>
+                </a:hlinkClick>
+              </a:rPr>
+              <a:t/>
+            </a:r>
+            <a:endParaRPr lang="en-US" sz="900" dirty="0"/>
+          </a:p>
+        </p:txBody>
+      </p:sp>
+      <p:sp>
+        <p:nvSpPr>
+          <p:cNvPr id="7" name="Text 5"/>
+          <p:cNvSpPr/>
+          <p:nvPr/>
+        </p:nvSpPr>
+        <p:spPr>
+          <a:xfrm>
+            <a:off x="6309360" y="2606040"/>
+            <a:ext cx="5486400" cy="3657600"/>
+          </a:xfrm>
+          <a:prstGeom prst="rect">
+            <a:avLst/>
+          </a:prstGeom>
+          <a:noFill/>
+          <a:ln/>
+        </p:spPr>
+        <p:txBody>
+          <a:bodyPr wrap="square" rtlCol="0" anchor="ctr"/>
+          <a:lstStyle/>
+          <a:p>
+            <a:pPr indent="0" marL="0">
+              <a:lnSpc>
+                <a:spcPct val="130000"/>
+              </a:lnSpc>
+              <a:buNone/>
+            </a:pPr>
+            <a:r>
+              <a:rPr lang="en-US" sz="900" b="1" dirty="0">
+                <a:solidFill>
+                  <a:srgbClr val="EC5C2A"/>
+                </a:solidFill>
+                <a:latin typeface="Roboto Condensed" pitchFamily="34" charset="0"/>
+                <a:ea typeface="Roboto Condensed" pitchFamily="34" charset="-122"/>
+                <a:cs typeface="Roboto Condensed" pitchFamily="34" charset="-120"/>
+              </a:rPr>
+              <a:t>[18] </a:t>
+            </a:r>
+            <a:pPr indent="0" marL="0">
+              <a:lnSpc>
+                <a:spcPct val="130000"/>
+              </a:lnSpc>
+              <a:buNone/>
+            </a:pPr>
+            <a:r>
+              <a:rPr lang="en-US" sz="900" dirty="0" b="0">
+                <a:solidFill>
+                  <a:srgbClr val="404040"/>
+                </a:solidFill>
+                <a:latin typeface="Roboto Condensed" pitchFamily="34" charset="0"/>
+                <a:ea typeface="Roboto Condensed" pitchFamily="34" charset="-122"/>
+                <a:cs typeface="Roboto Condensed" pitchFamily="34" charset="-120"/>
+              </a:rPr>
+              <a:t>Cepeda, N.J., et al. (2006). Distributed Practice in Verbal Recall Tasks. Psychological Bulletin, 132(3).
+</a:t>
+            </a:r>
+            <a:pPr indent="0" marL="0">
+              <a:lnSpc>
+                <a:spcPct val="130000"/>
+              </a:lnSpc>
+              <a:buNone/>
+            </a:pPr>
+            <a:r>
+              <a:rPr lang="en-US" sz="900" u="sng" dirty="0" b="0">
+                <a:solidFill>
+                  <a:srgbClr val="4491A9"/>
+                </a:solidFill>
+                <a:latin typeface="Roboto Condensed" pitchFamily="34" charset="0"/>
+                <a:ea typeface="Roboto Condensed" pitchFamily="34" charset="-122"/>
+                <a:cs typeface="Roboto Condensed" pitchFamily="34" charset="-120"/>
+                <a:hlinkClick r:id="rId9" invalidUrl="" action="" tgtFrame="" tooltip="" history="1" highlightClick="0" endSnd="0">
+                  <a:extLst>
+                    <a:ext uri="{A12FA001-AC4F-418D-AE19-62706E023703}">
+                      <ahyp:hlinkClr xmlns:ahyp="http://schemas.microsoft.com/office/drawing/2018/hyperlinkcolor" val="tx"/>
+                    </a:ext>
+                  </a:extLst>
+                </a:hlinkClick>
+              </a:rPr>
+              <a:t>https://doi.org/10.1037/0033-2909.132.3.354
+</a:t>
+            </a:r>
+            <a:pPr indent="0" marL="0">
+              <a:lnSpc>
+                <a:spcPct val="130000"/>
+              </a:lnSpc>
+              <a:buNone/>
+            </a:pPr>
+            <a:r>
+              <a:rPr lang="en-US" sz="900" b="0" dirty="0">
+                <a:solidFill>
+                  <a:srgbClr val="EC5C2A"/>
+                </a:solidFill>
+                <a:latin typeface="Roboto Condensed" pitchFamily="34" charset="0"/>
+                <a:ea typeface="Roboto Condensed" pitchFamily="34" charset="-122"/>
+                <a:cs typeface="Roboto Condensed" pitchFamily="34" charset="-120"/>
+              </a:rPr>
+              <a:t>Cepeda's meta-analysis of more than 800 studies established that spaced practice produces substantially better long-term retention than massed practice, with optimal spacing scaling to the desired retention interval. The original studies are on verbal learning, but the principle generalizes to skill acquisition: practice distributed across weeks outperforms the same practice compressed into days. This is the evidence base for the slide 9 design choice to follow the two-day campus with a six-month cohort rather than a single intensive event. Workshop intensity creates excitement; spaced practice creates retention.
+</a:t>
+            </a:r>
+            <a:pPr indent="0" marL="0">
+              <a:lnSpc>
+                <a:spcPct val="130000"/>
+              </a:lnSpc>
+              <a:buNone/>
+            </a:pPr>
+            <a:r>
+              <a:rPr lang="en-US" sz="900" dirty="0" b="1">
+                <a:solidFill>
+                  <a:srgbClr val="404040"/>
+                </a:solidFill>
+                <a:latin typeface="Roboto Condensed" pitchFamily="34" charset="0"/>
+                <a:ea typeface="Roboto Condensed" pitchFamily="34" charset="-122"/>
+                <a:cs typeface="Roboto Condensed" pitchFamily="34" charset="-120"/>
+              </a:rPr>
+              <a:t>[19] </a:t>
+            </a:r>
+            <a:pPr indent="0" marL="0">
+              <a:lnSpc>
+                <a:spcPct val="130000"/>
+              </a:lnSpc>
+              <a:buNone/>
+            </a:pPr>
+            <a:r>
+              <a:rPr lang="en-US" sz="900" u="sng" dirty="0" b="0">
+                <a:solidFill>
+                  <a:srgbClr val="4491A9"/>
+                </a:solidFill>
+                <a:latin typeface="Roboto Condensed" pitchFamily="34" charset="0"/>
+                <a:ea typeface="Roboto Condensed" pitchFamily="34" charset="-122"/>
+                <a:cs typeface="Roboto Condensed" pitchFamily="34" charset="-120"/>
+                <a:hlinkClick r:id="rId10" invalidUrl="" action="" tgtFrame="" tooltip="" history="1" highlightClick="0" endSnd="0">
+                  <a:extLst>
+                    <a:ext uri="{A12FA001-AC4F-418D-AE19-62706E023703}">
+                      <ahyp:hlinkClr xmlns:ahyp="http://schemas.microsoft.com/office/drawing/2018/hyperlinkcolor" val="tx"/>
+                    </a:ext>
+                  </a:extLst>
+                </a:hlinkClick>
+              </a:rPr>
+              <a:t>Centola, D., et al. (2018). Tipping Points in Social Convention. Science, 360.
+</a:t>
+            </a:r>
+            <a:pPr indent="0" marL="0">
+              <a:lnSpc>
+                <a:spcPct val="130000"/>
+              </a:lnSpc>
+              <a:buNone/>
+            </a:pPr>
+            <a:r>
+              <a:rPr lang="en-US" sz="900" b="0" dirty="0">
+                <a:solidFill>
+                  <a:srgbClr val="EC5C2A"/>
+                </a:solidFill>
+                <a:latin typeface="Roboto Condensed" pitchFamily="34" charset="0"/>
+                <a:ea typeface="Roboto Condensed" pitchFamily="34" charset="-122"/>
+                <a:cs typeface="Roboto Condensed" pitchFamily="34" charset="-120"/>
+              </a:rPr>
+              <a:t>https://doi.org/10.1126/science.aas8827
+</a:t>
+            </a:r>
+            <a:pPr indent="0" marL="0">
+              <a:lnSpc>
+                <a:spcPct val="130000"/>
+              </a:lnSpc>
+              <a:buNone/>
+            </a:pPr>
+            <a:r>
+              <a:rPr lang="en-US" sz="900" dirty="0" b="0">
+                <a:solidFill>
+                  <a:srgbClr val="404040"/>
+                </a:solidFill>
+                <a:latin typeface="Roboto Condensed" pitchFamily="34" charset="0"/>
+                <a:ea typeface="Roboto Condensed" pitchFamily="34" charset="-122"/>
+                <a:cs typeface="Roboto Condensed" pitchFamily="34" charset="-120"/>
+              </a:rPr>
+              <a:t>Centola's experimental study found that when approximately 25 percent of a group adopts a new behavior or norm, rapid widespread adoption follows, providing empirical support for tipping-point dynamics in social systems. This is the basis for the slide 7 ripple-effect claim that a small trained cohort can shift practice across a much larger population. It also informs the design target for champion networks: roughly one quarter of the relevant peer group must be trained for the new practice to become the default rather than the exception. Below that threshold, trained champions push against gravity.</a:t>
+            </a:r>
+            <a:pPr indent="0" marL="0">
+              <a:lnSpc>
+                <a:spcPct val="130000"/>
+              </a:lnSpc>
+              <a:buNone/>
+            </a:pPr>
+            <a:r>
+              <a:rPr lang="en-US" sz="900" u="sng" dirty="0">
+                <a:solidFill>
+                  <a:srgbClr val="4491A9"/>
+                </a:solidFill>
+                <a:latin typeface="Roboto Condensed" pitchFamily="34" charset="0"/>
+                <a:ea typeface="Roboto Condensed" pitchFamily="34" charset="-122"/>
+                <a:cs typeface="Roboto Condensed" pitchFamily="34" charset="-120"/>
+                <a:hlinkClick r:id="rId11" invalidUrl="" action="" tgtFrame="" tooltip="" history="1" highlightClick="0" endSnd="0">
+                  <a:extLst>
+                    <a:ext uri="{A12FA001-AC4F-418D-AE19-62706E023703}">
+                      <ahyp:hlinkClr xmlns:ahyp="http://schemas.microsoft.com/office/drawing/2018/hyperlinkcolor" val="tx"/>
+                    </a:ext>
+                  </a:extLst>
+                </a:hlinkClick>
+              </a:rPr>
+              <a:t/>
+            </a:r>
+            <a:pPr indent="0" marL="0">
+              <a:lnSpc>
+                <a:spcPct val="130000"/>
+              </a:lnSpc>
+              <a:buNone/>
+            </a:pPr>
+            <a:r>
+              <a:rPr lang="en-US" sz="900" b="1" dirty="0">
+                <a:solidFill>
+                  <a:srgbClr val="EC5C2A"/>
+                </a:solidFill>
+                <a:latin typeface="Roboto Condensed" pitchFamily="34" charset="0"/>
+                <a:ea typeface="Roboto Condensed" pitchFamily="34" charset="-122"/>
+                <a:cs typeface="Roboto Condensed" pitchFamily="34" charset="-120"/>
+              </a:rPr>
+              <a:t/>
+            </a:r>
+            <a:pPr indent="0" marL="0">
+              <a:lnSpc>
+                <a:spcPct val="130000"/>
+              </a:lnSpc>
+              <a:buNone/>
+            </a:pPr>
+            <a:r>
+              <a:rPr lang="en-US" sz="900" dirty="0">
+                <a:solidFill>
+                  <a:srgbClr val="404040"/>
+                </a:solidFill>
+                <a:latin typeface="Roboto Condensed" pitchFamily="34" charset="0"/>
+                <a:ea typeface="Roboto Condensed" pitchFamily="34" charset="-122"/>
+                <a:cs typeface="Roboto Condensed" pitchFamily="34" charset="-120"/>
+              </a:rPr>
+              <a:t/>
+            </a:r>
+            <a:pPr indent="0" marL="0">
+              <a:lnSpc>
+                <a:spcPct val="130000"/>
+              </a:lnSpc>
+              <a:buNone/>
+            </a:pPr>
+            <a:r>
+              <a:rPr lang="en-US" sz="900" u="sng" dirty="0">
+                <a:solidFill>
+                  <a:srgbClr val="4491A9"/>
+                </a:solidFill>
+                <a:latin typeface="Roboto Condensed" pitchFamily="34" charset="0"/>
+                <a:ea typeface="Roboto Condensed" pitchFamily="34" charset="-122"/>
+                <a:cs typeface="Roboto Condensed" pitchFamily="34" charset="-120"/>
+                <a:hlinkClick r:id="rId12" invalidUrl="" action="" tgtFrame="" tooltip="" history="1" highlightClick="0" endSnd="0">
+                  <a:extLst>
+                    <a:ext uri="{A12FA001-AC4F-418D-AE19-62706E023703}">
+                      <ahyp:hlinkClr xmlns:ahyp="http://schemas.microsoft.com/office/drawing/2018/hyperlinkcolor" val="tx"/>
+                    </a:ext>
+                  </a:extLst>
+                </a:hlinkClick>
+              </a:rPr>
+              <a:t/>
+            </a:r>
+            <a:pPr indent="0" marL="0">
+              <a:lnSpc>
+                <a:spcPct val="130000"/>
+              </a:lnSpc>
+              <a:buNone/>
+            </a:pPr>
+            <a:r>
+              <a:rPr lang="en-US" sz="900" b="1" dirty="0">
+                <a:solidFill>
+                  <a:srgbClr val="EC5C2A"/>
+                </a:solidFill>
+                <a:latin typeface="Roboto Condensed" pitchFamily="34" charset="0"/>
+                <a:ea typeface="Roboto Condensed" pitchFamily="34" charset="-122"/>
+                <a:cs typeface="Roboto Condensed" pitchFamily="34" charset="-120"/>
+              </a:rPr>
+              <a:t/>
+            </a:r>
+            <a:pPr indent="0" marL="0">
+              <a:lnSpc>
+                <a:spcPct val="130000"/>
+              </a:lnSpc>
+              <a:buNone/>
+            </a:pPr>
+            <a:r>
+              <a:rPr lang="en-US" sz="900" dirty="0">
+                <a:solidFill>
+                  <a:srgbClr val="404040"/>
+                </a:solidFill>
+                <a:latin typeface="Roboto Condensed" pitchFamily="34" charset="0"/>
+                <a:ea typeface="Roboto Condensed" pitchFamily="34" charset="-122"/>
+                <a:cs typeface="Roboto Condensed" pitchFamily="34" charset="-120"/>
+              </a:rPr>
+              <a:t/>
+            </a:r>
+            <a:pPr indent="0" marL="0">
+              <a:lnSpc>
+                <a:spcPct val="130000"/>
+              </a:lnSpc>
+              <a:buNone/>
+            </a:pPr>
+            <a:r>
+              <a:rPr lang="en-US" sz="900" u="sng" dirty="0">
+                <a:solidFill>
+                  <a:srgbClr val="4491A9"/>
+                </a:solidFill>
+                <a:latin typeface="Roboto Condensed" pitchFamily="34" charset="0"/>
+                <a:ea typeface="Roboto Condensed" pitchFamily="34" charset="-122"/>
+                <a:cs typeface="Roboto Condensed" pitchFamily="34" charset="-120"/>
+                <a:hlinkClick r:id="rId13" invalidUrl="" action="" tgtFrame="" tooltip="" history="1" highlightClick="0" endSnd="0">
+                  <a:extLst>
+                    <a:ext uri="{A12FA001-AC4F-418D-AE19-62706E023703}">
+                      <ahyp:hlinkClr xmlns:ahyp="http://schemas.microsoft.com/office/drawing/2018/hyperlinkcolor" val="tx"/>
+                    </a:ext>
+                  </a:extLst>
+                </a:hlinkClick>
+              </a:rPr>
+              <a:t/>
+            </a:r>
+            <a:pPr indent="0" marL="0">
+              <a:lnSpc>
+                <a:spcPct val="130000"/>
+              </a:lnSpc>
+              <a:buNone/>
+            </a:pPr>
+            <a:r>
+              <a:rPr lang="en-US" sz="900" b="1" dirty="0">
+                <a:solidFill>
+                  <a:srgbClr val="EC5C2A"/>
+                </a:solidFill>
+                <a:latin typeface="Roboto Condensed" pitchFamily="34" charset="0"/>
+                <a:ea typeface="Roboto Condensed" pitchFamily="34" charset="-122"/>
+                <a:cs typeface="Roboto Condensed" pitchFamily="34" charset="-120"/>
+              </a:rPr>
+              <a:t/>
+            </a:r>
+            <a:pPr indent="0" marL="0">
+              <a:lnSpc>
+                <a:spcPct val="130000"/>
+              </a:lnSpc>
+              <a:buNone/>
+            </a:pPr>
+            <a:r>
+              <a:rPr lang="en-US" sz="900" dirty="0">
+                <a:solidFill>
+                  <a:srgbClr val="404040"/>
+                </a:solidFill>
+                <a:latin typeface="Roboto Condensed" pitchFamily="34" charset="0"/>
+                <a:ea typeface="Roboto Condensed" pitchFamily="34" charset="-122"/>
+                <a:cs typeface="Roboto Condensed" pitchFamily="34" charset="-120"/>
+              </a:rPr>
+              <a:t/>
+            </a:r>
+            <a:pPr indent="0" marL="0">
+              <a:lnSpc>
+                <a:spcPct val="130000"/>
+              </a:lnSpc>
+              <a:buNone/>
+            </a:pPr>
+            <a:r>
+              <a:rPr lang="en-US" sz="900" u="sng" dirty="0">
+                <a:solidFill>
+                  <a:srgbClr val="4491A9"/>
+                </a:solidFill>
+                <a:latin typeface="Roboto Condensed" pitchFamily="34" charset="0"/>
+                <a:ea typeface="Roboto Condensed" pitchFamily="34" charset="-122"/>
+                <a:cs typeface="Roboto Condensed" pitchFamily="34" charset="-120"/>
+                <a:hlinkClick r:id="rId14" invalidUrl="" action="" tgtFrame="" tooltip="" history="1" highlightClick="0" endSnd="0">
+                  <a:extLst>
+                    <a:ext uri="{A12FA001-AC4F-418D-AE19-62706E023703}">
+                      <ahyp:hlinkClr xmlns:ahyp="http://schemas.microsoft.com/office/drawing/2018/hyperlinkcolor" val="tx"/>
+                    </a:ext>
+                  </a:extLst>
+                </a:hlinkClick>
+              </a:rPr>
+              <a:t/>
+            </a:r>
+            <a:pPr indent="0" marL="0">
+              <a:lnSpc>
+                <a:spcPct val="130000"/>
+              </a:lnSpc>
+              <a:buNone/>
+            </a:pPr>
+            <a:r>
+              <a:rPr lang="en-US" sz="900" b="1" dirty="0">
+                <a:solidFill>
+                  <a:srgbClr val="EC5C2A"/>
+                </a:solidFill>
+                <a:latin typeface="Roboto Condensed" pitchFamily="34" charset="0"/>
+                <a:ea typeface="Roboto Condensed" pitchFamily="34" charset="-122"/>
+                <a:cs typeface="Roboto Condensed" pitchFamily="34" charset="-120"/>
+              </a:rPr>
+              <a:t/>
+            </a:r>
+            <a:pPr indent="0" marL="0">
+              <a:lnSpc>
+                <a:spcPct val="130000"/>
+              </a:lnSpc>
+              <a:buNone/>
+            </a:pPr>
+            <a:r>
+              <a:rPr lang="en-US" sz="900" dirty="0">
+                <a:solidFill>
+                  <a:srgbClr val="404040"/>
+                </a:solidFill>
+                <a:latin typeface="Roboto Condensed" pitchFamily="34" charset="0"/>
+                <a:ea typeface="Roboto Condensed" pitchFamily="34" charset="-122"/>
+                <a:cs typeface="Roboto Condensed" pitchFamily="34" charset="-120"/>
+              </a:rPr>
+              <a:t/>
+            </a:r>
+            <a:pPr indent="0" marL="0">
+              <a:lnSpc>
+                <a:spcPct val="130000"/>
+              </a:lnSpc>
+              <a:buNone/>
+            </a:pPr>
+            <a:r>
+              <a:rPr lang="en-US" sz="900" u="sng" dirty="0">
+                <a:solidFill>
+                  <a:srgbClr val="4491A9"/>
+                </a:solidFill>
+                <a:latin typeface="Roboto Condensed" pitchFamily="34" charset="0"/>
+                <a:ea typeface="Roboto Condensed" pitchFamily="34" charset="-122"/>
+                <a:cs typeface="Roboto Condensed" pitchFamily="34" charset="-120"/>
+                <a:hlinkClick r:id="rId15" invalidUrl="" action="" tgtFrame="" tooltip="" history="1" highlightClick="0" endSnd="0">
+                  <a:extLst>
+                    <a:ext uri="{A12FA001-AC4F-418D-AE19-62706E023703}">
+                      <ahyp:hlinkClr xmlns:ahyp="http://schemas.microsoft.com/office/drawing/2018/hyperlinkcolor" val="tx"/>
+                    </a:ext>
+                  </a:extLst>
+                </a:hlinkClick>
+              </a:rPr>
+              <a:t/>
+            </a:r>
+            <a:pPr indent="0" marL="0">
+              <a:lnSpc>
+                <a:spcPct val="130000"/>
+              </a:lnSpc>
+              <a:buNone/>
+            </a:pPr>
+            <a:r>
+              <a:rPr lang="en-US" sz="900" b="1" dirty="0">
+                <a:solidFill>
+                  <a:srgbClr val="EC5C2A"/>
+                </a:solidFill>
+                <a:latin typeface="Roboto Condensed" pitchFamily="34" charset="0"/>
+                <a:ea typeface="Roboto Condensed" pitchFamily="34" charset="-122"/>
+                <a:cs typeface="Roboto Condensed" pitchFamily="34" charset="-120"/>
+              </a:rPr>
+              <a:t/>
+            </a:r>
+            <a:pPr indent="0" marL="0">
+              <a:lnSpc>
+                <a:spcPct val="130000"/>
+              </a:lnSpc>
+              <a:buNone/>
+            </a:pPr>
+            <a:r>
+              <a:rPr lang="en-US" sz="900" dirty="0">
+                <a:solidFill>
+                  <a:srgbClr val="404040"/>
+                </a:solidFill>
+                <a:latin typeface="Roboto Condensed" pitchFamily="34" charset="0"/>
+                <a:ea typeface="Roboto Condensed" pitchFamily="34" charset="-122"/>
+                <a:cs typeface="Roboto Condensed" pitchFamily="34" charset="-120"/>
+              </a:rPr>
+              <a:t/>
+            </a:r>
+            <a:pPr indent="0" marL="0">
+              <a:lnSpc>
+                <a:spcPct val="130000"/>
+              </a:lnSpc>
+              <a:buNone/>
+            </a:pPr>
+            <a:r>
+              <a:rPr lang="en-US" sz="900" u="sng" dirty="0">
+                <a:solidFill>
+                  <a:srgbClr val="4491A9"/>
+                </a:solidFill>
+                <a:latin typeface="Roboto Condensed" pitchFamily="34" charset="0"/>
+                <a:ea typeface="Roboto Condensed" pitchFamily="34" charset="-122"/>
+                <a:cs typeface="Roboto Condensed" pitchFamily="34" charset="-120"/>
+                <a:hlinkClick r:id="rId16" invalidUrl="" action="" tgtFrame="" tooltip="" history="1" highlightClick="0" endSnd="0">
+                  <a:extLst>
+                    <a:ext uri="{A12FA001-AC4F-418D-AE19-62706E023703}">
+                      <ahyp:hlinkClr xmlns:ahyp="http://schemas.microsoft.com/office/drawing/2018/hyperlinkcolor" val="tx"/>
+                    </a:ext>
+                  </a:extLst>
+                </a:hlinkClick>
+              </a:rPr>
+              <a:t/>
+            </a:r>
+            <a:endParaRPr lang="en-US" sz="900" dirty="0"/>
+          </a:p>
+        </p:txBody>
+      </p:sp>
+      <p:sp>
+        <p:nvSpPr>
+          <p:cNvPr id="8" name="Shape 6"/>
+          <p:cNvSpPr/>
+          <p:nvPr/>
+        </p:nvSpPr>
+        <p:spPr>
+          <a:xfrm>
+            <a:off x="548640" y="6355080"/>
+            <a:ext cx="11094415" cy="0"/>
+          </a:xfrm>
+          <a:prstGeom prst="line">
+            <a:avLst/>
+          </a:prstGeom>
+          <a:noFill/>
+          <a:ln w="6350">
+            <a:solidFill>
+              <a:srgbClr val="C2C2C6"/>
+            </a:solidFill>
+            <a:prstDash val="solid"/>
+          </a:ln>
+        </p:spPr>
+      </p:sp>
+      <p:sp>
+        <p:nvSpPr>
+          <p:cNvPr id="9" name="Text 7"/>
+          <p:cNvSpPr/>
+          <p:nvPr/>
+        </p:nvSpPr>
+        <p:spPr>
+          <a:xfrm>
+            <a:off x="548640" y="6446520"/>
+            <a:ext cx="7315200" cy="274320"/>
+          </a:xfrm>
+          <a:prstGeom prst="rect">
+            <a:avLst/>
+          </a:prstGeom>
+          <a:noFill/>
+          <a:ln/>
+        </p:spPr>
+        <p:txBody>
+          <a:bodyPr wrap="square" rtlCol="0" anchor="ctr"/>
+          <a:lstStyle/>
+          <a:p>
+            <a:pPr indent="0" marL="0">
+              <a:buNone/>
+            </a:pPr>
+            <a:r>
+              <a:rPr lang="en-US" sz="900" spc="200" kern="0" dirty="0">
+                <a:solidFill>
+                  <a:srgbClr val="6B6B6F"/>
+                </a:solidFill>
+                <a:latin typeface="Roboto Condensed" pitchFamily="34" charset="0"/>
+                <a:ea typeface="Roboto Condensed" pitchFamily="34" charset="-122"/>
+                <a:cs typeface="Roboto Condensed" pitchFamily="34" charset="-120"/>
+              </a:rPr>
+              <a:t>RW Institute · Regional Campus Series</a:t>
+            </a:r>
+            <a:endParaRPr lang="en-US" sz="900" dirty="0"/>
+          </a:p>
+        </p:txBody>
+      </p:sp>
+      <p:sp>
+        <p:nvSpPr>
+          <p:cNvPr id="10" name="Text 8"/>
+          <p:cNvSpPr/>
+          <p:nvPr/>
+        </p:nvSpPr>
+        <p:spPr>
+          <a:xfrm>
+            <a:off x="11277295" y="6446520"/>
+            <a:ext cx="365760" cy="274320"/>
+          </a:xfrm>
+          <a:prstGeom prst="rect">
+            <a:avLst/>
+          </a:prstGeom>
+          <a:noFill/>
+          <a:ln/>
+        </p:spPr>
+        <p:txBody>
+          <a:bodyPr wrap="square" rtlCol="0" anchor="ctr"/>
+          <a:lstStyle/>
+          <a:p>
+            <a:pPr algn="r" indent="0" marL="0">
+              <a:buNone/>
+            </a:pPr>
+            <a:r>
+              <a:rPr lang="en-US" sz="900" dirty="0">
+                <a:solidFill>
+                  <a:srgbClr val="6B6B6F"/>
+                </a:solidFill>
+                <a:latin typeface="Roboto Condensed" pitchFamily="34" charset="0"/>
+                <a:ea typeface="Roboto Condensed" pitchFamily="34" charset="-122"/>
+                <a:cs typeface="Roboto Condensed" pitchFamily="34" charset="-120"/>
+              </a:rPr>
+              <a:t>17</a:t>
             </a:r>
             <a:endParaRPr lang="en-US" sz="900" dirty="0"/>
           </a:p>
@@ -7399,6 +12487,10 @@
             <a:prstDash val="solid"/>
           </a:ln>
         </p:spPr>
+        <p:txBody>
+          <a:bodyPr/>
+          <a:p/>
+        </p:txBody>
       </p:sp>
       <p:sp>
         <p:nvSpPr>
@@ -7436,7 +12528,7 @@
                 <a:ea typeface="Roboto" pitchFamily="34" charset="-122"/>
                 <a:cs typeface="Roboto" pitchFamily="34" charset="-120"/>
               </a:rPr>
-              <a:t>Microsoft's commitment to community is significant, with a 40-year history and over 700,000 volunteer hours reported in 2022. We have built an impressive logistical structure for participation at a global scale. However, our current framework is not consistently delivering the deeper impact we seek. Manager support for employee participation is uneven, key nonprofit partners feel under-served, and we cannot currently connect this activity back to measurable gains in employee retention or offer the ROI leadership expects.</a:t>
+              <a:t>Microsoft has 40 years of community commitment and over 700,000 volunteer hours reported in 2022. The logistical structure for participation is in place at global scale. The framework around it is not consistently producing deeper impact. Manager support is uneven, key nonprofit partners feel under-served, and we cannot connect this activity back to retention or to the ROI leadership expects.</a:t>
             </a:r>
             <a:endParaRPr lang="en-US" sz="1500" dirty="0"/>
           </a:p>
@@ -7466,6 +12558,10 @@
             <a:prstDash val="solid"/>
           </a:ln>
         </p:spPr>
+        <p:txBody>
+          <a:bodyPr/>
+          <a:p/>
+        </p:txBody>
       </p:sp>
       <p:sp>
         <p:nvSpPr>
@@ -7491,6 +12587,10 @@
             <a:prstDash val="solid"/>
           </a:ln>
         </p:spPr>
+        <p:txBody>
+          <a:bodyPr/>
+          <a:p/>
+        </p:txBody>
       </p:sp>
       <p:sp>
         <p:nvSpPr>
@@ -7567,7 +12667,7 @@
                 <a:ea typeface="Roboto" pitchFamily="34" charset="-122"/>
                 <a:cs typeface="Roboto" pitchFamily="34" charset="-120"/>
               </a:rPr>
-              <a:t>We've achieved massive scale in participation, but now struggle to measure the program's deeper impact on our people, partners, and business.</a:t>
+              <a:t>We have scale in participation. We do not have evidence that it is changing our people, our partners, or the business.</a:t>
             </a:r>
             <a:endParaRPr lang="en-US" sz="1600" dirty="0"/>
           </a:p>
@@ -7595,6 +12695,10 @@
             <a:prstDash val="solid"/>
           </a:ln>
         </p:spPr>
+        <p:txBody>
+          <a:bodyPr/>
+          <a:p/>
+        </p:txBody>
       </p:sp>
       <p:sp>
         <p:nvSpPr>
@@ -7806,6 +12910,10 @@
             <a:prstDash val="solid"/>
           </a:ln>
         </p:spPr>
+        <p:txBody>
+          <a:bodyPr/>
+          <a:p/>
+        </p:txBody>
       </p:sp>
       <p:sp>
         <p:nvSpPr>
@@ -7833,6 +12941,10 @@
             <a:prstDash val="solid"/>
           </a:ln>
         </p:spPr>
+        <p:txBody>
+          <a:bodyPr/>
+          <a:p/>
+        </p:txBody>
       </p:sp>
       <p:sp>
         <p:nvSpPr>
@@ -7895,6 +13007,10 @@
             <a:prstDash val="solid"/>
           </a:ln>
         </p:spPr>
+        <p:txBody>
+          <a:bodyPr/>
+          <a:p/>
+        </p:txBody>
       </p:sp>
       <p:sp>
         <p:nvSpPr>
@@ -7922,6 +13038,10 @@
             <a:prstDash val="dash"/>
           </a:ln>
         </p:spPr>
+        <p:txBody>
+          <a:bodyPr/>
+          <a:p/>
+        </p:txBody>
       </p:sp>
       <p:sp>
         <p:nvSpPr>
@@ -8023,6 +13143,10 @@
             <a:prstDash val="solid"/>
           </a:ln>
         </p:spPr>
+        <p:txBody>
+          <a:bodyPr/>
+          <a:p/>
+        </p:txBody>
       </p:sp>
       <p:sp>
         <p:nvSpPr>
@@ -8050,6 +13174,10 @@
             <a:prstDash val="solid"/>
           </a:ln>
         </p:spPr>
+        <p:txBody>
+          <a:bodyPr/>
+          <a:p/>
+        </p:txBody>
       </p:sp>
       <p:sp>
         <p:nvSpPr>
@@ -8112,6 +13240,10 @@
             <a:prstDash val="solid"/>
           </a:ln>
         </p:spPr>
+        <p:txBody>
+          <a:bodyPr/>
+          <a:p/>
+        </p:txBody>
       </p:sp>
       <p:sp>
         <p:nvSpPr>
@@ -8139,6 +13271,10 @@
             <a:prstDash val="dash"/>
           </a:ln>
         </p:spPr>
+        <p:txBody>
+          <a:bodyPr/>
+          <a:p/>
+        </p:txBody>
       </p:sp>
       <p:sp>
         <p:nvSpPr>
@@ -8240,6 +13376,10 @@
             <a:prstDash val="solid"/>
           </a:ln>
         </p:spPr>
+        <p:txBody>
+          <a:bodyPr/>
+          <a:p/>
+        </p:txBody>
       </p:sp>
       <p:sp>
         <p:nvSpPr>
@@ -8267,6 +13407,10 @@
             <a:prstDash val="solid"/>
           </a:ln>
         </p:spPr>
+        <p:txBody>
+          <a:bodyPr/>
+          <a:p/>
+        </p:txBody>
       </p:sp>
       <p:sp>
         <p:nvSpPr>
@@ -8661,7 +13805,7 @@
                 <a:ea typeface="Roboto" pitchFamily="34" charset="-122"/>
                 <a:cs typeface="Roboto" pitchFamily="34" charset="-120"/>
               </a:rPr>
-              <a:t>The 0–40 minute window for memory consolidation [2] closes. Champions burn out — repeated exposure without structured processing activates pain-sharing rather than compassion circuits [3].</a:t>
+              <a:t>The 0–40 minute window for memory consolidation [2] closes. Champions burn out. Repeated exposure without structured processing activates pain-sharing rather than compassion circuits [3].</a:t>
             </a:r>
             <a:endParaRPr lang="en-US" sz="1100" dirty="0"/>
           </a:p>
@@ -8689,6 +13833,10 @@
             <a:prstDash val="solid"/>
           </a:ln>
         </p:spPr>
+        <p:txBody>
+          <a:bodyPr/>
+          <a:p/>
+        </p:txBody>
       </p:sp>
       <p:sp>
         <p:nvSpPr>
@@ -9822,6 +14970,10 @@
             <a:prstDash val="solid"/>
           </a:ln>
         </p:spPr>
+        <p:txBody>
+          <a:bodyPr/>
+          <a:p/>
+        </p:txBody>
       </p:sp>
       <p:sp>
         <p:nvSpPr>
@@ -9859,7 +15011,7 @@
                 <a:ea typeface="Roboto" pitchFamily="34" charset="-122"/>
                 <a:cs typeface="Roboto" pitchFamily="34" charset="-120"/>
               </a:rPr>
-              <a:t>Our investment will equip these champions to move beyond event coordination. They will be trained to design and facilitate experiences that intentionally build trust between managers and employees and foster connections across internal teams.</a:t>
+              <a:t>These six champions move beyond event coordination. They design and facilitate experiences that build manager-employee trust and connect people across internal teams.</a:t>
             </a:r>
             <a:endParaRPr lang="en-US" sz="1300" dirty="0"/>
           </a:p>
@@ -9889,6 +15041,10 @@
             <a:prstDash val="solid"/>
           </a:ln>
         </p:spPr>
+        <p:txBody>
+          <a:bodyPr/>
+          <a:p/>
+        </p:txBody>
       </p:sp>
       <p:sp>
         <p:nvSpPr>
@@ -10034,6 +15190,10 @@
             <a:prstDash val="solid"/>
           </a:ln>
         </p:spPr>
+        <p:txBody>
+          <a:bodyPr/>
+          <a:p/>
+        </p:txBody>
       </p:sp>
       <p:sp>
         <p:nvSpPr>
@@ -10179,6 +15339,10 @@
             <a:prstDash val="solid"/>
           </a:ln>
         </p:spPr>
+        <p:txBody>
+          <a:bodyPr/>
+          <a:p/>
+        </p:txBody>
       </p:sp>
       <p:sp>
         <p:nvSpPr>
@@ -10294,7 +15458,7 @@
                 <a:ea typeface="Roboto" pitchFamily="34" charset="-122"/>
                 <a:cs typeface="Roboto" pitchFamily="34" charset="-120"/>
               </a:rPr>
-              <a:t>A structured debrief within 40 minutes [2] uses the gap between expectation and reality [4] as the mechanism for prosocial identity change [5] — a shift in how someone understands themselves.</a:t>
+              <a:t>A structured debrief within 40 minutes [2] uses the gap between expectation and reality [4] as the mechanism for prosocial identity change [5]. The result is a shift in how someone understands themselves.</a:t>
             </a:r>
             <a:endParaRPr lang="en-US" sz="1100" dirty="0"/>
           </a:p>
@@ -10322,6 +15486,10 @@
             <a:prstDash val="solid"/>
           </a:ln>
         </p:spPr>
+        <p:txBody>
+          <a:bodyPr/>
+          <a:p/>
+        </p:txBody>
       </p:sp>
       <p:sp>
         <p:nvSpPr>
@@ -11324,7 +16492,7 @@
                 <a:ea typeface="Roboto" pitchFamily="34" charset="-122"/>
                 <a:cs typeface="Roboto" pitchFamily="34" charset="-120"/>
               </a:rPr>
-              <a:t>From a small cohort, a new model for measurable impact and inclusion.</a:t>
+              <a:t>What six trained champions can change about a global program.</a:t>
             </a:r>
             <a:endParaRPr lang="en-US" sz="2400" dirty="0"/>
           </a:p>
@@ -11352,6 +16520,10 @@
             <a:prstDash val="solid"/>
           </a:ln>
         </p:spPr>
+        <p:txBody>
+          <a:bodyPr/>
+          <a:p/>
+        </p:txBody>
       </p:sp>
       <p:sp>
         <p:nvSpPr>
@@ -11389,7 +16561,7 @@
                 <a:ea typeface="Roboto" pitchFamily="34" charset="-122"/>
                 <a:cs typeface="Roboto" pitchFamily="34" charset="-120"/>
               </a:rPr>
-              <a:t>This initial team of six will return with a repeatable framework for Transformative Volunteering. They will apply this to their own projects and also become internal models for our wider champion community. This creates a scalable way to diffuse these skills throughout our existing global network, shifting our focus from pure quantity to measurable quality.</a:t>
+              <a:t>Six trained champions return with a repeatable framework for Transformative Volunteering. They run it in their own programs and they coach peers across regions. The point of the cohort is not the six people. It is the model they become for the wider champion community, and the path that creates from quantity to quality.</a:t>
             </a:r>
             <a:endParaRPr lang="en-US" sz="1300" dirty="0"/>
           </a:p>
@@ -13520,6 +18692,10 @@
             <a:prstDash val="solid"/>
           </a:ln>
         </p:spPr>
+        <p:txBody>
+          <a:bodyPr/>
+          <a:p/>
+        </p:txBody>
       </p:sp>
       <p:sp>
         <p:nvSpPr>
@@ -13545,6 +18721,10 @@
             <a:prstDash val="solid"/>
           </a:ln>
         </p:spPr>
+        <p:txBody>
+          <a:bodyPr/>
+          <a:p/>
+        </p:txBody>
       </p:sp>
       <p:sp>
         <p:nvSpPr>
@@ -13663,7 +18843,7 @@
                 <a:ea typeface="Roboto" pitchFamily="34" charset="-122"/>
                 <a:cs typeface="Roboto" pitchFamily="34" charset="-120"/>
               </a:rPr>
-              <a:t>Awarded after the two-day campus. Validates competency in the three keystone behaviors: conducting the Brief, guiding the experience, and conducting the Debrief — trainable, repeatable facilitation skills grounded in behavioral science [1][4][5]. Included in registration.</a:t>
+              <a:t>Awarded after the two-day campus. Validates competency in the three keystone behaviors: conducting the Brief, guiding the experience, and conducting the Debrief. Trainable, repeatable facilitation skills grounded in behavioral science [1][4][5]. Included in registration.</a:t>
             </a:r>
             <a:endParaRPr lang="en-US" sz="1100" dirty="0"/>
           </a:p>
@@ -13693,6 +18873,10 @@
             <a:prstDash val="solid"/>
           </a:ln>
         </p:spPr>
+        <p:txBody>
+          <a:bodyPr/>
+          <a:p/>
+        </p:txBody>
       </p:sp>
       <p:sp>
         <p:nvSpPr>
@@ -13839,6 +19023,10 @@
             <a:prstDash val="solid"/>
           </a:ln>
         </p:spPr>
+        <p:txBody>
+          <a:bodyPr/>
+          <a:p/>
+        </p:txBody>
       </p:sp>
       <p:sp>
         <p:nvSpPr>
